--- a/POC.pptx
+++ b/POC.pptx
@@ -5,16 +5,16 @@
     <p:sldMasterId id="2147483648" r:id="rId1"/>
   </p:sldMasterIdLst>
   <p:notesMasterIdLst>
-    <p:notesMasterId r:id="rId33"/>
+    <p:notesMasterId r:id="rId31"/>
   </p:notesMasterIdLst>
   <p:sldIdLst>
-    <p:sldId id="256" r:id="rId2"/>
-    <p:sldId id="257" r:id="rId3"/>
-    <p:sldId id="258" r:id="rId4"/>
-    <p:sldId id="259" r:id="rId5"/>
-    <p:sldId id="272" r:id="rId6"/>
-    <p:sldId id="269" r:id="rId7"/>
-    <p:sldId id="268" r:id="rId8"/>
+    <p:sldId id="296" r:id="rId2"/>
+    <p:sldId id="256" r:id="rId3"/>
+    <p:sldId id="257" r:id="rId4"/>
+    <p:sldId id="258" r:id="rId5"/>
+    <p:sldId id="259" r:id="rId6"/>
+    <p:sldId id="272" r:id="rId7"/>
+    <p:sldId id="269" r:id="rId8"/>
     <p:sldId id="262" r:id="rId9"/>
     <p:sldId id="273" r:id="rId10"/>
     <p:sldId id="294" r:id="rId11"/>
@@ -26,19 +26,17 @@
     <p:sldId id="292" r:id="rId17"/>
     <p:sldId id="287" r:id="rId18"/>
     <p:sldId id="289" r:id="rId19"/>
-    <p:sldId id="288" r:id="rId20"/>
-    <p:sldId id="276" r:id="rId21"/>
+    <p:sldId id="276" r:id="rId20"/>
+    <p:sldId id="288" r:id="rId21"/>
     <p:sldId id="277" r:id="rId22"/>
-    <p:sldId id="280" r:id="rId23"/>
-    <p:sldId id="264" r:id="rId24"/>
-    <p:sldId id="281" r:id="rId25"/>
-    <p:sldId id="295" r:id="rId26"/>
-    <p:sldId id="265" r:id="rId27"/>
-    <p:sldId id="282" r:id="rId28"/>
-    <p:sldId id="283" r:id="rId29"/>
-    <p:sldId id="266" r:id="rId30"/>
-    <p:sldId id="284" r:id="rId31"/>
-    <p:sldId id="267" r:id="rId32"/>
+    <p:sldId id="264" r:id="rId23"/>
+    <p:sldId id="281" r:id="rId24"/>
+    <p:sldId id="295" r:id="rId25"/>
+    <p:sldId id="265" r:id="rId26"/>
+    <p:sldId id="283" r:id="rId27"/>
+    <p:sldId id="266" r:id="rId28"/>
+    <p:sldId id="284" r:id="rId29"/>
+    <p:sldId id="267" r:id="rId30"/>
   </p:sldIdLst>
   <p:sldSz cx="12192000" cy="6858000"/>
   <p:notesSz cx="6858000" cy="9144000"/>
@@ -3285,7 +3283,7 @@
           <a:p>
             <a:fld id="{54736815-A20C-4B10-B29D-B64D64FDFE35}" type="datetimeFigureOut">
               <a:rPr lang="fr-FR" smtClean="0"/>
-              <a:t>23/09/2026</a:t>
+              <a:t>29/09/2026</a:t>
             </a:fld>
             <a:endParaRPr lang="fr-FR"/>
           </a:p>
@@ -3596,24 +3594,7 @@
           <a:bodyPr/>
           <a:lstStyle/>
           <a:p>
-            <a:r>
-              <a:rPr lang="fr-FR" dirty="0"/>
-              <a:t>Quel problème </a:t>
-            </a:r>
-            <a:r>
-              <a:rPr lang="fr-FR" dirty="0" err="1"/>
-              <a:t>FashionInsta</a:t>
-            </a:r>
-            <a:r>
-              <a:rPr lang="fr-FR" dirty="0"/>
-              <a:t> veut résoudre ?</a:t>
-            </a:r>
-          </a:p>
-          <a:p>
-            <a:r>
-              <a:rPr lang="fr-FR" dirty="0"/>
-              <a:t>obtenir des recommandations personnalisées</a:t>
-            </a:r>
+            <a:endParaRPr lang="fr-FR" dirty="0"/>
           </a:p>
         </p:txBody>
       </p:sp>
@@ -3634,7 +3615,7 @@
           <a:p>
             <a:fld id="{8BFDC3EE-E837-4216-B82C-A4E0B6F89CB4}" type="slidenum">
               <a:rPr lang="fr-FR" smtClean="0"/>
-              <a:t>2</a:t>
+              <a:t>1</a:t>
             </a:fld>
             <a:endParaRPr lang="fr-FR"/>
           </a:p>
@@ -3643,7 +3624,7 @@
     </p:spTree>
     <p:extLst>
       <p:ext uri="{BB962C8B-B14F-4D97-AF65-F5344CB8AC3E}">
-        <p14:creationId xmlns:p14="http://schemas.microsoft.com/office/powerpoint/2010/main" val="3386629660"/>
+        <p14:creationId xmlns:p14="http://schemas.microsoft.com/office/powerpoint/2010/main" val="1295218975"/>
       </p:ext>
     </p:extLst>
   </p:cSld>
@@ -4021,6 +4002,12 @@
             <a:r>
               <a:rPr lang="fr-FR" dirty="0"/>
               <a:t>Nous avons donc des choix pertinents pour remplacer un élément de la garde robe par un élément du même style</a:t>
+            </a:r>
+          </a:p>
+          <a:p>
+            <a:r>
+              <a:rPr lang="fr-FR" dirty="0"/>
+              <a:t>Mais cela ne suffit par à proposer une recommandation avec de nouveaux vêtements</a:t>
             </a:r>
           </a:p>
         </p:txBody>
@@ -4564,7 +4551,7 @@
             </a:pPr>
             <a:r>
               <a:rPr lang="fr-FR" b="1" dirty="0"/>
-              <a:t>À partir d'un </a:t>
+              <a:t>A partir d'un </a:t>
             </a:r>
             <a:r>
               <a:rPr lang="fr-FR" b="1" dirty="0" err="1"/>
@@ -4580,7 +4567,39 @@
             </a:r>
             <a:r>
               <a:rPr lang="fr-FR" b="1" dirty="0"/>
-              <a:t> : créer des paires positives</a:t>
+              <a:t> </a:t>
+            </a:r>
+          </a:p>
+          <a:p>
+            <a:pPr marL="0" marR="0" lvl="0" indent="0" algn="l" defTabSz="914400" rtl="0" eaLnBrk="1" fontAlgn="auto" latinLnBrk="0" hangingPunct="1">
+              <a:lnSpc>
+                <a:spcPct val="100000"/>
+              </a:lnSpc>
+              <a:spcBef>
+                <a:spcPts val="0"/>
+              </a:spcBef>
+              <a:spcAft>
+                <a:spcPts val="0"/>
+              </a:spcAft>
+              <a:buClrTx/>
+              <a:buSzTx/>
+              <a:buFontTx/>
+              <a:buNone/>
+              <a:tabLst/>
+              <a:defRPr/>
+            </a:pPr>
+            <a:r>
+              <a:rPr lang="fr-FR" b="1" dirty="0"/>
+              <a:t>On peut considérer que nous avons des tenues cohérentes</a:t>
+            </a:r>
+          </a:p>
+          <a:p>
+            <a:endParaRPr lang="fr-FR" b="1" dirty="0"/>
+          </a:p>
+          <a:p>
+            <a:r>
+              <a:rPr lang="fr-FR" b="1" dirty="0"/>
+              <a:t>Réaliser des paires (chapeau =&gt; haut, haut =&gt; bas, bas =&gt; pieds)</a:t>
             </a:r>
           </a:p>
           <a:p>
@@ -4598,15 +4617,7 @@
           <a:p>
             <a:r>
               <a:rPr lang="fr-FR" dirty="0"/>
-              <a:t>on construit les paires négatives à partir des vêtements des autres </a:t>
-            </a:r>
-            <a:r>
-              <a:rPr lang="fr-FR" dirty="0" err="1"/>
-              <a:t>outfits</a:t>
-            </a:r>
-            <a:r>
-              <a:rPr lang="fr-FR" dirty="0"/>
-              <a:t> n’ayant pas de combinaison avec celui-ci.</a:t>
+              <a:t>Inversement on construit les paires négatives à partir des vêtements qui ne sont pas présents ensembles.</a:t>
             </a:r>
           </a:p>
           <a:p>
@@ -4797,64 +4808,6 @@
             </a:pPr>
             <a:endParaRPr lang="fr-FR" sz="1200" dirty="0"/>
           </a:p>
-          <a:p>
-            <a:pPr marL="0" marR="0" lvl="0" indent="0" algn="l" defTabSz="914400" rtl="0" eaLnBrk="1" fontAlgn="auto" latinLnBrk="0" hangingPunct="1">
-              <a:lnSpc>
-                <a:spcPct val="100000"/>
-              </a:lnSpc>
-              <a:spcBef>
-                <a:spcPts val="0"/>
-              </a:spcBef>
-              <a:spcAft>
-                <a:spcPts val="0"/>
-              </a:spcAft>
-              <a:buClrTx/>
-              <a:buSzTx/>
-              <a:buFontTx/>
-              <a:buNone/>
-              <a:tabLst/>
-              <a:defRPr/>
-            </a:pPr>
-            <a:r>
-              <a:rPr lang="fr-FR" sz="1200" b="1" dirty="0">
-                <a:solidFill>
-                  <a:schemeClr val="bg1"/>
-                </a:solidFill>
-                <a:latin typeface="Courier New" panose="02070309020205020404" pitchFamily="49" charset="0"/>
-              </a:rPr>
-              <a:t>Modèle pré-entrainé ex: </a:t>
-            </a:r>
-            <a:r>
-              <a:rPr lang="fr-FR" sz="1200" dirty="0" err="1">
-                <a:solidFill>
-                  <a:schemeClr val="bg1"/>
-                </a:solidFill>
-                <a:latin typeface="Courier New" panose="02070309020205020404" pitchFamily="49" charset="0"/>
-              </a:rPr>
-              <a:t>FashionCLIP</a:t>
-            </a:r>
-            <a:endParaRPr lang="fr-FR" sz="1200" dirty="0"/>
-          </a:p>
-          <a:p>
-            <a:pPr marL="0" marR="0" lvl="0" indent="0" algn="l" defTabSz="914400" rtl="0" eaLnBrk="1" fontAlgn="auto" latinLnBrk="0" hangingPunct="1">
-              <a:lnSpc>
-                <a:spcPct val="100000"/>
-              </a:lnSpc>
-              <a:spcBef>
-                <a:spcPts val="0"/>
-              </a:spcBef>
-              <a:spcAft>
-                <a:spcPts val="0"/>
-              </a:spcAft>
-              <a:buClrTx/>
-              <a:buSzTx/>
-              <a:buFontTx/>
-              <a:buNone/>
-              <a:tabLst/>
-              <a:defRPr/>
-            </a:pPr>
-            <a:endParaRPr lang="fr-FR" sz="1200" dirty="0"/>
-          </a:p>
         </p:txBody>
       </p:sp>
       <p:sp>
@@ -5064,6 +5017,23 @@
           <a:p>
             <a:r>
               <a:rPr lang="fr-FR" dirty="0"/>
+              <a:t>Le type d’algorithme de combinaisons serait à définir et tester (</a:t>
+            </a:r>
+            <a:r>
+              <a:rPr lang="fr-FR" dirty="0" err="1"/>
+              <a:t>tete</a:t>
+            </a:r>
+            <a:r>
+              <a:rPr lang="fr-FR" dirty="0"/>
+              <a:t>=&gt;haut=&gt;bas=&gt;pieds ou autre combinaisons)</a:t>
+            </a:r>
+          </a:p>
+          <a:p>
+            <a:endParaRPr lang="fr-FR" dirty="0"/>
+          </a:p>
+          <a:p>
+            <a:r>
+              <a:rPr lang="fr-FR" dirty="0"/>
               <a:t>Par exemple on pourrait commencer par le chapeau</a:t>
             </a:r>
           </a:p>
@@ -5181,15 +5151,43 @@
           <a:p>
             <a:r>
               <a:rPr lang="fr-FR" dirty="0"/>
-              <a:t>Le modèle apprend quelles combinaisons de caractéristiques représentées dans les </a:t>
+              <a:t>Approche A — </a:t>
             </a:r>
             <a:r>
               <a:rPr lang="fr-FR" dirty="0" err="1"/>
-              <a:t>embeddings</a:t>
+              <a:t>dataset</a:t>
             </a:r>
             <a:r>
               <a:rPr lang="fr-FR" dirty="0"/>
-              <a:t> sont statistiquement associées à des vêtements portés ensemble dans les données d'entraînement.</a:t>
+              <a:t> fournissant déjà les vêtements individuellement</a:t>
+            </a:r>
+          </a:p>
+          <a:p>
+            <a:r>
+              <a:rPr lang="fr-FR" dirty="0"/>
+              <a:t>Approche B — l'image d'</a:t>
+            </a:r>
+            <a:r>
+              <a:rPr lang="fr-FR" dirty="0" err="1"/>
+              <a:t>outfit</a:t>
+            </a:r>
+            <a:r>
+              <a:rPr lang="fr-FR" dirty="0"/>
+              <a:t> est accompagnée des références des vêtements</a:t>
+            </a:r>
+          </a:p>
+          <a:p>
+            <a:r>
+              <a:rPr lang="fr-FR" dirty="0"/>
+              <a:t>Approche C — partir uniquement de l'image de l'</a:t>
+            </a:r>
+            <a:r>
+              <a:rPr lang="fr-FR" dirty="0" err="1"/>
+              <a:t>outfit</a:t>
+            </a:r>
+            <a:r>
+              <a:rPr lang="fr-FR" dirty="0"/>
+              <a:t> avec segmentation</a:t>
             </a:r>
           </a:p>
         </p:txBody>
@@ -5220,7 +5218,7 @@
     </p:spTree>
     <p:extLst>
       <p:ext uri="{BB962C8B-B14F-4D97-AF65-F5344CB8AC3E}">
-        <p14:creationId xmlns:p14="http://schemas.microsoft.com/office/powerpoint/2010/main" val="2726743507"/>
+        <p14:creationId xmlns:p14="http://schemas.microsoft.com/office/powerpoint/2010/main" val="1730112122"/>
       </p:ext>
     </p:extLst>
   </p:cSld>
@@ -5276,43 +5274,15 @@
           <a:p>
             <a:r>
               <a:rPr lang="fr-FR" dirty="0"/>
-              <a:t>Approche A — </a:t>
+              <a:t>Le modèle apprend quelles combinaisons de caractéristiques représentées dans les </a:t>
             </a:r>
             <a:r>
               <a:rPr lang="fr-FR" dirty="0" err="1"/>
-              <a:t>dataset</a:t>
+              <a:t>embeddings</a:t>
             </a:r>
             <a:r>
               <a:rPr lang="fr-FR" dirty="0"/>
-              <a:t> fournissant déjà les vêtements individuellement</a:t>
-            </a:r>
-          </a:p>
-          <a:p>
-            <a:r>
-              <a:rPr lang="fr-FR" dirty="0"/>
-              <a:t>Approche B — l'image d'</a:t>
-            </a:r>
-            <a:r>
-              <a:rPr lang="fr-FR" dirty="0" err="1"/>
-              <a:t>outfit</a:t>
-            </a:r>
-            <a:r>
-              <a:rPr lang="fr-FR" dirty="0"/>
-              <a:t> est accompagnée des références des vêtements</a:t>
-            </a:r>
-          </a:p>
-          <a:p>
-            <a:r>
-              <a:rPr lang="fr-FR" dirty="0"/>
-              <a:t>Approche C — partir uniquement de l'image de l'</a:t>
-            </a:r>
-            <a:r>
-              <a:rPr lang="fr-FR" dirty="0" err="1"/>
-              <a:t>outfit</a:t>
-            </a:r>
-            <a:r>
-              <a:rPr lang="fr-FR" dirty="0"/>
-              <a:t> avec segmentation</a:t>
+              <a:t> sont statistiquement associées à des vêtements portés ensemble dans les données d'entraînement.</a:t>
             </a:r>
           </a:p>
         </p:txBody>
@@ -5343,7 +5313,7 @@
     </p:spTree>
     <p:extLst>
       <p:ext uri="{BB962C8B-B14F-4D97-AF65-F5344CB8AC3E}">
-        <p14:creationId xmlns:p14="http://schemas.microsoft.com/office/powerpoint/2010/main" val="1730112122"/>
+        <p14:creationId xmlns:p14="http://schemas.microsoft.com/office/powerpoint/2010/main" val="2726743507"/>
       </p:ext>
     </p:extLst>
   </p:cSld>
@@ -5399,7 +5369,33 @@
           <a:p>
             <a:r>
               <a:rPr lang="fr-FR" dirty="0"/>
-              <a:t>générer et classer les articles les plus pertinents</a:t>
+              <a:t>Quel problème </a:t>
+            </a:r>
+            <a:r>
+              <a:rPr lang="fr-FR" dirty="0" err="1"/>
+              <a:t>FashionInsta</a:t>
+            </a:r>
+            <a:r>
+              <a:rPr lang="fr-FR" dirty="0"/>
+              <a:t> veut résoudre ?</a:t>
+            </a:r>
+          </a:p>
+          <a:p>
+            <a:r>
+              <a:rPr lang="fr-FR" dirty="0"/>
+              <a:t>Catalogue important d’articles / difficile de trouver</a:t>
+            </a:r>
+          </a:p>
+          <a:p>
+            <a:r>
+              <a:rPr lang="fr-FR" dirty="0"/>
+              <a:t>Notre besoin cibler des articles pertinents pour nos utilisateurs</a:t>
+            </a:r>
+          </a:p>
+          <a:p>
+            <a:r>
+              <a:rPr lang="fr-FR" dirty="0"/>
+              <a:t>Augmenter nos ventes en proposant du contenu personnalisé</a:t>
             </a:r>
           </a:p>
         </p:txBody>
@@ -5430,7 +5426,7 @@
     </p:spTree>
     <p:extLst>
       <p:ext uri="{BB962C8B-B14F-4D97-AF65-F5344CB8AC3E}">
-        <p14:creationId xmlns:p14="http://schemas.microsoft.com/office/powerpoint/2010/main" val="2425188965"/>
+        <p14:creationId xmlns:p14="http://schemas.microsoft.com/office/powerpoint/2010/main" val="3386629660"/>
       </p:ext>
     </p:extLst>
   </p:cSld>
@@ -5589,40 +5585,7 @@
           <a:bodyPr/>
           <a:lstStyle/>
           <a:p>
-            <a:r>
-              <a:rPr lang="fr-FR" dirty="0"/>
-              <a:t>Aucun </a:t>
-            </a:r>
-            <a:r>
-              <a:rPr lang="fr-FR" dirty="0" err="1"/>
-              <a:t>dataset</a:t>
-            </a:r>
-            <a:r>
-              <a:rPr lang="fr-FR" dirty="0"/>
-              <a:t> identifié ne reproduit exactement le cas </a:t>
-            </a:r>
-            <a:r>
-              <a:rPr lang="fr-FR" dirty="0" err="1"/>
-              <a:t>FashionInsta</a:t>
-            </a:r>
-            <a:r>
-              <a:rPr lang="fr-FR" dirty="0"/>
-              <a:t>.</a:t>
-            </a:r>
-          </a:p>
-          <a:p>
-            <a:r>
-              <a:rPr lang="fr-FR" dirty="0"/>
-              <a:t>proposer de construire un </a:t>
-            </a:r>
-            <a:r>
-              <a:rPr lang="fr-FR" b="1" dirty="0"/>
-              <a:t>jeu expérimental hybride</a:t>
-            </a:r>
-            <a:r>
-              <a:rPr lang="fr-FR" dirty="0"/>
-              <a:t> à partir de plusieurs sources.</a:t>
-            </a:r>
+            <a:endParaRPr lang="fr-FR" dirty="0"/>
           </a:p>
         </p:txBody>
       </p:sp>
@@ -5652,7 +5615,7 @@
     </p:spTree>
     <p:extLst>
       <p:ext uri="{BB962C8B-B14F-4D97-AF65-F5344CB8AC3E}">
-        <p14:creationId xmlns:p14="http://schemas.microsoft.com/office/powerpoint/2010/main" val="3684445638"/>
+        <p14:creationId xmlns:p14="http://schemas.microsoft.com/office/powerpoint/2010/main" val="4132775967"/>
       </p:ext>
     </p:extLst>
   </p:cSld>
@@ -5706,90 +5669,6 @@
           <a:bodyPr/>
           <a:lstStyle/>
           <a:p>
-            <a:endParaRPr lang="fr-FR" dirty="0"/>
-          </a:p>
-        </p:txBody>
-      </p:sp>
-      <p:sp>
-        <p:nvSpPr>
-          <p:cNvPr id="4" name="Espace réservé du numéro de diapositive 3"/>
-          <p:cNvSpPr>
-            <a:spLocks noGrp="1"/>
-          </p:cNvSpPr>
-          <p:nvPr>
-            <p:ph type="sldNum" sz="quarter" idx="5"/>
-          </p:nvPr>
-        </p:nvSpPr>
-        <p:spPr/>
-        <p:txBody>
-          <a:bodyPr/>
-          <a:lstStyle/>
-          <a:p>
-            <a:fld id="{8BFDC3EE-E837-4216-B82C-A4E0B6F89CB4}" type="slidenum">
-              <a:rPr lang="fr-FR" smtClean="0"/>
-              <a:t>23</a:t>
-            </a:fld>
-            <a:endParaRPr lang="fr-FR"/>
-          </a:p>
-        </p:txBody>
-      </p:sp>
-    </p:spTree>
-    <p:extLst>
-      <p:ext uri="{BB962C8B-B14F-4D97-AF65-F5344CB8AC3E}">
-        <p14:creationId xmlns:p14="http://schemas.microsoft.com/office/powerpoint/2010/main" val="4132775967"/>
-      </p:ext>
-    </p:extLst>
-  </p:cSld>
-  <p:clrMapOvr>
-    <a:masterClrMapping/>
-  </p:clrMapOvr>
-</p:notes>
-</file>
-
-<file path=ppt/notesSlides/notesSlide23.xml><?xml version="1.0" encoding="utf-8"?>
-<p:notes xmlns:a="http://schemas.openxmlformats.org/drawingml/2006/main" xmlns:r="http://schemas.openxmlformats.org/officeDocument/2006/relationships" xmlns:p="http://schemas.openxmlformats.org/presentationml/2006/main">
-  <p:cSld>
-    <p:spTree>
-      <p:nvGrpSpPr>
-        <p:cNvPr id="1" name=""/>
-        <p:cNvGrpSpPr/>
-        <p:nvPr/>
-      </p:nvGrpSpPr>
-      <p:grpSpPr>
-        <a:xfrm>
-          <a:off x="0" y="0"/>
-          <a:ext cx="0" cy="0"/>
-          <a:chOff x="0" y="0"/>
-          <a:chExt cx="0" cy="0"/>
-        </a:xfrm>
-      </p:grpSpPr>
-      <p:sp>
-        <p:nvSpPr>
-          <p:cNvPr id="2" name="Espace réservé de l'image des diapositives 1"/>
-          <p:cNvSpPr>
-            <a:spLocks noGrp="1" noRot="1" noChangeAspect="1"/>
-          </p:cNvSpPr>
-          <p:nvPr>
-            <p:ph type="sldImg"/>
-          </p:nvPr>
-        </p:nvSpPr>
-        <p:spPr/>
-      </p:sp>
-      <p:sp>
-        <p:nvSpPr>
-          <p:cNvPr id="3" name="Espace réservé des notes 2"/>
-          <p:cNvSpPr>
-            <a:spLocks noGrp="1"/>
-          </p:cNvSpPr>
-          <p:nvPr>
-            <p:ph type="body" idx="1"/>
-          </p:nvPr>
-        </p:nvSpPr>
-        <p:spPr/>
-        <p:txBody>
-          <a:bodyPr/>
-          <a:lstStyle/>
-          <a:p>
             <a:r>
               <a:rPr kumimoji="0" lang="fr-FR" altLang="fr-FR" sz="1200" b="0" i="0" u="none" strike="noStrike" cap="none" normalizeH="0" baseline="0" dirty="0">
                 <a:ln>
@@ -5884,7 +5763,7 @@
           <a:p>
             <a:fld id="{8BFDC3EE-E837-4216-B82C-A4E0B6F89CB4}" type="slidenum">
               <a:rPr lang="fr-FR" smtClean="0"/>
-              <a:t>24</a:t>
+              <a:t>23</a:t>
             </a:fld>
             <a:endParaRPr lang="fr-FR"/>
           </a:p>
@@ -5903,7 +5782,7 @@
 </p:notes>
 </file>
 
-<file path=ppt/notesSlides/notesSlide24.xml><?xml version="1.0" encoding="utf-8"?>
+<file path=ppt/notesSlides/notesSlide23.xml><?xml version="1.0" encoding="utf-8"?>
 <p:notes xmlns:a="http://schemas.openxmlformats.org/drawingml/2006/main" xmlns:r="http://schemas.openxmlformats.org/officeDocument/2006/relationships" xmlns:p="http://schemas.openxmlformats.org/presentationml/2006/main">
   <p:cSld>
     <p:spTree>
@@ -6031,7 +5910,7 @@
           <a:p>
             <a:fld id="{8BFDC3EE-E837-4216-B82C-A4E0B6F89CB4}" type="slidenum">
               <a:rPr lang="fr-FR" smtClean="0"/>
-              <a:t>25</a:t>
+              <a:t>24</a:t>
             </a:fld>
             <a:endParaRPr lang="fr-FR"/>
           </a:p>
@@ -6041,6 +5920,430 @@
     <p:extLst>
       <p:ext uri="{BB962C8B-B14F-4D97-AF65-F5344CB8AC3E}">
         <p14:creationId xmlns:p14="http://schemas.microsoft.com/office/powerpoint/2010/main" val="3411214665"/>
+      </p:ext>
+    </p:extLst>
+  </p:cSld>
+  <p:clrMapOvr>
+    <a:masterClrMapping/>
+  </p:clrMapOvr>
+</p:notes>
+</file>
+
+<file path=ppt/notesSlides/notesSlide24.xml><?xml version="1.0" encoding="utf-8"?>
+<p:notes xmlns:a="http://schemas.openxmlformats.org/drawingml/2006/main" xmlns:r="http://schemas.openxmlformats.org/officeDocument/2006/relationships" xmlns:p="http://schemas.openxmlformats.org/presentationml/2006/main">
+  <p:cSld>
+    <p:spTree>
+      <p:nvGrpSpPr>
+        <p:cNvPr id="1" name=""/>
+        <p:cNvGrpSpPr/>
+        <p:nvPr/>
+      </p:nvGrpSpPr>
+      <p:grpSpPr>
+        <a:xfrm>
+          <a:off x="0" y="0"/>
+          <a:ext cx="0" cy="0"/>
+          <a:chOff x="0" y="0"/>
+          <a:chExt cx="0" cy="0"/>
+        </a:xfrm>
+      </p:grpSpPr>
+      <p:sp>
+        <p:nvSpPr>
+          <p:cNvPr id="2" name="Espace réservé de l'image des diapositives 1"/>
+          <p:cNvSpPr>
+            <a:spLocks noGrp="1" noRot="1" noChangeAspect="1"/>
+          </p:cNvSpPr>
+          <p:nvPr>
+            <p:ph type="sldImg"/>
+          </p:nvPr>
+        </p:nvSpPr>
+        <p:spPr/>
+      </p:sp>
+      <p:sp>
+        <p:nvSpPr>
+          <p:cNvPr id="3" name="Espace réservé des notes 2"/>
+          <p:cNvSpPr>
+            <a:spLocks noGrp="1"/>
+          </p:cNvSpPr>
+          <p:nvPr>
+            <p:ph type="body" idx="1"/>
+          </p:nvPr>
+        </p:nvSpPr>
+        <p:spPr/>
+        <p:txBody>
+          <a:bodyPr/>
+          <a:lstStyle/>
+          <a:p>
+            <a:r>
+              <a:rPr lang="fr-FR" sz="1200" b="0" i="0" u="none" strike="noStrike" kern="1200" dirty="0">
+                <a:solidFill>
+                  <a:schemeClr val="tx1"/>
+                </a:solidFill>
+                <a:effectLst/>
+                <a:latin typeface="+mn-lt"/>
+                <a:ea typeface="+mn-ea"/>
+                <a:cs typeface="+mn-cs"/>
+              </a:rPr>
+              <a:t>Succès du </a:t>
+            </a:r>
+            <a:r>
+              <a:rPr lang="fr-FR" sz="1200" b="0" i="0" u="none" strike="noStrike" kern="1200" dirty="0" err="1">
+                <a:solidFill>
+                  <a:schemeClr val="tx1"/>
+                </a:solidFill>
+                <a:effectLst/>
+                <a:latin typeface="+mn-lt"/>
+                <a:ea typeface="+mn-ea"/>
+                <a:cs typeface="+mn-cs"/>
+              </a:rPr>
+              <a:t>PoC</a:t>
+            </a:r>
+            <a:r>
+              <a:rPr lang="fr-FR" dirty="0">
+                <a:effectLst/>
+              </a:rPr>
+              <a:t> </a:t>
+            </a:r>
+            <a:endParaRPr lang="fr-FR" sz="1200" b="0" i="0" u="none" strike="noStrike" kern="1200" dirty="0">
+              <a:solidFill>
+                <a:schemeClr val="tx1"/>
+              </a:solidFill>
+              <a:effectLst/>
+              <a:latin typeface="+mn-lt"/>
+              <a:ea typeface="+mn-ea"/>
+              <a:cs typeface="+mn-cs"/>
+            </a:endParaRPr>
+          </a:p>
+          <a:p>
+            <a:endParaRPr lang="fr-FR" sz="1200" b="0" i="0" u="none" strike="noStrike" kern="1200" dirty="0">
+              <a:solidFill>
+                <a:schemeClr val="tx1"/>
+              </a:solidFill>
+              <a:effectLst/>
+              <a:latin typeface="+mn-lt"/>
+              <a:ea typeface="+mn-ea"/>
+              <a:cs typeface="+mn-cs"/>
+            </a:endParaRPr>
+          </a:p>
+          <a:p>
+            <a:r>
+              <a:rPr lang="fr-FR" sz="1200" b="0" i="0" u="none" strike="noStrike" kern="1200" dirty="0">
+                <a:solidFill>
+                  <a:schemeClr val="tx1"/>
+                </a:solidFill>
+                <a:effectLst/>
+                <a:latin typeface="+mn-lt"/>
+                <a:ea typeface="+mn-ea"/>
+                <a:cs typeface="+mn-cs"/>
+              </a:rPr>
+              <a:t>Faisabilité technique</a:t>
+            </a:r>
+            <a:r>
+              <a:rPr lang="fr-FR" dirty="0">
+                <a:effectLst/>
+              </a:rPr>
+              <a:t> </a:t>
+            </a:r>
+            <a:r>
+              <a:rPr lang="fr-FR" sz="1200" b="0" i="0" u="none" strike="noStrike" kern="1200" dirty="0">
+                <a:solidFill>
+                  <a:schemeClr val="tx1"/>
+                </a:solidFill>
+                <a:effectLst/>
+                <a:latin typeface="+mn-lt"/>
+                <a:ea typeface="+mn-ea"/>
+                <a:cs typeface="+mn-cs"/>
+              </a:rPr>
+              <a:t>:</a:t>
+            </a:r>
+          </a:p>
+          <a:p>
+            <a:pPr marL="171450" indent="-171450">
+              <a:buFont typeface="Arial" panose="020B0604020202020204" pitchFamily="34" charset="0"/>
+              <a:buChar char="•"/>
+            </a:pPr>
+            <a:r>
+              <a:rPr lang="fr-FR" sz="1200" b="0" i="0" u="none" strike="noStrike" kern="1200" dirty="0">
+                <a:solidFill>
+                  <a:schemeClr val="tx1"/>
+                </a:solidFill>
+                <a:effectLst/>
+                <a:latin typeface="+mn-lt"/>
+                <a:ea typeface="+mn-ea"/>
+                <a:cs typeface="+mn-cs"/>
+              </a:rPr>
+              <a:t>segmentation exploitable</a:t>
+            </a:r>
+            <a:r>
+              <a:rPr lang="fr-FR" dirty="0">
+                <a:effectLst/>
+              </a:rPr>
+              <a:t> </a:t>
+            </a:r>
+          </a:p>
+          <a:p>
+            <a:pPr marL="171450" indent="-171450">
+              <a:buFont typeface="Arial" panose="020B0604020202020204" pitchFamily="34" charset="0"/>
+              <a:buChar char="•"/>
+            </a:pPr>
+            <a:r>
+              <a:rPr lang="fr-FR" sz="1200" b="0" i="0" u="none" strike="noStrike" kern="1200" dirty="0" err="1">
+                <a:solidFill>
+                  <a:schemeClr val="tx1"/>
+                </a:solidFill>
+                <a:effectLst/>
+                <a:latin typeface="+mn-lt"/>
+                <a:ea typeface="+mn-ea"/>
+                <a:cs typeface="+mn-cs"/>
+              </a:rPr>
+              <a:t>embeddings</a:t>
+            </a:r>
+            <a:r>
+              <a:rPr lang="fr-FR" sz="1200" b="0" i="0" u="none" strike="noStrike" kern="1200" dirty="0">
+                <a:solidFill>
+                  <a:schemeClr val="tx1"/>
+                </a:solidFill>
+                <a:effectLst/>
+                <a:latin typeface="+mn-lt"/>
+                <a:ea typeface="+mn-ea"/>
+                <a:cs typeface="+mn-cs"/>
+              </a:rPr>
+              <a:t> exploitables</a:t>
+            </a:r>
+            <a:r>
+              <a:rPr lang="fr-FR" dirty="0">
+                <a:effectLst/>
+              </a:rPr>
+              <a:t> </a:t>
+            </a:r>
+          </a:p>
+          <a:p>
+            <a:pPr marL="171450" indent="-171450">
+              <a:buFont typeface="Arial" panose="020B0604020202020204" pitchFamily="34" charset="0"/>
+              <a:buChar char="•"/>
+            </a:pPr>
+            <a:r>
+              <a:rPr lang="fr-FR" sz="1200" b="0" i="0" u="none" strike="noStrike" kern="1200" dirty="0">
+                <a:solidFill>
+                  <a:schemeClr val="tx1"/>
+                </a:solidFill>
+                <a:effectLst/>
+                <a:latin typeface="+mn-lt"/>
+                <a:ea typeface="+mn-ea"/>
+                <a:cs typeface="+mn-cs"/>
+              </a:rPr>
+              <a:t>caractéristiques suffisamment fiables</a:t>
+            </a:r>
+            <a:r>
+              <a:rPr lang="fr-FR" dirty="0">
+                <a:effectLst/>
+              </a:rPr>
+              <a:t> </a:t>
+            </a:r>
+          </a:p>
+          <a:p>
+            <a:pPr marL="0" indent="0">
+              <a:buFont typeface="Arial" panose="020B0604020202020204" pitchFamily="34" charset="0"/>
+              <a:buNone/>
+            </a:pPr>
+            <a:endParaRPr lang="fr-FR" sz="1200" b="0" i="0" u="none" strike="noStrike" kern="1200" dirty="0">
+              <a:solidFill>
+                <a:schemeClr val="tx1"/>
+              </a:solidFill>
+              <a:effectLst/>
+              <a:latin typeface="+mn-lt"/>
+              <a:ea typeface="+mn-ea"/>
+              <a:cs typeface="+mn-cs"/>
+            </a:endParaRPr>
+          </a:p>
+          <a:p>
+            <a:pPr marL="0" indent="0">
+              <a:buFont typeface="Arial" panose="020B0604020202020204" pitchFamily="34" charset="0"/>
+              <a:buNone/>
+            </a:pPr>
+            <a:r>
+              <a:rPr lang="fr-FR" sz="1200" b="0" i="0" u="none" strike="noStrike" kern="1200" dirty="0">
+                <a:solidFill>
+                  <a:schemeClr val="tx1"/>
+                </a:solidFill>
+                <a:effectLst/>
+                <a:latin typeface="+mn-lt"/>
+                <a:ea typeface="+mn-ea"/>
+                <a:cs typeface="+mn-cs"/>
+              </a:rPr>
+              <a:t>Pertinence</a:t>
+            </a:r>
+            <a:r>
+              <a:rPr lang="fr-FR" dirty="0">
+                <a:effectLst/>
+              </a:rPr>
+              <a:t> : </a:t>
+            </a:r>
+          </a:p>
+          <a:p>
+            <a:pPr marL="171450" indent="-171450">
+              <a:buFont typeface="Arial" panose="020B0604020202020204" pitchFamily="34" charset="0"/>
+              <a:buChar char="•"/>
+            </a:pPr>
+            <a:r>
+              <a:rPr lang="fr-FR" sz="1200" b="0" i="0" u="none" strike="noStrike" kern="1200" dirty="0">
+                <a:solidFill>
+                  <a:schemeClr val="tx1"/>
+                </a:solidFill>
+                <a:effectLst/>
+                <a:latin typeface="+mn-lt"/>
+                <a:ea typeface="+mn-ea"/>
+                <a:cs typeface="+mn-cs"/>
+              </a:rPr>
+              <a:t>modèle de compatibilité performant</a:t>
+            </a:r>
+            <a:r>
+              <a:rPr lang="fr-FR" dirty="0">
+                <a:effectLst/>
+              </a:rPr>
+              <a:t> </a:t>
+            </a:r>
+          </a:p>
+          <a:p>
+            <a:pPr marL="171450" indent="-171450">
+              <a:buFont typeface="Arial" panose="020B0604020202020204" pitchFamily="34" charset="0"/>
+              <a:buChar char="•"/>
+            </a:pPr>
+            <a:r>
+              <a:rPr lang="fr-FR" sz="1200" b="0" i="0" u="none" strike="noStrike" kern="1200" dirty="0">
+                <a:solidFill>
+                  <a:schemeClr val="tx1"/>
+                </a:solidFill>
+                <a:effectLst/>
+                <a:latin typeface="+mn-lt"/>
+                <a:ea typeface="+mn-ea"/>
+                <a:cs typeface="+mn-cs"/>
+              </a:rPr>
+              <a:t>recommandations Top-K pertinentes</a:t>
+            </a:r>
+            <a:r>
+              <a:rPr lang="fr-FR" dirty="0">
+                <a:effectLst/>
+              </a:rPr>
+              <a:t> </a:t>
+            </a:r>
+          </a:p>
+          <a:p>
+            <a:pPr marL="0" indent="0">
+              <a:buFont typeface="Arial" panose="020B0604020202020204" pitchFamily="34" charset="0"/>
+              <a:buNone/>
+            </a:pPr>
+            <a:endParaRPr lang="fr-FR" sz="1200" b="0" i="0" u="none" strike="noStrike" kern="1200" dirty="0">
+              <a:solidFill>
+                <a:schemeClr val="tx1"/>
+              </a:solidFill>
+              <a:effectLst/>
+              <a:latin typeface="+mn-lt"/>
+              <a:ea typeface="+mn-ea"/>
+              <a:cs typeface="+mn-cs"/>
+            </a:endParaRPr>
+          </a:p>
+          <a:p>
+            <a:pPr marL="0" indent="0">
+              <a:buFont typeface="Arial" panose="020B0604020202020204" pitchFamily="34" charset="0"/>
+              <a:buNone/>
+            </a:pPr>
+            <a:r>
+              <a:rPr lang="fr-FR" sz="1200" b="0" i="0" u="none" strike="noStrike" kern="1200" dirty="0">
+                <a:solidFill>
+                  <a:schemeClr val="tx1"/>
+                </a:solidFill>
+                <a:effectLst/>
+                <a:latin typeface="+mn-lt"/>
+                <a:ea typeface="+mn-ea"/>
+                <a:cs typeface="+mn-cs"/>
+              </a:rPr>
+              <a:t>Valeur métier</a:t>
+            </a:r>
+            <a:r>
+              <a:rPr lang="fr-FR" dirty="0">
+                <a:effectLst/>
+              </a:rPr>
+              <a:t> </a:t>
+            </a:r>
+            <a:r>
+              <a:rPr lang="fr-FR" sz="1200" b="0" i="0" u="none" strike="noStrike" kern="1200" dirty="0">
+                <a:solidFill>
+                  <a:schemeClr val="tx1"/>
+                </a:solidFill>
+                <a:effectLst/>
+                <a:latin typeface="+mn-lt"/>
+                <a:ea typeface="+mn-ea"/>
+                <a:cs typeface="+mn-cs"/>
+              </a:rPr>
+              <a:t>:</a:t>
+            </a:r>
+          </a:p>
+          <a:p>
+            <a:pPr marL="171450" indent="-171450">
+              <a:buFont typeface="Arial" panose="020B0604020202020204" pitchFamily="34" charset="0"/>
+              <a:buChar char="•"/>
+            </a:pPr>
+            <a:r>
+              <a:rPr lang="fr-FR" sz="1200" b="0" i="0" u="none" strike="noStrike" kern="1200" dirty="0">
+                <a:solidFill>
+                  <a:schemeClr val="tx1"/>
+                </a:solidFill>
+                <a:effectLst/>
+                <a:latin typeface="+mn-lt"/>
+                <a:ea typeface="+mn-ea"/>
+                <a:cs typeface="+mn-cs"/>
+              </a:rPr>
+              <a:t>meilleure personnalisation que la </a:t>
+            </a:r>
+            <a:r>
+              <a:rPr lang="fr-FR" sz="1200" b="0" i="0" u="none" strike="noStrike" kern="1200" dirty="0" err="1">
+                <a:solidFill>
+                  <a:schemeClr val="tx1"/>
+                </a:solidFill>
+                <a:effectLst/>
+                <a:latin typeface="+mn-lt"/>
+                <a:ea typeface="+mn-ea"/>
+                <a:cs typeface="+mn-cs"/>
+              </a:rPr>
+              <a:t>baseline</a:t>
+            </a:r>
+            <a:r>
+              <a:rPr lang="fr-FR" dirty="0">
+                <a:effectLst/>
+              </a:rPr>
+              <a:t> </a:t>
+            </a:r>
+            <a:endParaRPr lang="fr-FR" dirty="0"/>
+          </a:p>
+        </p:txBody>
+      </p:sp>
+      <p:sp>
+        <p:nvSpPr>
+          <p:cNvPr id="4" name="Espace réservé du numéro de diapositive 3"/>
+          <p:cNvSpPr>
+            <a:spLocks noGrp="1"/>
+          </p:cNvSpPr>
+          <p:nvPr>
+            <p:ph type="sldNum" sz="quarter" idx="5"/>
+          </p:nvPr>
+        </p:nvSpPr>
+        <p:spPr/>
+        <p:txBody>
+          <a:bodyPr/>
+          <a:lstStyle/>
+          <a:p>
+            <a:fld id="{8BFDC3EE-E837-4216-B82C-A4E0B6F89CB4}" type="slidenum">
+              <a:rPr lang="fr-FR" smtClean="0"/>
+              <a:t>25</a:t>
+            </a:fld>
+            <a:endParaRPr lang="fr-FR"/>
+          </a:p>
+        </p:txBody>
+      </p:sp>
+    </p:spTree>
+    <p:extLst>
+      <p:ext uri="{BB962C8B-B14F-4D97-AF65-F5344CB8AC3E}">
+        <p14:creationId xmlns:p14="http://schemas.microsoft.com/office/powerpoint/2010/main" val="1853774523"/>
       </p:ext>
     </p:extLst>
   </p:cSld>
@@ -6095,135 +6398,9 @@
           <a:lstStyle/>
           <a:p>
             <a:r>
-              <a:rPr lang="fr-FR" b="1" dirty="0"/>
-              <a:t>Critères de succès métier</a:t>
-            </a:r>
-          </a:p>
-          <a:p>
-            <a:r>
               <a:rPr lang="fr-FR" dirty="0"/>
-              <a:t>Le </a:t>
-            </a:r>
-            <a:r>
-              <a:rPr lang="fr-FR" dirty="0" err="1"/>
-              <a:t>PoC</a:t>
-            </a:r>
-            <a:r>
-              <a:rPr lang="fr-FR" dirty="0"/>
-              <a:t> sera considéré comme concluant s’il permet de démontrer qu’une recommandation personnalisée peut apporter une valeur mesurable pour </a:t>
-            </a:r>
-            <a:r>
-              <a:rPr lang="fr-FR" dirty="0" err="1"/>
-              <a:t>FashionInsta</a:t>
-            </a:r>
-            <a:r>
-              <a:rPr lang="fr-FR" dirty="0"/>
-              <a:t>.</a:t>
-            </a:r>
-          </a:p>
-          <a:p>
-            <a:r>
-              <a:rPr lang="fr-FR" b="1" dirty="0"/>
-              <a:t>Pertinence</a:t>
-            </a:r>
-            <a:endParaRPr lang="fr-FR" dirty="0"/>
-          </a:p>
-          <a:p>
-            <a:r>
-              <a:rPr lang="fr-FR" dirty="0"/>
-              <a:t>Les articles recommandés correspondent aux préférences et comportements des utilisateurs.</a:t>
-            </a:r>
-          </a:p>
-          <a:p>
-            <a:r>
-              <a:rPr lang="fr-FR" dirty="0"/>
-              <a:t>Les recommandations sont suffisamment pertinentes dans les premières positions du classement.</a:t>
-            </a:r>
-          </a:p>
-          <a:p>
-            <a:r>
-              <a:rPr lang="fr-FR" b="1" dirty="0"/>
-              <a:t>Personnalisation</a:t>
-            </a:r>
-            <a:endParaRPr lang="fr-FR" dirty="0"/>
-          </a:p>
-          <a:p>
-            <a:r>
-              <a:rPr lang="fr-FR" dirty="0"/>
-              <a:t>Les recommandations diffèrent selon les profils et les historiques utilisateurs.</a:t>
-            </a:r>
-          </a:p>
-          <a:p>
-            <a:r>
-              <a:rPr lang="fr-FR" dirty="0"/>
-              <a:t>Le système est capable d’exploiter les préférences individuelles plutôt que de proposer uniquement les articles les plus populaires.</a:t>
-            </a:r>
-          </a:p>
-          <a:p>
-            <a:r>
-              <a:rPr lang="fr-FR" b="1" dirty="0"/>
-              <a:t>Couverture</a:t>
-            </a:r>
-            <a:endParaRPr lang="fr-FR" dirty="0"/>
-          </a:p>
-          <a:p>
-            <a:r>
-              <a:rPr lang="fr-FR" dirty="0"/>
-              <a:t>Les recommandations ne se limitent pas à un nombre réduit d’articles ou de catégories.</a:t>
-            </a:r>
-          </a:p>
-          <a:p>
-            <a:r>
-              <a:rPr lang="fr-FR" dirty="0"/>
-              <a:t>Une part significative du catalogue peut être recommandée.</a:t>
-            </a:r>
-          </a:p>
-          <a:p>
-            <a:r>
-              <a:rPr lang="fr-FR" b="1" dirty="0"/>
-              <a:t>Faisabilité</a:t>
-            </a:r>
-            <a:endParaRPr lang="fr-FR" dirty="0"/>
-          </a:p>
-          <a:p>
-            <a:r>
-              <a:rPr lang="fr-FR" dirty="0"/>
-              <a:t>Les données nécessaires sont disponibles ou accessibles.</a:t>
-            </a:r>
-          </a:p>
-          <a:p>
-            <a:r>
-              <a:rPr lang="fr-FR" dirty="0"/>
-              <a:t>L’approche peut être mise en œuvre avec une complexité et un coût compatibles avec les objectifs du projet.</a:t>
-            </a:r>
-          </a:p>
-          <a:p>
-            <a:r>
-              <a:rPr lang="fr-FR" b="1" dirty="0"/>
-              <a:t>Décision attendue du </a:t>
-            </a:r>
-            <a:r>
-              <a:rPr lang="fr-FR" b="1" dirty="0" err="1"/>
-              <a:t>PoC</a:t>
-            </a:r>
-            <a:endParaRPr lang="fr-FR" dirty="0"/>
-          </a:p>
-          <a:p>
-            <a:r>
-              <a:rPr lang="fr-FR" dirty="0"/>
-              <a:t>Déterminer si une solution de recommandation personnalisée présente un niveau de pertinence et de faisabilité suffisant pour justifier le passage à un </a:t>
-            </a:r>
-            <a:r>
-              <a:rPr lang="fr-FR" b="1" dirty="0"/>
-              <a:t>MVP</a:t>
-            </a:r>
-            <a:r>
-              <a:rPr lang="fr-FR" dirty="0"/>
-              <a:t>.</a:t>
-            </a:r>
-          </a:p>
-          <a:p>
-            <a:endParaRPr lang="fr-FR" dirty="0"/>
+              <a:t>déterminer avec le métier quel niveau de pertinence rend la fonctionnalité exploitable.</a:t>
+            </a:r>
           </a:p>
         </p:txBody>
       </p:sp>
@@ -6253,7 +6430,7 @@
     </p:spTree>
     <p:extLst>
       <p:ext uri="{BB962C8B-B14F-4D97-AF65-F5344CB8AC3E}">
-        <p14:creationId xmlns:p14="http://schemas.microsoft.com/office/powerpoint/2010/main" val="1853774523"/>
+        <p14:creationId xmlns:p14="http://schemas.microsoft.com/office/powerpoint/2010/main" val="554297310"/>
       </p:ext>
     </p:extLst>
   </p:cSld>
@@ -6307,174 +6484,6 @@
           <a:bodyPr/>
           <a:lstStyle/>
           <a:p>
-            <a:r>
-              <a:rPr lang="fr-FR" b="1" dirty="0"/>
-              <a:t>Top-K</a:t>
-            </a:r>
-            <a:r>
-              <a:rPr lang="fr-FR" dirty="0"/>
-              <a:t> signifie : </a:t>
-            </a:r>
-            <a:r>
-              <a:rPr lang="fr-FR" b="1" dirty="0"/>
-              <a:t>on sélectionne les K meilleurs résultats parmi tous les candidats</a:t>
-            </a:r>
-            <a:r>
-              <a:rPr lang="fr-FR" dirty="0"/>
-              <a:t>.</a:t>
-            </a:r>
-          </a:p>
-          <a:p>
-            <a:endParaRPr lang="fr-FR" dirty="0"/>
-          </a:p>
-          <a:p>
-            <a:r>
-              <a:rPr lang="fr-FR" b="1" dirty="0" err="1"/>
-              <a:t>Precision@K</a:t>
-            </a:r>
-            <a:endParaRPr lang="fr-FR" b="1" dirty="0"/>
-          </a:p>
-          <a:p>
-            <a:r>
-              <a:rPr lang="fr-FR" dirty="0"/>
-              <a:t>La </a:t>
-            </a:r>
-            <a:r>
-              <a:rPr lang="fr-FR" b="1" dirty="0" err="1"/>
-              <a:t>Precision@K</a:t>
-            </a:r>
-            <a:r>
-              <a:rPr lang="fr-FR" dirty="0"/>
-              <a:t> mesure :</a:t>
-            </a:r>
-          </a:p>
-          <a:p>
-            <a:r>
-              <a:rPr lang="fr-FR" dirty="0"/>
-              <a:t>Parmi les K vêtements recommandés, combien sont pertinents ?</a:t>
-            </a:r>
-          </a:p>
-          <a:p>
-            <a:r>
-              <a:rPr lang="fr-FR" dirty="0"/>
-              <a:t>"Est-ce que mes recommandations sont globalement pertinentes ?« </a:t>
-            </a:r>
-          </a:p>
-          <a:p>
-            <a:endParaRPr lang="fr-FR" dirty="0"/>
-          </a:p>
-          <a:p>
-            <a:r>
-              <a:rPr lang="fr-FR" b="1" dirty="0" err="1"/>
-              <a:t>Recall@K</a:t>
-            </a:r>
-            <a:endParaRPr lang="fr-FR" b="1" dirty="0"/>
-          </a:p>
-          <a:p>
-            <a:r>
-              <a:rPr lang="fr-FR" dirty="0"/>
-              <a:t>Parmi tous les vêtements pertinents qui auraient pu être recommandés, combien ont été retrouvés dans les K premiers ?</a:t>
-            </a:r>
-          </a:p>
-          <a:p>
-            <a:endParaRPr lang="fr-FR" dirty="0"/>
-          </a:p>
-          <a:p>
-            <a:r>
-              <a:rPr lang="fr-FR" b="1" dirty="0" err="1"/>
-              <a:t>Precision</a:t>
-            </a:r>
-            <a:r>
-              <a:rPr lang="fr-FR" dirty="0"/>
-              <a:t> → qualité de ce que je recommande</a:t>
-            </a:r>
-          </a:p>
-          <a:p>
-            <a:r>
-              <a:rPr lang="fr-FR" b="1" dirty="0" err="1"/>
-              <a:t>Recall</a:t>
-            </a:r>
-            <a:r>
-              <a:rPr lang="fr-FR" dirty="0"/>
-              <a:t> → capacité à retrouver ce qui est pertinent</a:t>
-            </a:r>
-          </a:p>
-          <a:p>
-            <a:endParaRPr lang="fr-FR" dirty="0"/>
-          </a:p>
-          <a:p>
-            <a:endParaRPr lang="fr-FR" dirty="0"/>
-          </a:p>
-          <a:p>
-            <a:r>
-              <a:rPr lang="fr-FR" b="1" dirty="0"/>
-              <a:t>NDCG@K</a:t>
-            </a:r>
-          </a:p>
-          <a:p>
-            <a:r>
-              <a:rPr lang="fr-FR" dirty="0"/>
-              <a:t>La NDCG tient compte </a:t>
-            </a:r>
-            <a:r>
-              <a:rPr lang="fr-FR" b="1" dirty="0"/>
-              <a:t>de la position des recommandations</a:t>
-            </a:r>
-            <a:r>
-              <a:rPr lang="fr-FR" dirty="0"/>
-              <a:t>.</a:t>
-            </a:r>
-          </a:p>
-          <a:p>
-            <a:r>
-              <a:rPr lang="fr-FR" dirty="0"/>
-              <a:t>Pour une application de recommandation, c'est une métrique particulièrement intéressante parce que l'utilisateur regarde généralement les premiers résultats.</a:t>
-            </a:r>
-          </a:p>
-          <a:p>
-            <a:endParaRPr lang="fr-FR" b="1" dirty="0"/>
-          </a:p>
-          <a:p>
-            <a:endParaRPr lang="fr-FR" b="1" dirty="0"/>
-          </a:p>
-          <a:p>
-            <a:r>
-              <a:rPr lang="fr-FR" b="1" dirty="0"/>
-              <a:t>MRR = </a:t>
-            </a:r>
-            <a:r>
-              <a:rPr lang="fr-FR" b="1" dirty="0" err="1"/>
-              <a:t>Mean</a:t>
-            </a:r>
-            <a:r>
-              <a:rPr lang="fr-FR" b="1" dirty="0"/>
-              <a:t> </a:t>
-            </a:r>
-            <a:r>
-              <a:rPr lang="fr-FR" b="1" dirty="0" err="1"/>
-              <a:t>Reciprocal</a:t>
-            </a:r>
-            <a:r>
-              <a:rPr lang="fr-FR" b="1" dirty="0"/>
-              <a:t> Rank</a:t>
-            </a:r>
-          </a:p>
-          <a:p>
-            <a:r>
-              <a:rPr lang="fr-FR" b="1" dirty="0"/>
-              <a:t>À quelle position apparaît la première recommandation pertinente ?</a:t>
-            </a:r>
-          </a:p>
-          <a:p>
-            <a:endParaRPr lang="fr-FR" b="1" dirty="0"/>
-          </a:p>
-          <a:p>
-            <a:r>
-              <a:rPr lang="fr-FR" dirty="0"/>
-              <a:t>Le MRR est ensuite calculé comme la moyenne de ces valeurs sur tous les utilisateurs/tenues du jeu de test.</a:t>
-            </a:r>
-          </a:p>
-          <a:p>
             <a:endParaRPr lang="fr-FR" dirty="0"/>
           </a:p>
         </p:txBody>
@@ -6505,7 +6514,7 @@
     </p:spTree>
     <p:extLst>
       <p:ext uri="{BB962C8B-B14F-4D97-AF65-F5344CB8AC3E}">
-        <p14:creationId xmlns:p14="http://schemas.microsoft.com/office/powerpoint/2010/main" val="2730413815"/>
+        <p14:creationId xmlns:p14="http://schemas.microsoft.com/office/powerpoint/2010/main" val="1476880267"/>
       </p:ext>
     </p:extLst>
   </p:cSld>
@@ -6560,9 +6569,139 @@
           <a:lstStyle/>
           <a:p>
             <a:r>
+              <a:rPr lang="fr-FR" b="1" dirty="0"/>
+              <a:t>Cadrage + sélection </a:t>
+            </a:r>
+            <a:r>
+              <a:rPr lang="fr-FR" b="1" dirty="0" err="1"/>
+              <a:t>dataset</a:t>
+            </a:r>
+            <a:br>
               <a:rPr lang="fr-FR" dirty="0"/>
-              <a:t>déterminer avec le métier quel niveau de pertinence rend la fonctionnalité exploitable.</a:t>
-            </a:r>
+            </a:br>
+            <a:r>
+              <a:rPr lang="fr-FR" dirty="0"/>
+              <a:t>Le PO apporte le besoin et le périmètre ; le Data </a:t>
+            </a:r>
+            <a:r>
+              <a:rPr lang="fr-FR" dirty="0" err="1"/>
+              <a:t>Scientist</a:t>
+            </a:r>
+            <a:r>
+              <a:rPr lang="fr-FR" dirty="0"/>
+              <a:t> vérifie que les données permettent réellement de répondre au problème.</a:t>
+            </a:r>
+          </a:p>
+          <a:p>
+            <a:r>
+              <a:rPr lang="fr-FR" b="1" dirty="0"/>
+              <a:t>Préparation du jeu de test</a:t>
+            </a:r>
+            <a:br>
+              <a:rPr lang="fr-FR" dirty="0"/>
+            </a:br>
+            <a:r>
+              <a:rPr lang="fr-FR" dirty="0"/>
+              <a:t>Le Data </a:t>
+            </a:r>
+            <a:r>
+              <a:rPr lang="fr-FR" dirty="0" err="1"/>
+              <a:t>Scientist</a:t>
+            </a:r>
+            <a:r>
+              <a:rPr lang="fr-FR" dirty="0"/>
+              <a:t> construit le protocole expérimental. Le PO vérifie que les cas testés correspondent bien au cas d'usage attendu.</a:t>
+            </a:r>
+          </a:p>
+          <a:p>
+            <a:r>
+              <a:rPr lang="fr-FR" b="1" dirty="0"/>
+              <a:t>Baseline + similarité / compatibilité</a:t>
+            </a:r>
+            <a:br>
+              <a:rPr lang="fr-FR" dirty="0"/>
+            </a:br>
+            <a:r>
+              <a:rPr lang="fr-FR" dirty="0"/>
+              <a:t>Le </a:t>
+            </a:r>
+            <a:r>
+              <a:rPr lang="fr-FR" b="1" dirty="0"/>
+              <a:t>ML </a:t>
+            </a:r>
+            <a:r>
+              <a:rPr lang="fr-FR" b="1" dirty="0" err="1"/>
+              <a:t>Engineer</a:t>
+            </a:r>
+            <a:r>
+              <a:rPr lang="fr-FR" dirty="0"/>
+              <a:t> prend en charge l'implémentation des approches : </a:t>
+            </a:r>
+            <a:r>
+              <a:rPr lang="fr-FR" dirty="0" err="1"/>
+              <a:t>embeddings</a:t>
+            </a:r>
+            <a:r>
+              <a:rPr lang="fr-FR" dirty="0"/>
+              <a:t>, caractéristiques, recherche de similarité, modèle de compatibilité, etc.</a:t>
+            </a:r>
+          </a:p>
+          <a:p>
+            <a:r>
+              <a:rPr lang="fr-FR" b="1" dirty="0"/>
+              <a:t>Évaluation + comparaison</a:t>
+            </a:r>
+            <a:br>
+              <a:rPr lang="fr-FR" dirty="0"/>
+            </a:br>
+            <a:r>
+              <a:rPr lang="fr-FR" b="1" dirty="0"/>
+              <a:t>Data </a:t>
+            </a:r>
+            <a:r>
+              <a:rPr lang="fr-FR" b="1" dirty="0" err="1"/>
+              <a:t>Scientist</a:t>
+            </a:r>
+            <a:r>
+              <a:rPr lang="fr-FR" dirty="0"/>
+              <a:t> : métriques et analyse statistique ; </a:t>
+            </a:r>
+          </a:p>
+          <a:p>
+            <a:r>
+              <a:rPr lang="fr-FR" b="1" dirty="0"/>
+              <a:t>Expertise métier</a:t>
+            </a:r>
+            <a:r>
+              <a:rPr lang="fr-FR" dirty="0"/>
+              <a:t> : pertinence des recommandations ; </a:t>
+            </a:r>
+          </a:p>
+          <a:p>
+            <a:r>
+              <a:rPr lang="fr-FR" b="1" dirty="0"/>
+              <a:t>PO</a:t>
+            </a:r>
+            <a:r>
+              <a:rPr lang="fr-FR" dirty="0"/>
+              <a:t> : adéquation avec les objectifs du produit. </a:t>
+            </a:r>
+          </a:p>
+          <a:p>
+            <a:r>
+              <a:rPr lang="fr-FR" b="1" dirty="0"/>
+              <a:t>Synthèse + recommandation</a:t>
+            </a:r>
+            <a:br>
+              <a:rPr lang="fr-FR" dirty="0"/>
+            </a:br>
+            <a:r>
+              <a:rPr lang="fr-FR" dirty="0"/>
+              <a:t>Le PO porte la décision produit, avec l'expertise métier pour déterminer si les résultats sont réellement exploitables.</a:t>
+            </a:r>
+          </a:p>
+          <a:p>
+            <a:endParaRPr lang="fr-FR" dirty="0"/>
           </a:p>
         </p:txBody>
       </p:sp>
@@ -6592,7 +6731,7 @@
     </p:spTree>
     <p:extLst>
       <p:ext uri="{BB962C8B-B14F-4D97-AF65-F5344CB8AC3E}">
-        <p14:creationId xmlns:p14="http://schemas.microsoft.com/office/powerpoint/2010/main" val="554297310"/>
+        <p14:creationId xmlns:p14="http://schemas.microsoft.com/office/powerpoint/2010/main" val="3725167454"/>
       </p:ext>
     </p:extLst>
   </p:cSld>
@@ -6647,112 +6786,8 @@
           <a:lstStyle/>
           <a:p>
             <a:r>
-              <a:rPr lang="fr-FR" b="1" dirty="0"/>
-              <a:t>Planning, ressources et risques</a:t>
-            </a:r>
-          </a:p>
-          <a:p>
-            <a:r>
-              <a:rPr lang="fr-FR" b="1" dirty="0"/>
-              <a:t>Planning indicatif — 4 à 6 semaines</a:t>
-            </a:r>
-          </a:p>
-          <a:p>
-            <a:r>
-              <a:rPr lang="fr-FR" dirty="0" err="1"/>
-              <a:t>PhaseDuréeLivrablesCadrage</a:t>
-            </a:r>
-            <a:r>
               <a:rPr lang="fr-FR" dirty="0"/>
-              <a:t> et sélection des données3–5 </a:t>
-            </a:r>
-            <a:r>
-              <a:rPr lang="fr-FR" dirty="0" err="1"/>
-              <a:t>joursPérimètre</a:t>
-            </a:r>
-            <a:r>
-              <a:rPr lang="fr-FR" dirty="0"/>
-              <a:t>, données et critères de </a:t>
-            </a:r>
-            <a:r>
-              <a:rPr lang="fr-FR" dirty="0" err="1"/>
-              <a:t>succèsRecherche</a:t>
-            </a:r>
-            <a:r>
-              <a:rPr lang="fr-FR" dirty="0"/>
-              <a:t> et préparation des datasets3–5 </a:t>
-            </a:r>
-            <a:r>
-              <a:rPr lang="fr-FR" dirty="0" err="1"/>
-              <a:t>joursDataset</a:t>
-            </a:r>
-            <a:r>
-              <a:rPr lang="fr-FR" dirty="0"/>
-              <a:t> exploitable pour le </a:t>
-            </a:r>
-            <a:r>
-              <a:rPr lang="fr-FR" dirty="0" err="1"/>
-              <a:t>PoCBaseline</a:t>
-            </a:r>
-            <a:r>
-              <a:rPr lang="fr-FR" dirty="0"/>
-              <a:t> et approche ML1 </a:t>
-            </a:r>
-            <a:r>
-              <a:rPr lang="fr-FR" dirty="0" err="1"/>
-              <a:t>semainePremière</a:t>
-            </a:r>
-            <a:r>
-              <a:rPr lang="fr-FR" dirty="0"/>
-              <a:t> recommandation de référence + modèle </a:t>
-            </a:r>
-            <a:r>
-              <a:rPr lang="fr-FR" dirty="0" err="1"/>
-              <a:t>MLApproche</a:t>
-            </a:r>
-            <a:r>
-              <a:rPr lang="fr-FR" dirty="0"/>
-              <a:t> IA multimodale1 </a:t>
-            </a:r>
-            <a:r>
-              <a:rPr lang="fr-FR" dirty="0" err="1"/>
-              <a:t>semainePrototype</a:t>
-            </a:r>
-            <a:r>
-              <a:rPr lang="fr-FR" dirty="0"/>
-              <a:t> de recommandation </a:t>
-            </a:r>
-            <a:r>
-              <a:rPr lang="fr-FR" dirty="0" err="1"/>
-              <a:t>multimodaleÉvaluation</a:t>
-            </a:r>
-            <a:r>
-              <a:rPr lang="fr-FR" dirty="0"/>
-              <a:t> et comparaison3–5 </a:t>
-            </a:r>
-            <a:r>
-              <a:rPr lang="fr-FR" dirty="0" err="1"/>
-              <a:t>joursRésultats</a:t>
-            </a:r>
-            <a:r>
-              <a:rPr lang="fr-FR" dirty="0"/>
-              <a:t>, métriques et </a:t>
-            </a:r>
-            <a:r>
-              <a:rPr lang="fr-FR" dirty="0" err="1"/>
-              <a:t>analyseSynthèse</a:t>
-            </a:r>
-            <a:r>
-              <a:rPr lang="fr-FR" dirty="0"/>
-              <a:t> et recommandations2–3 </a:t>
-            </a:r>
-            <a:r>
-              <a:rPr lang="fr-FR" dirty="0" err="1"/>
-              <a:t>joursBilan</a:t>
-            </a:r>
-            <a:r>
-              <a:rPr lang="fr-FR" dirty="0"/>
-              <a:t> du </a:t>
+              <a:t>Le </a:t>
             </a:r>
             <a:r>
               <a:rPr lang="fr-FR" dirty="0" err="1"/>
@@ -6760,212 +6795,7 @@
             </a:r>
             <a:r>
               <a:rPr lang="fr-FR" dirty="0"/>
-              <a:t> et décision sur la suite</a:t>
-            </a:r>
-          </a:p>
-          <a:p>
-            <a:r>
-              <a:rPr lang="fr-FR" b="1" dirty="0"/>
-              <a:t>Ressources nécessaires</a:t>
-            </a:r>
-          </a:p>
-          <a:p>
-            <a:r>
-              <a:rPr lang="fr-FR" b="1" dirty="0"/>
-              <a:t>Profil Data / ML</a:t>
-            </a:r>
-            <a:endParaRPr lang="fr-FR" dirty="0"/>
-          </a:p>
-          <a:p>
-            <a:r>
-              <a:rPr lang="fr-FR" dirty="0"/>
-              <a:t>préparation et analyse des données ;</a:t>
-            </a:r>
-          </a:p>
-          <a:p>
-            <a:r>
-              <a:rPr lang="fr-FR" dirty="0"/>
-              <a:t>expérimentation des modèles ;</a:t>
-            </a:r>
-          </a:p>
-          <a:p>
-            <a:r>
-              <a:rPr lang="fr-FR" dirty="0"/>
-              <a:t>évaluation des performances.</a:t>
-            </a:r>
-          </a:p>
-          <a:p>
-            <a:r>
-              <a:rPr lang="fr-FR" b="1" dirty="0"/>
-              <a:t>Profil métier / Product </a:t>
-            </a:r>
-            <a:r>
-              <a:rPr lang="fr-FR" b="1" dirty="0" err="1"/>
-              <a:t>Owner</a:t>
-            </a:r>
-            <a:endParaRPr lang="fr-FR" dirty="0"/>
-          </a:p>
-          <a:p>
-            <a:r>
-              <a:rPr lang="fr-FR" dirty="0"/>
-              <a:t>validation du périmètre ;</a:t>
-            </a:r>
-          </a:p>
-          <a:p>
-            <a:r>
-              <a:rPr lang="fr-FR" dirty="0"/>
-              <a:t>définition des critères de succès ;</a:t>
-            </a:r>
-          </a:p>
-          <a:p>
-            <a:r>
-              <a:rPr lang="fr-FR" dirty="0"/>
-              <a:t>interprétation de la pertinence des recommandations.</a:t>
-            </a:r>
-          </a:p>
-          <a:p>
-            <a:r>
-              <a:rPr lang="fr-FR" b="1" dirty="0"/>
-              <a:t>Profil technique</a:t>
-            </a:r>
-            <a:endParaRPr lang="fr-FR" dirty="0"/>
-          </a:p>
-          <a:p>
-            <a:r>
-              <a:rPr lang="fr-FR" dirty="0"/>
-              <a:t>évaluation des contraintes d'intégration ;</a:t>
-            </a:r>
-          </a:p>
-          <a:p>
-            <a:r>
-              <a:rPr lang="fr-FR" dirty="0"/>
-              <a:t>estimation des coûts et de la faisabilité technique.</a:t>
-            </a:r>
-          </a:p>
-          <a:p>
-            <a:r>
-              <a:rPr lang="fr-FR" dirty="0"/>
-              <a:t>Une même personne peut couvrir plusieurs rôles dans le cadre du </a:t>
-            </a:r>
-            <a:r>
-              <a:rPr lang="fr-FR" dirty="0" err="1"/>
-              <a:t>PoC</a:t>
-            </a:r>
-            <a:r>
-              <a:rPr lang="fr-FR" dirty="0"/>
-              <a:t>.</a:t>
-            </a:r>
-          </a:p>
-          <a:p>
-            <a:r>
-              <a:rPr lang="fr-FR" b="1" dirty="0"/>
-              <a:t>Principaux risques</a:t>
-            </a:r>
-          </a:p>
-          <a:p>
-            <a:r>
-              <a:rPr lang="fr-FR" dirty="0" err="1"/>
-              <a:t>RisqueImpactRéponseDonnées</a:t>
-            </a:r>
-            <a:r>
-              <a:rPr lang="fr-FR" dirty="0"/>
-              <a:t> publiques peu </a:t>
-            </a:r>
-            <a:r>
-              <a:rPr lang="fr-FR" dirty="0" err="1"/>
-              <a:t>représentativesÉlevéÉvaluer</a:t>
-            </a:r>
-            <a:r>
-              <a:rPr lang="fr-FR" dirty="0"/>
-              <a:t> leur proximité avec le besoin </a:t>
-            </a:r>
-            <a:r>
-              <a:rPr lang="fr-FR" dirty="0" err="1"/>
-              <a:t>métierPeu</a:t>
-            </a:r>
-            <a:r>
-              <a:rPr lang="fr-FR" dirty="0"/>
-              <a:t> d'interactions </a:t>
-            </a:r>
-            <a:r>
-              <a:rPr lang="fr-FR" dirty="0" err="1"/>
-              <a:t>utilisateurÉlevéTester</a:t>
-            </a:r>
-            <a:r>
-              <a:rPr lang="fr-FR" dirty="0"/>
-              <a:t> plusieurs jeux de données / </a:t>
-            </a:r>
-            <a:r>
-              <a:rPr lang="fr-FR" dirty="0" err="1"/>
-              <a:t>approchesDémarrage</a:t>
-            </a:r>
-            <a:r>
-              <a:rPr lang="fr-FR" dirty="0"/>
-              <a:t> à </a:t>
-            </a:r>
-            <a:r>
-              <a:rPr lang="fr-FR" dirty="0" err="1"/>
-              <a:t>froidMoyen</a:t>
-            </a:r>
-            <a:r>
-              <a:rPr lang="fr-FR" dirty="0"/>
-              <a:t>/</a:t>
-            </a:r>
-            <a:r>
-              <a:rPr lang="fr-FR" dirty="0" err="1"/>
-              <a:t>élevéTester</a:t>
-            </a:r>
-            <a:r>
-              <a:rPr lang="fr-FR" dirty="0"/>
-              <a:t> le comportement sur nouveaux utilisateurs/</a:t>
-            </a:r>
-            <a:r>
-              <a:rPr lang="fr-FR" dirty="0" err="1"/>
-              <a:t>articlesImages</a:t>
-            </a:r>
-            <a:r>
-              <a:rPr lang="fr-FR" dirty="0"/>
-              <a:t> peu </a:t>
-            </a:r>
-            <a:r>
-              <a:rPr lang="fr-FR" dirty="0" err="1"/>
-              <a:t>exploitablesMoyenComparer</a:t>
-            </a:r>
-            <a:r>
-              <a:rPr lang="fr-FR" dirty="0"/>
-              <a:t> texte seul vs texte + </a:t>
-            </a:r>
-            <a:r>
-              <a:rPr lang="fr-FR" dirty="0" err="1"/>
-              <a:t>imageComplexité</a:t>
-            </a:r>
-            <a:r>
-              <a:rPr lang="fr-FR" dirty="0"/>
-              <a:t> ou coût de l'approche </a:t>
-            </a:r>
-            <a:r>
-              <a:rPr lang="fr-FR" dirty="0" err="1"/>
-              <a:t>multimodaleMoyenMesurer</a:t>
-            </a:r>
-            <a:r>
-              <a:rPr lang="fr-FR" dirty="0"/>
-              <a:t> les ressources </a:t>
-            </a:r>
-            <a:r>
-              <a:rPr lang="fr-FR" dirty="0" err="1"/>
-              <a:t>nécessairesRésultats</a:t>
-            </a:r>
-            <a:r>
-              <a:rPr lang="fr-FR" dirty="0"/>
-              <a:t> ML difficiles à traduire en valeur </a:t>
-            </a:r>
-            <a:r>
-              <a:rPr lang="fr-FR" dirty="0" err="1"/>
-              <a:t>métierÉlevéDéfinir</a:t>
-            </a:r>
-            <a:r>
-              <a:rPr lang="fr-FR" dirty="0"/>
-              <a:t> les critères de succès avant l'expérimentation</a:t>
+              <a:t> doit permettre de passer d’une hypothèse technologique à une décision éclairée sur la faisabilité et la poursuite du projet.</a:t>
             </a:r>
           </a:p>
           <a:p>
@@ -6999,224 +6829,7 @@
     </p:spTree>
     <p:extLst>
       <p:ext uri="{BB962C8B-B14F-4D97-AF65-F5344CB8AC3E}">
-        <p14:creationId xmlns:p14="http://schemas.microsoft.com/office/powerpoint/2010/main" val="1476880267"/>
-      </p:ext>
-    </p:extLst>
-  </p:cSld>
-  <p:clrMapOvr>
-    <a:masterClrMapping/>
-  </p:clrMapOvr>
-</p:notes>
-</file>
-
-<file path=ppt/notesSlides/notesSlide29.xml><?xml version="1.0" encoding="utf-8"?>
-<p:notes xmlns:a="http://schemas.openxmlformats.org/drawingml/2006/main" xmlns:r="http://schemas.openxmlformats.org/officeDocument/2006/relationships" xmlns:p="http://schemas.openxmlformats.org/presentationml/2006/main">
-  <p:cSld>
-    <p:spTree>
-      <p:nvGrpSpPr>
-        <p:cNvPr id="1" name=""/>
-        <p:cNvGrpSpPr/>
-        <p:nvPr/>
-      </p:nvGrpSpPr>
-      <p:grpSpPr>
-        <a:xfrm>
-          <a:off x="0" y="0"/>
-          <a:ext cx="0" cy="0"/>
-          <a:chOff x="0" y="0"/>
-          <a:chExt cx="0" cy="0"/>
-        </a:xfrm>
-      </p:grpSpPr>
-      <p:sp>
-        <p:nvSpPr>
-          <p:cNvPr id="2" name="Espace réservé de l'image des diapositives 1"/>
-          <p:cNvSpPr>
-            <a:spLocks noGrp="1" noRot="1" noChangeAspect="1"/>
-          </p:cNvSpPr>
-          <p:nvPr>
-            <p:ph type="sldImg"/>
-          </p:nvPr>
-        </p:nvSpPr>
-        <p:spPr/>
-      </p:sp>
-      <p:sp>
-        <p:nvSpPr>
-          <p:cNvPr id="3" name="Espace réservé des notes 2"/>
-          <p:cNvSpPr>
-            <a:spLocks noGrp="1"/>
-          </p:cNvSpPr>
-          <p:nvPr>
-            <p:ph type="body" idx="1"/>
-          </p:nvPr>
-        </p:nvSpPr>
-        <p:spPr/>
-        <p:txBody>
-          <a:bodyPr/>
-          <a:lstStyle/>
-          <a:p>
-            <a:r>
-              <a:rPr lang="fr-FR" b="1" dirty="0"/>
-              <a:t>Cadrage + sélection </a:t>
-            </a:r>
-            <a:r>
-              <a:rPr lang="fr-FR" b="1" dirty="0" err="1"/>
-              <a:t>dataset</a:t>
-            </a:r>
-            <a:br>
-              <a:rPr lang="fr-FR" dirty="0"/>
-            </a:br>
-            <a:r>
-              <a:rPr lang="fr-FR" dirty="0"/>
-              <a:t>Le PO apporte le besoin et le périmètre ; le Data </a:t>
-            </a:r>
-            <a:r>
-              <a:rPr lang="fr-FR" dirty="0" err="1"/>
-              <a:t>Scientist</a:t>
-            </a:r>
-            <a:r>
-              <a:rPr lang="fr-FR" dirty="0"/>
-              <a:t> vérifie que les données permettent réellement de répondre au problème.</a:t>
-            </a:r>
-          </a:p>
-          <a:p>
-            <a:r>
-              <a:rPr lang="fr-FR" b="1" dirty="0"/>
-              <a:t>Préparation du jeu de test</a:t>
-            </a:r>
-            <a:br>
-              <a:rPr lang="fr-FR" dirty="0"/>
-            </a:br>
-            <a:r>
-              <a:rPr lang="fr-FR" dirty="0"/>
-              <a:t>Le Data </a:t>
-            </a:r>
-            <a:r>
-              <a:rPr lang="fr-FR" dirty="0" err="1"/>
-              <a:t>Scientist</a:t>
-            </a:r>
-            <a:r>
-              <a:rPr lang="fr-FR" dirty="0"/>
-              <a:t> construit le protocole expérimental. Le PO vérifie que les cas testés correspondent bien au cas d'usage attendu.</a:t>
-            </a:r>
-          </a:p>
-          <a:p>
-            <a:r>
-              <a:rPr lang="fr-FR" b="1" dirty="0"/>
-              <a:t>Baseline + similarité / compatibilité</a:t>
-            </a:r>
-            <a:br>
-              <a:rPr lang="fr-FR" dirty="0"/>
-            </a:br>
-            <a:r>
-              <a:rPr lang="fr-FR" dirty="0"/>
-              <a:t>Le </a:t>
-            </a:r>
-            <a:r>
-              <a:rPr lang="fr-FR" b="1" dirty="0"/>
-              <a:t>ML </a:t>
-            </a:r>
-            <a:r>
-              <a:rPr lang="fr-FR" b="1" dirty="0" err="1"/>
-              <a:t>Engineer</a:t>
-            </a:r>
-            <a:r>
-              <a:rPr lang="fr-FR" dirty="0"/>
-              <a:t> prend en charge l'implémentation des approches : </a:t>
-            </a:r>
-            <a:r>
-              <a:rPr lang="fr-FR" dirty="0" err="1"/>
-              <a:t>embeddings</a:t>
-            </a:r>
-            <a:r>
-              <a:rPr lang="fr-FR" dirty="0"/>
-              <a:t>, caractéristiques, recherche de similarité, modèle de compatibilité, etc.</a:t>
-            </a:r>
-          </a:p>
-          <a:p>
-            <a:r>
-              <a:rPr lang="fr-FR" b="1" dirty="0"/>
-              <a:t>Évaluation + comparaison</a:t>
-            </a:r>
-            <a:br>
-              <a:rPr lang="fr-FR" dirty="0"/>
-            </a:br>
-            <a:r>
-              <a:rPr lang="fr-FR" b="1" dirty="0"/>
-              <a:t>Data </a:t>
-            </a:r>
-            <a:r>
-              <a:rPr lang="fr-FR" b="1" dirty="0" err="1"/>
-              <a:t>Scientist</a:t>
-            </a:r>
-            <a:r>
-              <a:rPr lang="fr-FR" dirty="0"/>
-              <a:t> : métriques et analyse statistique ; </a:t>
-            </a:r>
-          </a:p>
-          <a:p>
-            <a:r>
-              <a:rPr lang="fr-FR" b="1" dirty="0"/>
-              <a:t>Expertise métier</a:t>
-            </a:r>
-            <a:r>
-              <a:rPr lang="fr-FR" dirty="0"/>
-              <a:t> : pertinence des recommandations ; </a:t>
-            </a:r>
-          </a:p>
-          <a:p>
-            <a:r>
-              <a:rPr lang="fr-FR" b="1" dirty="0"/>
-              <a:t>PO</a:t>
-            </a:r>
-            <a:r>
-              <a:rPr lang="fr-FR" dirty="0"/>
-              <a:t> : adéquation avec les objectifs du produit. </a:t>
-            </a:r>
-          </a:p>
-          <a:p>
-            <a:r>
-              <a:rPr lang="fr-FR" b="1" dirty="0"/>
-              <a:t>Synthèse + recommandation</a:t>
-            </a:r>
-            <a:br>
-              <a:rPr lang="fr-FR" dirty="0"/>
-            </a:br>
-            <a:r>
-              <a:rPr lang="fr-FR" dirty="0"/>
-              <a:t>Le PO porte la décision produit, avec l'expertise métier pour déterminer si les résultats sont réellement exploitables.</a:t>
-            </a:r>
-          </a:p>
-          <a:p>
-            <a:endParaRPr lang="fr-FR" dirty="0"/>
-          </a:p>
-        </p:txBody>
-      </p:sp>
-      <p:sp>
-        <p:nvSpPr>
-          <p:cNvPr id="4" name="Espace réservé du numéro de diapositive 3"/>
-          <p:cNvSpPr>
-            <a:spLocks noGrp="1"/>
-          </p:cNvSpPr>
-          <p:nvPr>
-            <p:ph type="sldNum" sz="quarter" idx="5"/>
-          </p:nvPr>
-        </p:nvSpPr>
-        <p:spPr/>
-        <p:txBody>
-          <a:bodyPr/>
-          <a:lstStyle/>
-          <a:p>
-            <a:fld id="{8BFDC3EE-E837-4216-B82C-A4E0B6F89CB4}" type="slidenum">
-              <a:rPr lang="fr-FR" smtClean="0"/>
-              <a:t>30</a:t>
-            </a:fld>
-            <a:endParaRPr lang="fr-FR"/>
-          </a:p>
-        </p:txBody>
-      </p:sp>
-    </p:spTree>
-    <p:extLst>
-      <p:ext uri="{BB962C8B-B14F-4D97-AF65-F5344CB8AC3E}">
-        <p14:creationId xmlns:p14="http://schemas.microsoft.com/office/powerpoint/2010/main" val="3725167454"/>
+        <p14:creationId xmlns:p14="http://schemas.microsoft.com/office/powerpoint/2010/main" val="1758351652"/>
       </p:ext>
     </p:extLst>
   </p:cSld>
@@ -7271,17 +6884,35 @@
           <a:lstStyle/>
           <a:p>
             <a:r>
+              <a:rPr lang="fr-FR" b="1" dirty="0"/>
+              <a:t>Identifier </a:t>
+            </a:r>
+            <a:r>
               <a:rPr lang="fr-FR" dirty="0"/>
-              <a:t>Le </a:t>
-            </a:r>
-            <a:r>
-              <a:rPr lang="fr-FR" dirty="0" err="1"/>
-              <a:t>PoC</a:t>
-            </a:r>
-            <a:r>
-              <a:rPr lang="fr-FR" dirty="0"/>
-              <a:t> valide la faisabilité de la brique de recommandation, pas celle de l'application complète</a:t>
-            </a:r>
+              <a:t>les articles susceptibles d’être intéressant pour l’utilisateur</a:t>
+            </a:r>
+            <a:endParaRPr lang="fr-FR" b="1" dirty="0"/>
+          </a:p>
+          <a:p>
+            <a:r>
+              <a:rPr lang="fr-FR" b="1" dirty="0"/>
+              <a:t>Classer</a:t>
+            </a:r>
+            <a:r>
+              <a:rPr lang="fr-FR" b="0" dirty="0"/>
+              <a:t> les articles par pertinence</a:t>
+            </a:r>
+          </a:p>
+          <a:p>
+            <a:r>
+              <a:rPr lang="fr-FR" b="1" dirty="0"/>
+              <a:t>Proposer </a:t>
+            </a:r>
+            <a:r>
+              <a:rPr lang="fr-FR" b="0" dirty="0"/>
+              <a:t>les articles dans une garde robe</a:t>
+            </a:r>
+            <a:endParaRPr lang="fr-FR" dirty="0"/>
           </a:p>
         </p:txBody>
       </p:sp>
@@ -7311,7 +6942,7 @@
     </p:spTree>
     <p:extLst>
       <p:ext uri="{BB962C8B-B14F-4D97-AF65-F5344CB8AC3E}">
-        <p14:creationId xmlns:p14="http://schemas.microsoft.com/office/powerpoint/2010/main" val="1007988022"/>
+        <p14:creationId xmlns:p14="http://schemas.microsoft.com/office/powerpoint/2010/main" val="2425188965"/>
       </p:ext>
     </p:extLst>
   </p:cSld>
@@ -7321,7 +6952,7 @@
 </p:notes>
 </file>
 
-<file path=ppt/notesSlides/notesSlide30.xml><?xml version="1.0" encoding="utf-8"?>
+<file path=ppt/notesSlides/notesSlide4.xml><?xml version="1.0" encoding="utf-8"?>
 <p:notes xmlns:a="http://schemas.openxmlformats.org/drawingml/2006/main" xmlns:r="http://schemas.openxmlformats.org/officeDocument/2006/relationships" xmlns:p="http://schemas.openxmlformats.org/presentationml/2006/main">
   <p:cSld>
     <p:spTree>
@@ -7365,6 +6996,46 @@
           <a:bodyPr/>
           <a:lstStyle/>
           <a:p>
+            <a:endParaRPr lang="fr-FR" dirty="0"/>
+          </a:p>
+          <a:p>
+            <a:r>
+              <a:rPr lang="fr-FR" dirty="0"/>
+              <a:t>Pour notre </a:t>
+            </a:r>
+            <a:r>
+              <a:rPr lang="fr-FR" dirty="0" err="1"/>
+              <a:t>PoC</a:t>
+            </a:r>
+            <a:r>
+              <a:rPr lang="fr-FR" dirty="0"/>
+              <a:t> nous allons nous focalisé sur l’essentiel, c’est à dire….</a:t>
+            </a:r>
+          </a:p>
+          <a:p>
+            <a:endParaRPr lang="fr-FR" dirty="0"/>
+          </a:p>
+          <a:p>
+            <a:endParaRPr lang="fr-FR" dirty="0"/>
+          </a:p>
+          <a:p>
+            <a:pPr marL="0" marR="0" lvl="0" indent="0" algn="l" defTabSz="914400" rtl="0" eaLnBrk="1" fontAlgn="auto" latinLnBrk="0" hangingPunct="1">
+              <a:lnSpc>
+                <a:spcPct val="100000"/>
+              </a:lnSpc>
+              <a:spcBef>
+                <a:spcPts val="0"/>
+              </a:spcBef>
+              <a:spcAft>
+                <a:spcPts val="0"/>
+              </a:spcAft>
+              <a:buClrTx/>
+              <a:buSzTx/>
+              <a:buFontTx/>
+              <a:buNone/>
+              <a:tabLst/>
+              <a:defRPr/>
+            </a:pPr>
             <a:r>
               <a:rPr lang="fr-FR" dirty="0"/>
               <a:t>Le </a:t>
@@ -7375,7 +7046,7 @@
             </a:r>
             <a:r>
               <a:rPr lang="fr-FR" dirty="0"/>
-              <a:t> doit permettre de passer d’une hypothèse technologique à une décision éclairée sur la faisabilité et la poursuite du projet.</a:t>
+              <a:t> valide la faisabilité de la brique de recommandation, pas celle de l'application complète</a:t>
             </a:r>
           </a:p>
           <a:p>
@@ -7400,7 +7071,7 @@
           <a:p>
             <a:fld id="{8BFDC3EE-E837-4216-B82C-A4E0B6F89CB4}" type="slidenum">
               <a:rPr lang="fr-FR" smtClean="0"/>
-              <a:t>31</a:t>
+              <a:t>5</a:t>
             </a:fld>
             <a:endParaRPr lang="fr-FR"/>
           </a:p>
@@ -7409,7 +7080,7 @@
     </p:spTree>
     <p:extLst>
       <p:ext uri="{BB962C8B-B14F-4D97-AF65-F5344CB8AC3E}">
-        <p14:creationId xmlns:p14="http://schemas.microsoft.com/office/powerpoint/2010/main" val="1758351652"/>
+        <p14:creationId xmlns:p14="http://schemas.microsoft.com/office/powerpoint/2010/main" val="1007988022"/>
       </p:ext>
     </p:extLst>
   </p:cSld>
@@ -7419,7 +7090,7 @@
 </p:notes>
 </file>
 
-<file path=ppt/notesSlides/notesSlide4.xml><?xml version="1.0" encoding="utf-8"?>
+<file path=ppt/notesSlides/notesSlide5.xml><?xml version="1.0" encoding="utf-8"?>
 <p:notes xmlns:a="http://schemas.openxmlformats.org/drawingml/2006/main" xmlns:r="http://schemas.openxmlformats.org/officeDocument/2006/relationships" xmlns:p="http://schemas.openxmlformats.org/presentationml/2006/main">
   <p:cSld>
     <p:spTree>
@@ -7483,22 +7154,8 @@
           <a:p>
             <a:r>
               <a:rPr lang="fr-FR" b="1" dirty="0"/>
-              <a:t>Besoin métier</a:t>
-            </a:r>
-            <a:endParaRPr lang="fr-FR" dirty="0"/>
-          </a:p>
-          <a:p>
-            <a:r>
-              <a:rPr lang="fr-FR" dirty="0"/>
-              <a:t>Proposer à chaque utilisateur une sélection d’articles correspondant à ses préférences et à ses comportements.</a:t>
-            </a:r>
-          </a:p>
-          <a:p>
-            <a:r>
-              <a:rPr lang="fr-FR" b="1" dirty="0"/>
-              <a:t>Problème ML/IA</a:t>
-            </a:r>
-            <a:endParaRPr lang="fr-FR" dirty="0"/>
+              <a:t>Note problème ML peut être formulé ainsi: ….</a:t>
+            </a:r>
           </a:p>
           <a:p>
             <a:r>
@@ -7515,6 +7172,9 @@
             </a:r>
           </a:p>
           <a:p>
+            <a:endParaRPr lang="fr-FR" b="1" dirty="0"/>
+          </a:p>
+          <a:p>
             <a:r>
               <a:rPr lang="fr-FR" b="1" dirty="0"/>
               <a:t>Entrées du modèle</a:t>
@@ -7524,20 +7184,27 @@
           <a:p>
             <a:r>
               <a:rPr lang="fr-FR" dirty="0"/>
-              <a:t>Profil et préférences de l’utilisateur</a:t>
+              <a:t>* Profil et les préférences de l’utilisateur ainsi que Galerie photos (avec ou sans pose de l’utilisateur)</a:t>
             </a:r>
           </a:p>
           <a:p>
             <a:r>
               <a:rPr lang="fr-FR" dirty="0"/>
-              <a:t>Galerie photos: avec ou sans pose de l’utilisateur</a:t>
-            </a:r>
-          </a:p>
-          <a:p>
-            <a:r>
-              <a:rPr lang="fr-FR" dirty="0"/>
-              <a:t>Caractéristiques des articles : catégorie, marque, prix, description, image…</a:t>
-            </a:r>
+              <a:t>* Catalogue avec caractéristiques des articles</a:t>
+            </a:r>
+          </a:p>
+          <a:p>
+            <a:r>
+              <a:rPr lang="fr-FR" b="1" dirty="0"/>
+              <a:t>* </a:t>
+            </a:r>
+            <a:r>
+              <a:rPr lang="fr-FR" b="0" dirty="0"/>
+              <a:t>Possibilité d’associer un contexte les tendances du moment</a:t>
+            </a:r>
+          </a:p>
+          <a:p>
+            <a:endParaRPr lang="fr-FR" b="1" dirty="0"/>
           </a:p>
           <a:p>
             <a:r>
@@ -7561,43 +7228,7 @@
             </a:r>
           </a:p>
           <a:p>
-            <a:r>
-              <a:rPr lang="fr-FR" b="1" dirty="0"/>
-              <a:t>Type de problème</a:t>
-            </a:r>
             <a:endParaRPr lang="fr-FR" dirty="0"/>
-          </a:p>
-          <a:p>
-            <a:r>
-              <a:rPr lang="fr-FR" dirty="0"/>
-              <a:t>Système de recommandation personnalisé :</a:t>
-            </a:r>
-          </a:p>
-          <a:p>
-            <a:r>
-              <a:rPr lang="fr-FR" dirty="0"/>
-              <a:t>Vision à partir de photos / images articles;</a:t>
-            </a:r>
-          </a:p>
-          <a:p>
-            <a:r>
-              <a:rPr lang="fr-FR" dirty="0"/>
-              <a:t>prédiction d’une préférence ou d’un score de pertinence ;</a:t>
-            </a:r>
-          </a:p>
-          <a:p>
-            <a:r>
-              <a:rPr lang="fr-FR" dirty="0"/>
-              <a:t>classement des articles (</a:t>
-            </a:r>
-            <a:r>
-              <a:rPr lang="fr-FR" i="1" dirty="0" err="1"/>
-              <a:t>ranking</a:t>
-            </a:r>
-            <a:r>
-              <a:rPr lang="fr-FR" dirty="0"/>
-              <a:t>).</a:t>
-            </a:r>
           </a:p>
           <a:p>
             <a:endParaRPr lang="fr-FR" dirty="0"/>
@@ -7627,7 +7258,7 @@
           <a:p>
             <a:fld id="{8BFDC3EE-E837-4216-B82C-A4E0B6F89CB4}" type="slidenum">
               <a:rPr lang="fr-FR" smtClean="0"/>
-              <a:t>5</a:t>
+              <a:t>6</a:t>
             </a:fld>
             <a:endParaRPr lang="fr-FR"/>
           </a:p>
@@ -7646,7 +7277,7 @@
 </p:notes>
 </file>
 
-<file path=ppt/notesSlides/notesSlide5.xml><?xml version="1.0" encoding="utf-8"?>
+<file path=ppt/notesSlides/notesSlide6.xml><?xml version="1.0" encoding="utf-8"?>
 <p:notes xmlns:a="http://schemas.openxmlformats.org/drawingml/2006/main" xmlns:r="http://schemas.openxmlformats.org/officeDocument/2006/relationships" xmlns:p="http://schemas.openxmlformats.org/presentationml/2006/main">
   <p:cSld>
     <p:spTree>
@@ -7739,6 +7370,12 @@
             <a:endParaRPr lang="fr-FR" dirty="0"/>
           </a:p>
           <a:p>
+            <a:r>
+              <a:rPr lang="fr-FR" dirty="0"/>
+              <a:t>Mais ces données ne sont pas encore prêtes il nous faudra les créer dans un premier temps</a:t>
+            </a:r>
+          </a:p>
+          <a:p>
             <a:endParaRPr lang="fr-FR" dirty="0"/>
           </a:p>
           <a:p>
@@ -7781,117 +7418,6 @@
           <a:p>
             <a:endParaRPr lang="fr-FR" dirty="0"/>
           </a:p>
-          <a:p>
-            <a:r>
-              <a:rPr lang="fr-FR" dirty="0"/>
-              <a:t>Utilisateur:</a:t>
-            </a:r>
-          </a:p>
-          <a:p>
-            <a:pPr marL="171450" indent="-171450">
-              <a:buFont typeface="Arial" panose="020B0604020202020204" pitchFamily="34" charset="0"/>
-              <a:buChar char="•"/>
-            </a:pPr>
-            <a:r>
-              <a:rPr lang="fr-FR" dirty="0"/>
-              <a:t>Garde Robe (Photos de l’utilisateur avec des vêtements qu’il possède)</a:t>
-            </a:r>
-          </a:p>
-          <a:p>
-            <a:pPr marL="171450" indent="-171450">
-              <a:buFont typeface="Arial" panose="020B0604020202020204" pitchFamily="34" charset="0"/>
-              <a:buChar char="•"/>
-            </a:pPr>
-            <a:r>
-              <a:rPr lang="fr-FR" dirty="0"/>
-              <a:t>Préférences (Marques, Styles, Influenceuses, blogs, tendances préférés)</a:t>
-            </a:r>
-          </a:p>
-          <a:p>
-            <a:pPr marL="171450" indent="-171450">
-              <a:buFont typeface="Arial" panose="020B0604020202020204" pitchFamily="34" charset="0"/>
-              <a:buChar char="•"/>
-            </a:pPr>
-            <a:endParaRPr lang="fr-FR" dirty="0"/>
-          </a:p>
-          <a:p>
-            <a:pPr marL="0" indent="0">
-              <a:buFont typeface="Arial" panose="020B0604020202020204" pitchFamily="34" charset="0"/>
-              <a:buNone/>
-            </a:pPr>
-            <a:r>
-              <a:rPr lang="fr-FR" dirty="0" err="1"/>
-              <a:t>FashionInsta</a:t>
-            </a:r>
-            <a:endParaRPr lang="fr-FR" dirty="0"/>
-          </a:p>
-          <a:p>
-            <a:pPr marL="171450" indent="-171450">
-              <a:buFont typeface="Arial" panose="020B0604020202020204" pitchFamily="34" charset="0"/>
-              <a:buChar char="•"/>
-            </a:pPr>
-            <a:r>
-              <a:rPr lang="fr-FR" dirty="0"/>
-              <a:t>Catalogue (Images différents angles, description, prix, tags des styles de vêtement)</a:t>
-            </a:r>
-          </a:p>
-          <a:p>
-            <a:pPr marL="171450" indent="-171450">
-              <a:buFont typeface="Arial" panose="020B0604020202020204" pitchFamily="34" charset="0"/>
-              <a:buChar char="•"/>
-            </a:pPr>
-            <a:r>
-              <a:rPr lang="fr-FR" dirty="0"/>
-              <a:t>Tendances (libellé des styles vendus dans le catalogue)</a:t>
-            </a:r>
-          </a:p>
-          <a:p>
-            <a:pPr marL="171450" indent="-171450">
-              <a:buFont typeface="Arial" panose="020B0604020202020204" pitchFamily="34" charset="0"/>
-              <a:buChar char="•"/>
-            </a:pPr>
-            <a:endParaRPr lang="fr-FR" dirty="0"/>
-          </a:p>
-          <a:p>
-            <a:pPr marL="0" indent="0">
-              <a:buFont typeface="Arial" panose="020B0604020202020204" pitchFamily="34" charset="0"/>
-              <a:buNone/>
-            </a:pPr>
-            <a:r>
-              <a:rPr lang="fr-FR" dirty="0"/>
-              <a:t>Recommandations:</a:t>
-            </a:r>
-          </a:p>
-          <a:p>
-            <a:pPr marL="171450" indent="-171450">
-              <a:buFont typeface="Arial" panose="020B0604020202020204" pitchFamily="34" charset="0"/>
-              <a:buChar char="•"/>
-            </a:pPr>
-            <a:r>
-              <a:rPr lang="fr-FR" dirty="0"/>
-              <a:t>Articles similaires à la garde robe</a:t>
-            </a:r>
-          </a:p>
-          <a:p>
-            <a:pPr marL="171450" indent="-171450">
-              <a:buFont typeface="Arial" panose="020B0604020202020204" pitchFamily="34" charset="0"/>
-              <a:buChar char="•"/>
-            </a:pPr>
-            <a:r>
-              <a:rPr lang="fr-FR" dirty="0"/>
-              <a:t>Articles en corrélation avec les préférences</a:t>
-            </a:r>
-          </a:p>
-          <a:p>
-            <a:pPr marL="171450" indent="-171450">
-              <a:buFont typeface="Arial" panose="020B0604020202020204" pitchFamily="34" charset="0"/>
-              <a:buChar char="•"/>
-            </a:pPr>
-            <a:r>
-              <a:rPr lang="fr-FR" dirty="0"/>
-              <a:t>Feedback utilisateur des recommandations (note de pertinence)</a:t>
-            </a:r>
-          </a:p>
         </p:txBody>
       </p:sp>
       <p:sp>
@@ -7917,7 +7443,7 @@
           <a:p>
             <a:fld id="{8BFDC3EE-E837-4216-B82C-A4E0B6F89CB4}" type="slidenum">
               <a:rPr lang="fr-FR" smtClean="0"/>
-              <a:t>6</a:t>
+              <a:t>7</a:t>
             </a:fld>
             <a:endParaRPr lang="fr-FR"/>
           </a:p>
@@ -7927,158 +7453,6 @@
     <p:extLst>
       <p:ext uri="{BB962C8B-B14F-4D97-AF65-F5344CB8AC3E}">
         <p14:creationId xmlns:p14="http://schemas.microsoft.com/office/powerpoint/2010/main" val="1374090265"/>
-      </p:ext>
-    </p:extLst>
-  </p:cSld>
-  <p:clrMapOvr>
-    <a:masterClrMapping/>
-  </p:clrMapOvr>
-</p:notes>
-</file>
-
-<file path=ppt/notesSlides/notesSlide6.xml><?xml version="1.0" encoding="utf-8"?>
-<p:notes xmlns:a="http://schemas.openxmlformats.org/drawingml/2006/main" xmlns:r="http://schemas.openxmlformats.org/officeDocument/2006/relationships" xmlns:p="http://schemas.openxmlformats.org/presentationml/2006/main">
-  <p:cSld>
-    <p:spTree>
-      <p:nvGrpSpPr>
-        <p:cNvPr id="1" name="">
-          <a:extLst>
-            <a:ext uri="{FF2B5EF4-FFF2-40B4-BE49-F238E27FC236}">
-              <a16:creationId xmlns:a16="http://schemas.microsoft.com/office/drawing/2014/main" id="{A16B3729-6665-5637-B248-0BABA90A2481}"/>
-            </a:ext>
-          </a:extLst>
-        </p:cNvPr>
-        <p:cNvGrpSpPr/>
-        <p:nvPr/>
-      </p:nvGrpSpPr>
-      <p:grpSpPr>
-        <a:xfrm>
-          <a:off x="0" y="0"/>
-          <a:ext cx="0" cy="0"/>
-          <a:chOff x="0" y="0"/>
-          <a:chExt cx="0" cy="0"/>
-        </a:xfrm>
-      </p:grpSpPr>
-      <p:sp>
-        <p:nvSpPr>
-          <p:cNvPr id="2" name="Espace réservé de l'image des diapositives 1">
-            <a:extLst>
-              <a:ext uri="{FF2B5EF4-FFF2-40B4-BE49-F238E27FC236}">
-                <a16:creationId xmlns:a16="http://schemas.microsoft.com/office/drawing/2014/main" id="{9D3174D4-F164-4B98-3E57-0891BCC50039}"/>
-              </a:ext>
-            </a:extLst>
-          </p:cNvPr>
-          <p:cNvSpPr>
-            <a:spLocks noGrp="1" noRot="1" noChangeAspect="1"/>
-          </p:cNvSpPr>
-          <p:nvPr>
-            <p:ph type="sldImg"/>
-          </p:nvPr>
-        </p:nvSpPr>
-        <p:spPr/>
-      </p:sp>
-      <p:sp>
-        <p:nvSpPr>
-          <p:cNvPr id="3" name="Espace réservé des notes 2">
-            <a:extLst>
-              <a:ext uri="{FF2B5EF4-FFF2-40B4-BE49-F238E27FC236}">
-                <a16:creationId xmlns:a16="http://schemas.microsoft.com/office/drawing/2014/main" id="{A86077AB-A737-984B-31C7-53BD41617B1E}"/>
-              </a:ext>
-            </a:extLst>
-          </p:cNvPr>
-          <p:cNvSpPr>
-            <a:spLocks noGrp="1"/>
-          </p:cNvSpPr>
-          <p:nvPr>
-            <p:ph type="body" idx="1"/>
-          </p:nvPr>
-        </p:nvSpPr>
-        <p:spPr/>
-        <p:txBody>
-          <a:bodyPr/>
-          <a:lstStyle/>
-          <a:p>
-            <a:r>
-              <a:rPr lang="fr-FR" dirty="0"/>
-              <a:t>L'objectif est de disposer d'un catalogue suffisamment riche pour tester la recommandation, mais pas de reproduire immédiatement tout </a:t>
-            </a:r>
-            <a:r>
-              <a:rPr lang="fr-FR" dirty="0" err="1"/>
-              <a:t>FashionInsta</a:t>
-            </a:r>
-            <a:r>
-              <a:rPr lang="fr-FR" dirty="0"/>
-              <a:t>.</a:t>
-            </a:r>
-          </a:p>
-          <a:p>
-            <a:endParaRPr lang="fr-FR" dirty="0"/>
-          </a:p>
-          <a:p>
-            <a:r>
-              <a:rPr lang="fr-FR" dirty="0"/>
-              <a:t>A permet de couvrir une catégorie économiquement importante avec un catalogue relativement maîtrisable.</a:t>
-            </a:r>
-          </a:p>
-          <a:p>
-            <a:r>
-              <a:rPr lang="fr-FR" dirty="0"/>
-              <a:t>B représente un compromis entre importance économique et diversité du catalogue.</a:t>
-            </a:r>
-          </a:p>
-          <a:p>
-            <a:r>
-              <a:rPr lang="fr-FR" dirty="0"/>
-              <a:t>C permettrait de tester le modèle dans un catalogue beaucoup plus large.</a:t>
-            </a:r>
-          </a:p>
-          <a:p>
-            <a:endParaRPr lang="fr-FR" dirty="0"/>
-          </a:p>
-          <a:p>
-            <a:r>
-              <a:rPr lang="fr-FR" dirty="0"/>
-              <a:t>L’objectif est de sélectionner un périmètre représentatif de l’activité, tout en limitant la complexité de l’expérimentation.</a:t>
-            </a:r>
-          </a:p>
-          <a:p>
-            <a:endParaRPr lang="fr-FR" dirty="0"/>
-          </a:p>
-        </p:txBody>
-      </p:sp>
-      <p:sp>
-        <p:nvSpPr>
-          <p:cNvPr id="4" name="Espace réservé du numéro de diapositive 3">
-            <a:extLst>
-              <a:ext uri="{FF2B5EF4-FFF2-40B4-BE49-F238E27FC236}">
-                <a16:creationId xmlns:a16="http://schemas.microsoft.com/office/drawing/2014/main" id="{200F743B-E47F-B19B-490A-210801EBF0D2}"/>
-              </a:ext>
-            </a:extLst>
-          </p:cNvPr>
-          <p:cNvSpPr>
-            <a:spLocks noGrp="1"/>
-          </p:cNvSpPr>
-          <p:nvPr>
-            <p:ph type="sldNum" sz="quarter" idx="5"/>
-          </p:nvPr>
-        </p:nvSpPr>
-        <p:spPr/>
-        <p:txBody>
-          <a:bodyPr/>
-          <a:lstStyle/>
-          <a:p>
-            <a:fld id="{8BFDC3EE-E837-4216-B82C-A4E0B6F89CB4}" type="slidenum">
-              <a:rPr lang="fr-FR" smtClean="0"/>
-              <a:t>7</a:t>
-            </a:fld>
-            <a:endParaRPr lang="fr-FR"/>
-          </a:p>
-        </p:txBody>
-      </p:sp>
-    </p:spTree>
-    <p:extLst>
-      <p:ext uri="{BB962C8B-B14F-4D97-AF65-F5344CB8AC3E}">
-        <p14:creationId xmlns:p14="http://schemas.microsoft.com/office/powerpoint/2010/main" val="27963581"/>
       </p:ext>
     </p:extLst>
   </p:cSld>
@@ -8666,7 +8040,7 @@
           <a:p>
             <a:fld id="{CAD4EF5E-5CA6-42F0-B583-013C857A1C28}" type="datetimeFigureOut">
               <a:rPr lang="fr-FR" smtClean="0"/>
-              <a:t>23/09/2026</a:t>
+              <a:t>29/09/2026</a:t>
             </a:fld>
             <a:endParaRPr lang="fr-FR"/>
           </a:p>
@@ -8864,7 +8238,7 @@
           <a:p>
             <a:fld id="{CAD4EF5E-5CA6-42F0-B583-013C857A1C28}" type="datetimeFigureOut">
               <a:rPr lang="fr-FR" smtClean="0"/>
-              <a:t>23/09/2026</a:t>
+              <a:t>29/09/2026</a:t>
             </a:fld>
             <a:endParaRPr lang="fr-FR"/>
           </a:p>
@@ -9072,7 +8446,7 @@
           <a:p>
             <a:fld id="{CAD4EF5E-5CA6-42F0-B583-013C857A1C28}" type="datetimeFigureOut">
               <a:rPr lang="fr-FR" smtClean="0"/>
-              <a:t>23/09/2026</a:t>
+              <a:t>29/09/2026</a:t>
             </a:fld>
             <a:endParaRPr lang="fr-FR"/>
           </a:p>
@@ -9270,7 +8644,7 @@
           <a:p>
             <a:fld id="{CAD4EF5E-5CA6-42F0-B583-013C857A1C28}" type="datetimeFigureOut">
               <a:rPr lang="fr-FR" smtClean="0"/>
-              <a:t>23/09/2026</a:t>
+              <a:t>29/09/2026</a:t>
             </a:fld>
             <a:endParaRPr lang="fr-FR"/>
           </a:p>
@@ -9545,7 +8919,7 @@
           <a:p>
             <a:fld id="{CAD4EF5E-5CA6-42F0-B583-013C857A1C28}" type="datetimeFigureOut">
               <a:rPr lang="fr-FR" smtClean="0"/>
-              <a:t>23/09/2026</a:t>
+              <a:t>29/09/2026</a:t>
             </a:fld>
             <a:endParaRPr lang="fr-FR"/>
           </a:p>
@@ -9810,7 +9184,7 @@
           <a:p>
             <a:fld id="{CAD4EF5E-5CA6-42F0-B583-013C857A1C28}" type="datetimeFigureOut">
               <a:rPr lang="fr-FR" smtClean="0"/>
-              <a:t>23/09/2026</a:t>
+              <a:t>29/09/2026</a:t>
             </a:fld>
             <a:endParaRPr lang="fr-FR"/>
           </a:p>
@@ -10222,7 +9596,7 @@
           <a:p>
             <a:fld id="{CAD4EF5E-5CA6-42F0-B583-013C857A1C28}" type="datetimeFigureOut">
               <a:rPr lang="fr-FR" smtClean="0"/>
-              <a:t>23/09/2026</a:t>
+              <a:t>29/09/2026</a:t>
             </a:fld>
             <a:endParaRPr lang="fr-FR"/>
           </a:p>
@@ -10363,7 +9737,7 @@
           <a:p>
             <a:fld id="{CAD4EF5E-5CA6-42F0-B583-013C857A1C28}" type="datetimeFigureOut">
               <a:rPr lang="fr-FR" smtClean="0"/>
-              <a:t>23/09/2026</a:t>
+              <a:t>29/09/2026</a:t>
             </a:fld>
             <a:endParaRPr lang="fr-FR"/>
           </a:p>
@@ -10476,7 +9850,7 @@
           <a:p>
             <a:fld id="{CAD4EF5E-5CA6-42F0-B583-013C857A1C28}" type="datetimeFigureOut">
               <a:rPr lang="fr-FR" smtClean="0"/>
-              <a:t>23/09/2026</a:t>
+              <a:t>29/09/2026</a:t>
             </a:fld>
             <a:endParaRPr lang="fr-FR"/>
           </a:p>
@@ -10787,7 +10161,7 @@
           <a:p>
             <a:fld id="{CAD4EF5E-5CA6-42F0-B583-013C857A1C28}" type="datetimeFigureOut">
               <a:rPr lang="fr-FR" smtClean="0"/>
-              <a:t>23/09/2026</a:t>
+              <a:t>29/09/2026</a:t>
             </a:fld>
             <a:endParaRPr lang="fr-FR"/>
           </a:p>
@@ -11075,7 +10449,7 @@
           <a:p>
             <a:fld id="{CAD4EF5E-5CA6-42F0-B583-013C857A1C28}" type="datetimeFigureOut">
               <a:rPr lang="fr-FR" smtClean="0"/>
-              <a:t>23/09/2026</a:t>
+              <a:t>29/09/2026</a:t>
             </a:fld>
             <a:endParaRPr lang="fr-FR"/>
           </a:p>
@@ -11316,7 +10690,7 @@
           <a:p>
             <a:fld id="{CAD4EF5E-5CA6-42F0-B583-013C857A1C28}" type="datetimeFigureOut">
               <a:rPr lang="fr-FR" smtClean="0"/>
-              <a:t>23/09/2026</a:t>
+              <a:t>29/09/2026</a:t>
             </a:fld>
             <a:endParaRPr lang="fr-FR"/>
           </a:p>
@@ -11738,7 +11112,7 @@
           <p:cNvPr id="2" name="Titre 1">
             <a:extLst>
               <a:ext uri="{FF2B5EF4-FFF2-40B4-BE49-F238E27FC236}">
-                <a16:creationId xmlns:a16="http://schemas.microsoft.com/office/drawing/2014/main" id="{EFF47304-A677-F55B-B5DE-7B026252947C}"/>
+                <a16:creationId xmlns:a16="http://schemas.microsoft.com/office/drawing/2014/main" id="{7F011564-E175-E802-3D69-6D7695DDA582}"/>
               </a:ext>
             </a:extLst>
           </p:cNvPr>
@@ -11746,102 +11120,613 @@
             <a:spLocks noGrp="1"/>
           </p:cNvSpPr>
           <p:nvPr>
-            <p:ph type="ctrTitle"/>
+            <p:ph type="title"/>
           </p:nvPr>
         </p:nvSpPr>
         <p:spPr>
           <a:xfrm>
-            <a:off x="1524000" y="1122363"/>
-            <a:ext cx="9144000" cy="1002272"/>
+            <a:off x="838200" y="167033"/>
+            <a:ext cx="10515600" cy="1039467"/>
           </a:xfrm>
+          <a:noFill/>
         </p:spPr>
         <p:txBody>
           <a:bodyPr/>
           <a:lstStyle/>
           <a:p>
-            <a:r>
-              <a:rPr lang="fr-FR" dirty="0"/>
-              <a:t>Contexte et objectif du </a:t>
-            </a:r>
-            <a:r>
-              <a:rPr lang="fr-FR" dirty="0" err="1"/>
+            <a:pPr algn="ctr"/>
+            <a:r>
+              <a:rPr lang="fr-FR" cap="small" dirty="0">
+                <a:latin typeface="Arial Black" panose="020B0A04020102020204" pitchFamily="34" charset="0"/>
+              </a:rPr>
+              <a:t>Proof of Concept (</a:t>
+            </a:r>
+            <a:r>
+              <a:rPr lang="fr-FR" cap="small" dirty="0" err="1">
+                <a:latin typeface="Arial Black" panose="020B0A04020102020204" pitchFamily="34" charset="0"/>
+              </a:rPr>
               <a:t>PoC</a:t>
             </a:r>
-            <a:endParaRPr lang="fr-FR" dirty="0"/>
+            <a:r>
+              <a:rPr lang="fr-FR" cap="small" dirty="0">
+                <a:latin typeface="Arial Black" panose="020B0A04020102020204" pitchFamily="34" charset="0"/>
+              </a:rPr>
+              <a:t>)</a:t>
+            </a:r>
           </a:p>
         </p:txBody>
       </p:sp>
-      <p:sp>
-        <p:nvSpPr>
-          <p:cNvPr id="3" name="Sous-titre 2">
+      <p:pic>
+        <p:nvPicPr>
+          <p:cNvPr id="1026" name="Picture 2">
             <a:extLst>
               <a:ext uri="{FF2B5EF4-FFF2-40B4-BE49-F238E27FC236}">
-                <a16:creationId xmlns:a16="http://schemas.microsoft.com/office/drawing/2014/main" id="{C57530C9-4457-F5E1-E0A9-3614B28FE155}"/>
+                <a16:creationId xmlns:a16="http://schemas.microsoft.com/office/drawing/2014/main" id="{C6367092-174E-FF50-EBDD-9C556A60D16E}"/>
               </a:ext>
             </a:extLst>
           </p:cNvPr>
-          <p:cNvSpPr>
-            <a:spLocks noGrp="1"/>
+          <p:cNvPicPr>
+            <a:picLocks noGrp="1" noChangeAspect="1" noChangeArrowheads="1"/>
+          </p:cNvPicPr>
+          <p:nvPr>
+            <p:ph idx="1"/>
+          </p:nvPr>
+        </p:nvPicPr>
+        <p:blipFill>
+          <a:blip r:embed="rId3">
+            <a:extLst>
+              <a:ext uri="{28A0092B-C50C-407E-A947-70E740481C1C}">
+                <a14:useLocalDpi xmlns:a14="http://schemas.microsoft.com/office/drawing/2010/main" val="0"/>
+              </a:ext>
+            </a:extLst>
+          </a:blip>
+          <a:srcRect/>
+          <a:stretch>
+            <a:fillRect/>
+          </a:stretch>
+        </p:blipFill>
+        <p:spPr bwMode="auto">
+          <a:xfrm>
+            <a:off x="560572" y="1027906"/>
+            <a:ext cx="10515600" cy="4148142"/>
+          </a:xfrm>
+          <a:prstGeom prst="roundRect">
+            <a:avLst>
+              <a:gd name="adj" fmla="val 16667"/>
+            </a:avLst>
+          </a:prstGeom>
+          <a:ln>
+            <a:noFill/>
+          </a:ln>
+          <a:effectLst>
+            <a:outerShdw blurRad="152400" dist="12000" dir="900000" sy="98000" kx="110000" ky="200000" algn="tl" rotWithShape="0">
+              <a:srgbClr val="000000">
+                <a:alpha val="30000"/>
+              </a:srgbClr>
+            </a:outerShdw>
+          </a:effectLst>
+          <a:scene3d>
+            <a:camera prst="perspectiveRelaxed">
+              <a:rot lat="19800000" lon="1200000" rev="20820000"/>
+            </a:camera>
+            <a:lightRig rig="threePt" dir="t"/>
+          </a:scene3d>
+          <a:sp3d contourW="6350" prstMaterial="matte">
+            <a:bevelT w="101600" h="101600"/>
+            <a:contourClr>
+              <a:srgbClr val="969696"/>
+            </a:contourClr>
+          </a:sp3d>
+          <a:extLst>
+            <a:ext uri="{909E8E84-426E-40DD-AFC4-6F175D3DCCD1}">
+              <a14:hiddenFill xmlns:a14="http://schemas.microsoft.com/office/drawing/2010/main">
+                <a:solidFill>
+                  <a:srgbClr val="FFFFFF"/>
+                </a:solidFill>
+              </a14:hiddenFill>
+            </a:ext>
+          </a:extLst>
+        </p:spPr>
+      </p:pic>
+      <p:sp>
+        <p:nvSpPr>
+          <p:cNvPr id="4" name="Google Shape;267;p34">
+            <a:extLst>
+              <a:ext uri="{FF2B5EF4-FFF2-40B4-BE49-F238E27FC236}">
+                <a16:creationId xmlns:a16="http://schemas.microsoft.com/office/drawing/2014/main" id="{D69C45F6-759A-E5AE-CF10-AD7D38C57117}"/>
+              </a:ext>
+            </a:extLst>
+          </p:cNvPr>
+          <p:cNvSpPr txBox="1">
+            <a:spLocks/>
           </p:cNvSpPr>
-          <p:nvPr>
-            <p:ph type="subTitle" idx="1"/>
-          </p:nvPr>
+          <p:nvPr/>
         </p:nvSpPr>
         <p:spPr>
           <a:xfrm>
-            <a:off x="1524000" y="2510118"/>
-            <a:ext cx="9144000" cy="3818964"/>
+            <a:off x="309820" y="5614361"/>
+            <a:ext cx="6233928" cy="1153767"/>
           </a:xfrm>
+          <a:prstGeom prst="rect">
+            <a:avLst/>
+          </a:prstGeom>
+          <a:noFill/>
+          <a:ln>
+            <a:noFill/>
+          </a:ln>
         </p:spPr>
         <p:txBody>
-          <a:bodyPr>
+          <a:bodyPr spcFirstLastPara="1" vert="horz" wrap="square" lIns="91433" tIns="45700" rIns="91433" bIns="45700" rtlCol="0" anchor="t" anchorCtr="0">
             <a:normAutofit/>
           </a:bodyPr>
-          <a:lstStyle/>
-          <a:p>
-            <a:r>
-              <a:rPr lang="fr-FR" b="1" dirty="0"/>
-              <a:t>Besoin métier</a:t>
-            </a:r>
-          </a:p>
-          <a:p>
-            <a:r>
-              <a:rPr lang="fr-FR" dirty="0"/>
-              <a:t>Proposer aux utilisateurs de </a:t>
-            </a:r>
-            <a:r>
-              <a:rPr lang="fr-FR" dirty="0" err="1"/>
-              <a:t>FashionInsta</a:t>
-            </a:r>
-            <a:r>
-              <a:rPr lang="fr-FR" dirty="0"/>
-              <a:t> des recommandations d’articles personnalisées, adaptées à leur profil et à leurs préférences, au sein d’une application mobile.</a:t>
-            </a:r>
-          </a:p>
-          <a:p>
-            <a:endParaRPr lang="fr-FR" dirty="0"/>
-          </a:p>
-          <a:p>
-            <a:r>
-              <a:rPr lang="fr-FR" b="1" dirty="0"/>
-              <a:t>Objectif de ce POC</a:t>
-            </a:r>
-          </a:p>
-          <a:p>
-            <a:r>
-              <a:rPr lang="fr-FR" dirty="0"/>
-              <a:t>Valider la faisabilité technique d’une solution IA/ML pour la recommandation personnalisée, à travers un périmètre volontairement restreint permettant une expérimentation rapide.</a:t>
-            </a:r>
-          </a:p>
-          <a:p>
-            <a:endParaRPr lang="fr-FR" dirty="0"/>
+          <a:lstStyle>
+            <a:lvl1pPr marL="228600" indent="-228600" algn="l" defTabSz="914400" rtl="0" eaLnBrk="1" latinLnBrk="0" hangingPunct="1">
+              <a:lnSpc>
+                <a:spcPct val="90000"/>
+              </a:lnSpc>
+              <a:spcBef>
+                <a:spcPts val="1000"/>
+              </a:spcBef>
+              <a:buFont typeface="Arial" panose="020B0604020202020204" pitchFamily="34" charset="0"/>
+              <a:buChar char="•"/>
+              <a:defRPr sz="2800" kern="1200">
+                <a:solidFill>
+                  <a:schemeClr val="tx1"/>
+                </a:solidFill>
+                <a:latin typeface="+mn-lt"/>
+                <a:ea typeface="+mn-ea"/>
+                <a:cs typeface="+mn-cs"/>
+              </a:defRPr>
+            </a:lvl1pPr>
+            <a:lvl2pPr marL="685800" indent="-228600" algn="l" defTabSz="914400" rtl="0" eaLnBrk="1" latinLnBrk="0" hangingPunct="1">
+              <a:lnSpc>
+                <a:spcPct val="90000"/>
+              </a:lnSpc>
+              <a:spcBef>
+                <a:spcPts val="500"/>
+              </a:spcBef>
+              <a:buFont typeface="Arial" panose="020B0604020202020204" pitchFamily="34" charset="0"/>
+              <a:buChar char="•"/>
+              <a:defRPr sz="2400" kern="1200">
+                <a:solidFill>
+                  <a:schemeClr val="tx1"/>
+                </a:solidFill>
+                <a:latin typeface="+mn-lt"/>
+                <a:ea typeface="+mn-ea"/>
+                <a:cs typeface="+mn-cs"/>
+              </a:defRPr>
+            </a:lvl2pPr>
+            <a:lvl3pPr marL="1143000" indent="-228600" algn="l" defTabSz="914400" rtl="0" eaLnBrk="1" latinLnBrk="0" hangingPunct="1">
+              <a:lnSpc>
+                <a:spcPct val="90000"/>
+              </a:lnSpc>
+              <a:spcBef>
+                <a:spcPts val="500"/>
+              </a:spcBef>
+              <a:buFont typeface="Arial" panose="020B0604020202020204" pitchFamily="34" charset="0"/>
+              <a:buChar char="•"/>
+              <a:defRPr sz="2000" kern="1200">
+                <a:solidFill>
+                  <a:schemeClr val="tx1"/>
+                </a:solidFill>
+                <a:latin typeface="+mn-lt"/>
+                <a:ea typeface="+mn-ea"/>
+                <a:cs typeface="+mn-cs"/>
+              </a:defRPr>
+            </a:lvl3pPr>
+            <a:lvl4pPr marL="1600200" indent="-228600" algn="l" defTabSz="914400" rtl="0" eaLnBrk="1" latinLnBrk="0" hangingPunct="1">
+              <a:lnSpc>
+                <a:spcPct val="90000"/>
+              </a:lnSpc>
+              <a:spcBef>
+                <a:spcPts val="500"/>
+              </a:spcBef>
+              <a:buFont typeface="Arial" panose="020B0604020202020204" pitchFamily="34" charset="0"/>
+              <a:buChar char="•"/>
+              <a:defRPr sz="1800" kern="1200">
+                <a:solidFill>
+                  <a:schemeClr val="tx1"/>
+                </a:solidFill>
+                <a:latin typeface="+mn-lt"/>
+                <a:ea typeface="+mn-ea"/>
+                <a:cs typeface="+mn-cs"/>
+              </a:defRPr>
+            </a:lvl4pPr>
+            <a:lvl5pPr marL="2057400" indent="-228600" algn="l" defTabSz="914400" rtl="0" eaLnBrk="1" latinLnBrk="0" hangingPunct="1">
+              <a:lnSpc>
+                <a:spcPct val="90000"/>
+              </a:lnSpc>
+              <a:spcBef>
+                <a:spcPts val="500"/>
+              </a:spcBef>
+              <a:buFont typeface="Arial" panose="020B0604020202020204" pitchFamily="34" charset="0"/>
+              <a:buChar char="•"/>
+              <a:defRPr sz="1800" kern="1200">
+                <a:solidFill>
+                  <a:schemeClr val="tx1"/>
+                </a:solidFill>
+                <a:latin typeface="+mn-lt"/>
+                <a:ea typeface="+mn-ea"/>
+                <a:cs typeface="+mn-cs"/>
+              </a:defRPr>
+            </a:lvl5pPr>
+            <a:lvl6pPr marL="2514600" indent="-228600" algn="l" defTabSz="914400" rtl="0" eaLnBrk="1" latinLnBrk="0" hangingPunct="1">
+              <a:lnSpc>
+                <a:spcPct val="90000"/>
+              </a:lnSpc>
+              <a:spcBef>
+                <a:spcPts val="500"/>
+              </a:spcBef>
+              <a:buFont typeface="Arial" panose="020B0604020202020204" pitchFamily="34" charset="0"/>
+              <a:buChar char="•"/>
+              <a:defRPr sz="1800" kern="1200">
+                <a:solidFill>
+                  <a:schemeClr val="tx1"/>
+                </a:solidFill>
+                <a:latin typeface="+mn-lt"/>
+                <a:ea typeface="+mn-ea"/>
+                <a:cs typeface="+mn-cs"/>
+              </a:defRPr>
+            </a:lvl6pPr>
+            <a:lvl7pPr marL="2971800" indent="-228600" algn="l" defTabSz="914400" rtl="0" eaLnBrk="1" latinLnBrk="0" hangingPunct="1">
+              <a:lnSpc>
+                <a:spcPct val="90000"/>
+              </a:lnSpc>
+              <a:spcBef>
+                <a:spcPts val="500"/>
+              </a:spcBef>
+              <a:buFont typeface="Arial" panose="020B0604020202020204" pitchFamily="34" charset="0"/>
+              <a:buChar char="•"/>
+              <a:defRPr sz="1800" kern="1200">
+                <a:solidFill>
+                  <a:schemeClr val="tx1"/>
+                </a:solidFill>
+                <a:latin typeface="+mn-lt"/>
+                <a:ea typeface="+mn-ea"/>
+                <a:cs typeface="+mn-cs"/>
+              </a:defRPr>
+            </a:lvl7pPr>
+            <a:lvl8pPr marL="3429000" indent="-228600" algn="l" defTabSz="914400" rtl="0" eaLnBrk="1" latinLnBrk="0" hangingPunct="1">
+              <a:lnSpc>
+                <a:spcPct val="90000"/>
+              </a:lnSpc>
+              <a:spcBef>
+                <a:spcPts val="500"/>
+              </a:spcBef>
+              <a:buFont typeface="Arial" panose="020B0604020202020204" pitchFamily="34" charset="0"/>
+              <a:buChar char="•"/>
+              <a:defRPr sz="1800" kern="1200">
+                <a:solidFill>
+                  <a:schemeClr val="tx1"/>
+                </a:solidFill>
+                <a:latin typeface="+mn-lt"/>
+                <a:ea typeface="+mn-ea"/>
+                <a:cs typeface="+mn-cs"/>
+              </a:defRPr>
+            </a:lvl8pPr>
+            <a:lvl9pPr marL="3886200" indent="-228600" algn="l" defTabSz="914400" rtl="0" eaLnBrk="1" latinLnBrk="0" hangingPunct="1">
+              <a:lnSpc>
+                <a:spcPct val="90000"/>
+              </a:lnSpc>
+              <a:spcBef>
+                <a:spcPts val="500"/>
+              </a:spcBef>
+              <a:buFont typeface="Arial" panose="020B0604020202020204" pitchFamily="34" charset="0"/>
+              <a:buChar char="•"/>
+              <a:defRPr sz="1800" kern="1200">
+                <a:solidFill>
+                  <a:schemeClr val="tx1"/>
+                </a:solidFill>
+                <a:latin typeface="+mn-lt"/>
+                <a:ea typeface="+mn-ea"/>
+                <a:cs typeface="+mn-cs"/>
+              </a:defRPr>
+            </a:lvl9pPr>
+          </a:lstStyle>
+          <a:p>
+            <a:pPr marL="0" indent="0">
+              <a:spcBef>
+                <a:spcPts val="0"/>
+              </a:spcBef>
+              <a:buNone/>
+            </a:pPr>
+            <a:r>
+              <a:rPr lang="fr-FR" sz="3600" i="1" dirty="0">
+                <a:solidFill>
+                  <a:schemeClr val="bg1">
+                    <a:lumMod val="50000"/>
+                  </a:schemeClr>
+                </a:solidFill>
+              </a:rPr>
+              <a:t>Formation Développeur IA</a:t>
+            </a:r>
+          </a:p>
+          <a:p>
+            <a:pPr marL="0" indent="0">
+              <a:spcBef>
+                <a:spcPts val="0"/>
+              </a:spcBef>
+              <a:buNone/>
+            </a:pPr>
+            <a:r>
+              <a:rPr lang="fr-FR" sz="3600" i="1" dirty="0">
+                <a:solidFill>
+                  <a:schemeClr val="bg1">
+                    <a:lumMod val="50000"/>
+                  </a:schemeClr>
+                </a:solidFill>
+              </a:rPr>
+              <a:t>Septembre 2026</a:t>
+            </a:r>
           </a:p>
         </p:txBody>
       </p:sp>
+      <p:sp>
+        <p:nvSpPr>
+          <p:cNvPr id="5" name="Google Shape;267;p34">
+            <a:extLst>
+              <a:ext uri="{FF2B5EF4-FFF2-40B4-BE49-F238E27FC236}">
+                <a16:creationId xmlns:a16="http://schemas.microsoft.com/office/drawing/2014/main" id="{238A8E7D-3DF6-7D82-87F9-14C7E9E7DD24}"/>
+              </a:ext>
+            </a:extLst>
+          </p:cNvPr>
+          <p:cNvSpPr txBox="1">
+            <a:spLocks/>
+          </p:cNvSpPr>
+          <p:nvPr/>
+        </p:nvSpPr>
+        <p:spPr>
+          <a:xfrm>
+            <a:off x="309820" y="5149824"/>
+            <a:ext cx="2667000" cy="456660"/>
+          </a:xfrm>
+          <a:prstGeom prst="rect">
+            <a:avLst/>
+          </a:prstGeom>
+          <a:noFill/>
+          <a:ln>
+            <a:noFill/>
+          </a:ln>
+        </p:spPr>
+        <p:txBody>
+          <a:bodyPr spcFirstLastPara="1" vert="horz" wrap="square" lIns="91433" tIns="45700" rIns="91433" bIns="45700" rtlCol="0" anchor="ctr" anchorCtr="0">
+            <a:normAutofit/>
+          </a:bodyPr>
+          <a:lstStyle>
+            <a:lvl1pPr marL="228600" indent="-228600" algn="l" defTabSz="914400" rtl="0" eaLnBrk="1" latinLnBrk="0" hangingPunct="1">
+              <a:lnSpc>
+                <a:spcPct val="90000"/>
+              </a:lnSpc>
+              <a:spcBef>
+                <a:spcPts val="1000"/>
+              </a:spcBef>
+              <a:buFont typeface="Arial" panose="020B0604020202020204" pitchFamily="34" charset="0"/>
+              <a:buChar char="•"/>
+              <a:defRPr sz="2800" kern="1200">
+                <a:solidFill>
+                  <a:schemeClr val="tx1"/>
+                </a:solidFill>
+                <a:latin typeface="+mn-lt"/>
+                <a:ea typeface="+mn-ea"/>
+                <a:cs typeface="+mn-cs"/>
+              </a:defRPr>
+            </a:lvl1pPr>
+            <a:lvl2pPr marL="685800" indent="-228600" algn="l" defTabSz="914400" rtl="0" eaLnBrk="1" latinLnBrk="0" hangingPunct="1">
+              <a:lnSpc>
+                <a:spcPct val="90000"/>
+              </a:lnSpc>
+              <a:spcBef>
+                <a:spcPts val="500"/>
+              </a:spcBef>
+              <a:buFont typeface="Arial" panose="020B0604020202020204" pitchFamily="34" charset="0"/>
+              <a:buChar char="•"/>
+              <a:defRPr sz="2400" kern="1200">
+                <a:solidFill>
+                  <a:schemeClr val="tx1"/>
+                </a:solidFill>
+                <a:latin typeface="+mn-lt"/>
+                <a:ea typeface="+mn-ea"/>
+                <a:cs typeface="+mn-cs"/>
+              </a:defRPr>
+            </a:lvl2pPr>
+            <a:lvl3pPr marL="1143000" indent="-228600" algn="l" defTabSz="914400" rtl="0" eaLnBrk="1" latinLnBrk="0" hangingPunct="1">
+              <a:lnSpc>
+                <a:spcPct val="90000"/>
+              </a:lnSpc>
+              <a:spcBef>
+                <a:spcPts val="500"/>
+              </a:spcBef>
+              <a:buFont typeface="Arial" panose="020B0604020202020204" pitchFamily="34" charset="0"/>
+              <a:buChar char="•"/>
+              <a:defRPr sz="2000" kern="1200">
+                <a:solidFill>
+                  <a:schemeClr val="tx1"/>
+                </a:solidFill>
+                <a:latin typeface="+mn-lt"/>
+                <a:ea typeface="+mn-ea"/>
+                <a:cs typeface="+mn-cs"/>
+              </a:defRPr>
+            </a:lvl3pPr>
+            <a:lvl4pPr marL="1600200" indent="-228600" algn="l" defTabSz="914400" rtl="0" eaLnBrk="1" latinLnBrk="0" hangingPunct="1">
+              <a:lnSpc>
+                <a:spcPct val="90000"/>
+              </a:lnSpc>
+              <a:spcBef>
+                <a:spcPts val="500"/>
+              </a:spcBef>
+              <a:buFont typeface="Arial" panose="020B0604020202020204" pitchFamily="34" charset="0"/>
+              <a:buChar char="•"/>
+              <a:defRPr sz="1800" kern="1200">
+                <a:solidFill>
+                  <a:schemeClr val="tx1"/>
+                </a:solidFill>
+                <a:latin typeface="+mn-lt"/>
+                <a:ea typeface="+mn-ea"/>
+                <a:cs typeface="+mn-cs"/>
+              </a:defRPr>
+            </a:lvl4pPr>
+            <a:lvl5pPr marL="2057400" indent="-228600" algn="l" defTabSz="914400" rtl="0" eaLnBrk="1" latinLnBrk="0" hangingPunct="1">
+              <a:lnSpc>
+                <a:spcPct val="90000"/>
+              </a:lnSpc>
+              <a:spcBef>
+                <a:spcPts val="500"/>
+              </a:spcBef>
+              <a:buFont typeface="Arial" panose="020B0604020202020204" pitchFamily="34" charset="0"/>
+              <a:buChar char="•"/>
+              <a:defRPr sz="1800" kern="1200">
+                <a:solidFill>
+                  <a:schemeClr val="tx1"/>
+                </a:solidFill>
+                <a:latin typeface="+mn-lt"/>
+                <a:ea typeface="+mn-ea"/>
+                <a:cs typeface="+mn-cs"/>
+              </a:defRPr>
+            </a:lvl5pPr>
+            <a:lvl6pPr marL="2514600" indent="-228600" algn="l" defTabSz="914400" rtl="0" eaLnBrk="1" latinLnBrk="0" hangingPunct="1">
+              <a:lnSpc>
+                <a:spcPct val="90000"/>
+              </a:lnSpc>
+              <a:spcBef>
+                <a:spcPts val="500"/>
+              </a:spcBef>
+              <a:buFont typeface="Arial" panose="020B0604020202020204" pitchFamily="34" charset="0"/>
+              <a:buChar char="•"/>
+              <a:defRPr sz="1800" kern="1200">
+                <a:solidFill>
+                  <a:schemeClr val="tx1"/>
+                </a:solidFill>
+                <a:latin typeface="+mn-lt"/>
+                <a:ea typeface="+mn-ea"/>
+                <a:cs typeface="+mn-cs"/>
+              </a:defRPr>
+            </a:lvl6pPr>
+            <a:lvl7pPr marL="2971800" indent="-228600" algn="l" defTabSz="914400" rtl="0" eaLnBrk="1" latinLnBrk="0" hangingPunct="1">
+              <a:lnSpc>
+                <a:spcPct val="90000"/>
+              </a:lnSpc>
+              <a:spcBef>
+                <a:spcPts val="500"/>
+              </a:spcBef>
+              <a:buFont typeface="Arial" panose="020B0604020202020204" pitchFamily="34" charset="0"/>
+              <a:buChar char="•"/>
+              <a:defRPr sz="1800" kern="1200">
+                <a:solidFill>
+                  <a:schemeClr val="tx1"/>
+                </a:solidFill>
+                <a:latin typeface="+mn-lt"/>
+                <a:ea typeface="+mn-ea"/>
+                <a:cs typeface="+mn-cs"/>
+              </a:defRPr>
+            </a:lvl7pPr>
+            <a:lvl8pPr marL="3429000" indent="-228600" algn="l" defTabSz="914400" rtl="0" eaLnBrk="1" latinLnBrk="0" hangingPunct="1">
+              <a:lnSpc>
+                <a:spcPct val="90000"/>
+              </a:lnSpc>
+              <a:spcBef>
+                <a:spcPts val="500"/>
+              </a:spcBef>
+              <a:buFont typeface="Arial" panose="020B0604020202020204" pitchFamily="34" charset="0"/>
+              <a:buChar char="•"/>
+              <a:defRPr sz="1800" kern="1200">
+                <a:solidFill>
+                  <a:schemeClr val="tx1"/>
+                </a:solidFill>
+                <a:latin typeface="+mn-lt"/>
+                <a:ea typeface="+mn-ea"/>
+                <a:cs typeface="+mn-cs"/>
+              </a:defRPr>
+            </a:lvl8pPr>
+            <a:lvl9pPr marL="3886200" indent="-228600" algn="l" defTabSz="914400" rtl="0" eaLnBrk="1" latinLnBrk="0" hangingPunct="1">
+              <a:lnSpc>
+                <a:spcPct val="90000"/>
+              </a:lnSpc>
+              <a:spcBef>
+                <a:spcPts val="500"/>
+              </a:spcBef>
+              <a:buFont typeface="Arial" panose="020B0604020202020204" pitchFamily="34" charset="0"/>
+              <a:buChar char="•"/>
+              <a:defRPr sz="1800" kern="1200">
+                <a:solidFill>
+                  <a:schemeClr val="tx1"/>
+                </a:solidFill>
+                <a:latin typeface="+mn-lt"/>
+                <a:ea typeface="+mn-ea"/>
+                <a:cs typeface="+mn-cs"/>
+              </a:defRPr>
+            </a:lvl9pPr>
+          </a:lstStyle>
+          <a:p>
+            <a:pPr marL="0" indent="0">
+              <a:spcBef>
+                <a:spcPts val="0"/>
+              </a:spcBef>
+              <a:buNone/>
+            </a:pPr>
+            <a:r>
+              <a:rPr lang="fr-FR" sz="2400" i="1" dirty="0">
+                <a:solidFill>
+                  <a:schemeClr val="accent1">
+                    <a:lumMod val="75000"/>
+                  </a:schemeClr>
+                </a:solidFill>
+              </a:rPr>
+              <a:t>Thomas AUGUEY</a:t>
+            </a:r>
+          </a:p>
+        </p:txBody>
+      </p:sp>
+      <p:pic>
+        <p:nvPicPr>
+          <p:cNvPr id="6" name="Picture 6" descr="OpenClassrooms | Spreadshop">
+            <a:extLst>
+              <a:ext uri="{FF2B5EF4-FFF2-40B4-BE49-F238E27FC236}">
+                <a16:creationId xmlns:a16="http://schemas.microsoft.com/office/drawing/2014/main" id="{3FBC5416-E130-D775-C779-637BD341634C}"/>
+              </a:ext>
+            </a:extLst>
+          </p:cNvPr>
+          <p:cNvPicPr>
+            <a:picLocks noChangeAspect="1" noChangeArrowheads="1"/>
+          </p:cNvPicPr>
+          <p:nvPr/>
+        </p:nvPicPr>
+        <p:blipFill>
+          <a:blip r:embed="rId4">
+            <a:extLst>
+              <a:ext uri="{28A0092B-C50C-407E-A947-70E740481C1C}">
+                <a14:useLocalDpi xmlns:a14="http://schemas.microsoft.com/office/drawing/2010/main" val="0"/>
+              </a:ext>
+            </a:extLst>
+          </a:blip>
+          <a:srcRect/>
+          <a:stretch>
+            <a:fillRect/>
+          </a:stretch>
+        </p:blipFill>
+        <p:spPr bwMode="auto">
+          <a:xfrm>
+            <a:off x="8233296" y="6036921"/>
+            <a:ext cx="3648884" cy="654046"/>
+          </a:xfrm>
+          <a:prstGeom prst="rect">
+            <a:avLst/>
+          </a:prstGeom>
+          <a:noFill/>
+          <a:extLst>
+            <a:ext uri="{909E8E84-426E-40DD-AFC4-6F175D3DCCD1}">
+              <a14:hiddenFill xmlns:a14="http://schemas.microsoft.com/office/drawing/2010/main">
+                <a:solidFill>
+                  <a:srgbClr val="FFFFFF"/>
+                </a:solidFill>
+              </a14:hiddenFill>
+            </a:ext>
+          </a:extLst>
+        </p:spPr>
+      </p:pic>
     </p:spTree>
     <p:extLst>
       <p:ext uri="{BB962C8B-B14F-4D97-AF65-F5344CB8AC3E}">
-        <p14:creationId xmlns:p14="http://schemas.microsoft.com/office/powerpoint/2010/main" val="854628802"/>
+        <p14:creationId xmlns:p14="http://schemas.microsoft.com/office/powerpoint/2010/main" val="1073627397"/>
       </p:ext>
     </p:extLst>
   </p:cSld>
@@ -12241,7 +12126,7 @@
             <a:pPr algn="ctr"/>
             <a:r>
               <a:rPr lang="fr-FR" sz="3200" b="1" dirty="0"/>
-              <a:t>On compare les deux vecteurs dans leur espace</a:t>
+              <a:t>On compare 2 vecteurs dans leur espace</a:t>
             </a:r>
           </a:p>
         </p:txBody>
@@ -13395,15 +13280,7 @@
             </a:r>
             <a:r>
               <a:rPr lang="fr-FR" sz="1400" b="1" dirty="0"/>
-              <a:t>similarité cosinus x </a:t>
-            </a:r>
-            <a:r>
-              <a:rPr lang="fr-FR" sz="1400" b="1" dirty="0" err="1"/>
-              <a:t>features</a:t>
-            </a:r>
-            <a:r>
-              <a:rPr lang="fr-FR" sz="1400" b="1" dirty="0"/>
-              <a:t>)</a:t>
+              <a:t>similarité cosinus / caractéristiques)</a:t>
             </a:r>
             <a:endParaRPr lang="fr-FR" sz="1400" dirty="0"/>
           </a:p>
@@ -13688,6 +13565,79 @@
           <a:p>
             <a:pPr algn="ctr"/>
             <a:endParaRPr lang="fr-FR"/>
+          </a:p>
+        </p:txBody>
+      </p:sp>
+      <p:sp>
+        <p:nvSpPr>
+          <p:cNvPr id="3" name="ZoneTexte 2">
+            <a:extLst>
+              <a:ext uri="{FF2B5EF4-FFF2-40B4-BE49-F238E27FC236}">
+                <a16:creationId xmlns:a16="http://schemas.microsoft.com/office/drawing/2014/main" id="{81C0314B-CBF2-6A1D-3E83-476CC6FA853B}"/>
+              </a:ext>
+            </a:extLst>
+          </p:cNvPr>
+          <p:cNvSpPr txBox="1"/>
+          <p:nvPr/>
+        </p:nvSpPr>
+        <p:spPr>
+          <a:xfrm>
+            <a:off x="7764019" y="5877322"/>
+            <a:ext cx="4148939" cy="646331"/>
+          </a:xfrm>
+          <a:prstGeom prst="rect">
+            <a:avLst/>
+          </a:prstGeom>
+          <a:noFill/>
+        </p:spPr>
+        <p:txBody>
+          <a:bodyPr wrap="square">
+            <a:spAutoFit/>
+          </a:bodyPr>
+          <a:lstStyle/>
+          <a:p>
+            <a:pPr marL="0" marR="0" lvl="0" indent="0" algn="l" defTabSz="914400" rtl="0" eaLnBrk="1" fontAlgn="auto" latinLnBrk="0" hangingPunct="1">
+              <a:lnSpc>
+                <a:spcPct val="100000"/>
+              </a:lnSpc>
+              <a:spcBef>
+                <a:spcPts val="0"/>
+              </a:spcBef>
+              <a:spcAft>
+                <a:spcPts val="0"/>
+              </a:spcAft>
+              <a:buClrTx/>
+              <a:buSzTx/>
+              <a:buFontTx/>
+              <a:buNone/>
+              <a:tabLst/>
+              <a:defRPr/>
+            </a:pPr>
+            <a:r>
+              <a:rPr lang="fr-FR" dirty="0"/>
+              <a:t>score = 0.7 × </a:t>
+            </a:r>
+            <a:r>
+              <a:rPr lang="fr-FR" dirty="0" err="1"/>
+              <a:t>similarité_image</a:t>
+            </a:r>
+            <a:r>
+              <a:rPr lang="fr-FR" dirty="0"/>
+              <a:t> + 0.2 × </a:t>
+            </a:r>
+            <a:r>
+              <a:rPr lang="fr-FR" dirty="0" err="1"/>
+              <a:t>similarité_style</a:t>
+            </a:r>
+            <a:r>
+              <a:rPr lang="fr-FR" dirty="0"/>
+              <a:t> + 0.1 × </a:t>
+            </a:r>
+            <a:r>
+              <a:rPr lang="fr-FR" dirty="0" err="1"/>
+              <a:t>similarité_couleur</a:t>
+            </a:r>
+            <a:endParaRPr lang="fr-FR" dirty="0"/>
           </a:p>
         </p:txBody>
       </p:sp>
@@ -13723,6 +13673,94 @@
       </p:grpSpPr>
       <p:sp>
         <p:nvSpPr>
+          <p:cNvPr id="5" name="Rectangle : coins arrondis 4">
+            <a:extLst>
+              <a:ext uri="{FF2B5EF4-FFF2-40B4-BE49-F238E27FC236}">
+                <a16:creationId xmlns:a16="http://schemas.microsoft.com/office/drawing/2014/main" id="{2206792B-9D39-C28A-5C7D-FD245CE05FBD}"/>
+              </a:ext>
+            </a:extLst>
+          </p:cNvPr>
+          <p:cNvSpPr/>
+          <p:nvPr/>
+        </p:nvSpPr>
+        <p:spPr>
+          <a:xfrm>
+            <a:off x="618186" y="4153145"/>
+            <a:ext cx="11214100" cy="2327520"/>
+          </a:xfrm>
+          <a:prstGeom prst="roundRect">
+            <a:avLst/>
+          </a:prstGeom>
+        </p:spPr>
+        <p:style>
+          <a:lnRef idx="1">
+            <a:schemeClr val="accent2"/>
+          </a:lnRef>
+          <a:fillRef idx="2">
+            <a:schemeClr val="accent2"/>
+          </a:fillRef>
+          <a:effectRef idx="1">
+            <a:schemeClr val="accent2"/>
+          </a:effectRef>
+          <a:fontRef idx="minor">
+            <a:schemeClr val="dk1"/>
+          </a:fontRef>
+        </p:style>
+        <p:txBody>
+          <a:bodyPr rtlCol="0" anchor="ctr"/>
+          <a:lstStyle/>
+          <a:p>
+            <a:pPr algn="ctr"/>
+            <a:endParaRPr lang="fr-FR"/>
+          </a:p>
+        </p:txBody>
+      </p:sp>
+      <p:sp>
+        <p:nvSpPr>
+          <p:cNvPr id="4" name="Rectangle : coins arrondis 3">
+            <a:extLst>
+              <a:ext uri="{FF2B5EF4-FFF2-40B4-BE49-F238E27FC236}">
+                <a16:creationId xmlns:a16="http://schemas.microsoft.com/office/drawing/2014/main" id="{CCC15CF0-832B-5101-A9A3-7BF6F7A503A2}"/>
+              </a:ext>
+            </a:extLst>
+          </p:cNvPr>
+          <p:cNvSpPr/>
+          <p:nvPr/>
+        </p:nvSpPr>
+        <p:spPr>
+          <a:xfrm>
+            <a:off x="618186" y="1690688"/>
+            <a:ext cx="11214100" cy="2327520"/>
+          </a:xfrm>
+          <a:prstGeom prst="roundRect">
+            <a:avLst/>
+          </a:prstGeom>
+        </p:spPr>
+        <p:style>
+          <a:lnRef idx="1">
+            <a:schemeClr val="accent5"/>
+          </a:lnRef>
+          <a:fillRef idx="2">
+            <a:schemeClr val="accent5"/>
+          </a:fillRef>
+          <a:effectRef idx="1">
+            <a:schemeClr val="accent5"/>
+          </a:effectRef>
+          <a:fontRef idx="minor">
+            <a:schemeClr val="dk1"/>
+          </a:fontRef>
+        </p:style>
+        <p:txBody>
+          <a:bodyPr rtlCol="0" anchor="ctr"/>
+          <a:lstStyle/>
+          <a:p>
+            <a:pPr algn="ctr"/>
+            <a:endParaRPr lang="fr-FR"/>
+          </a:p>
+        </p:txBody>
+      </p:sp>
+      <p:sp>
+        <p:nvSpPr>
           <p:cNvPr id="2" name="Titre 1">
             <a:extLst>
               <a:ext uri="{FF2B5EF4-FFF2-40B4-BE49-F238E27FC236}">
@@ -13739,14 +13777,16 @@
         </p:nvSpPr>
         <p:spPr/>
         <p:txBody>
-          <a:bodyPr/>
+          <a:bodyPr>
+            <a:normAutofit/>
+          </a:bodyPr>
           <a:lstStyle/>
           <a:p>
             <a:r>
-              <a:rPr lang="fr-FR" b="1" dirty="0"/>
+              <a:rPr lang="fr-FR" sz="6000" b="1" dirty="0"/>
               <a:t>Exemple</a:t>
             </a:r>
-            <a:endParaRPr lang="fr-FR" dirty="0"/>
+            <a:endParaRPr lang="fr-FR" sz="6000" dirty="0"/>
           </a:p>
         </p:txBody>
       </p:sp>
@@ -13780,7 +13820,7 @@
               <a:buNone/>
             </a:pPr>
             <a:r>
-              <a:rPr lang="fr-FR" dirty="0"/>
+              <a:rPr lang="fr-FR" b="1" dirty="0"/>
               <a:t>L'utilisateur possède :</a:t>
             </a:r>
           </a:p>
@@ -13813,7 +13853,7 @@
               <a:buNone/>
             </a:pPr>
             <a:r>
-              <a:rPr lang="fr-FR" dirty="0"/>
+              <a:rPr lang="fr-FR" b="1" dirty="0"/>
               <a:t>Le système recherche:</a:t>
             </a:r>
           </a:p>
@@ -14464,13 +14504,13 @@
           <p:nvPr>
             <p:extLst>
               <p:ext uri="{D42A27DB-BD31-4B8C-83A1-F6EECF244321}">
-                <p14:modId xmlns:p14="http://schemas.microsoft.com/office/powerpoint/2010/main" val="1447447523"/>
+                <p14:modId xmlns:p14="http://schemas.microsoft.com/office/powerpoint/2010/main" val="3178792016"/>
               </p:ext>
             </p:extLst>
           </p:nvPr>
         </p:nvGraphicFramePr>
         <p:xfrm>
-          <a:off x="1940513" y="2284731"/>
+          <a:off x="2243371" y="2284731"/>
           <a:ext cx="6027873" cy="1463040"/>
         </p:xfrm>
         <a:graphic>
@@ -14906,8 +14946,8 @@
         </p:nvSpPr>
         <p:spPr>
           <a:xfrm>
-            <a:off x="1396139" y="1690688"/>
-            <a:ext cx="7623875" cy="461665"/>
+            <a:off x="1698997" y="1690688"/>
+            <a:ext cx="9331962" cy="461665"/>
           </a:xfrm>
           <a:prstGeom prst="rect">
             <a:avLst/>
@@ -14926,15 +14966,7 @@
             </a:r>
             <a:r>
               <a:rPr lang="fr-FR" sz="2400" b="1" dirty="0"/>
-              <a:t> d'</a:t>
-            </a:r>
-            <a:r>
-              <a:rPr lang="fr-FR" sz="2400" b="1" dirty="0" err="1"/>
-              <a:t>outfits</a:t>
-            </a:r>
-            <a:r>
-              <a:rPr lang="fr-FR" sz="2400" b="1" dirty="0"/>
-              <a:t> (positifs / compatible)</a:t>
+              <a:t> existant (associations cohérentes)</a:t>
             </a:r>
           </a:p>
         </p:txBody>
@@ -14954,13 +14986,13 @@
           <p:nvPr>
             <p:extLst>
               <p:ext uri="{D42A27DB-BD31-4B8C-83A1-F6EECF244321}">
-                <p14:modId xmlns:p14="http://schemas.microsoft.com/office/powerpoint/2010/main" val="1504291127"/>
+                <p14:modId xmlns:p14="http://schemas.microsoft.com/office/powerpoint/2010/main" val="838084049"/>
               </p:ext>
             </p:extLst>
           </p:nvPr>
         </p:nvGraphicFramePr>
         <p:xfrm>
-          <a:off x="1940513" y="4671101"/>
+          <a:off x="2243371" y="4671101"/>
           <a:ext cx="6027873" cy="1463040"/>
         </p:xfrm>
         <a:graphic>
@@ -15396,8 +15428,8 @@
         </p:nvSpPr>
         <p:spPr>
           <a:xfrm>
-            <a:off x="1396140" y="4077058"/>
-            <a:ext cx="5934558" cy="461665"/>
+            <a:off x="1698997" y="4077058"/>
+            <a:ext cx="9821360" cy="461665"/>
           </a:xfrm>
           <a:prstGeom prst="rect">
             <a:avLst/>
@@ -15416,7 +15448,7 @@
             </a:r>
             <a:r>
               <a:rPr lang="fr-FR" sz="2400" b="1" dirty="0"/>
-              <a:t> construit (négatifs / manquantes)</a:t>
+              <a:t> construit (associations potentiellement incohérente)</a:t>
             </a:r>
           </a:p>
         </p:txBody>
@@ -15435,7 +15467,7 @@
         </p:nvSpPr>
         <p:spPr>
           <a:xfrm>
-            <a:off x="9966060" y="2888476"/>
+            <a:off x="10268918" y="2888476"/>
             <a:ext cx="1084882" cy="2822338"/>
           </a:xfrm>
           <a:prstGeom prst="curvedLeftArrow">
@@ -15485,7 +15517,7 @@
         </p:nvSpPr>
         <p:spPr>
           <a:xfrm>
-            <a:off x="8708754" y="2284731"/>
+            <a:off x="9011612" y="2284731"/>
             <a:ext cx="900193" cy="1446550"/>
           </a:xfrm>
           <a:prstGeom prst="rect">
@@ -15521,7 +15553,7 @@
         </p:nvSpPr>
         <p:spPr>
           <a:xfrm>
-            <a:off x="8708753" y="4679346"/>
+            <a:off x="9011611" y="4679346"/>
             <a:ext cx="900193" cy="1446550"/>
           </a:xfrm>
           <a:prstGeom prst="rect">
@@ -15540,6 +15572,137 @@
               <a:rPr lang="fr-FR" sz="8800" b="1" dirty="0"/>
               <a:t>0</a:t>
             </a:r>
+          </a:p>
+        </p:txBody>
+      </p:sp>
+      <p:sp>
+        <p:nvSpPr>
+          <p:cNvPr id="3" name="ZoneTexte 2">
+            <a:extLst>
+              <a:ext uri="{FF2B5EF4-FFF2-40B4-BE49-F238E27FC236}">
+                <a16:creationId xmlns:a16="http://schemas.microsoft.com/office/drawing/2014/main" id="{A40E9456-CBD2-9650-7A79-E30B83D10E0F}"/>
+              </a:ext>
+            </a:extLst>
+          </p:cNvPr>
+          <p:cNvSpPr txBox="1"/>
+          <p:nvPr/>
+        </p:nvSpPr>
+        <p:spPr>
+          <a:xfrm>
+            <a:off x="9011611" y="2185981"/>
+            <a:ext cx="900193" cy="369332"/>
+          </a:xfrm>
+          <a:prstGeom prst="rect">
+            <a:avLst/>
+          </a:prstGeom>
+          <a:noFill/>
+        </p:spPr>
+        <p:txBody>
+          <a:bodyPr wrap="square">
+            <a:spAutoFit/>
+          </a:bodyPr>
+          <a:lstStyle/>
+          <a:p>
+            <a:r>
+              <a:rPr lang="fr-FR" sz="1800" b="1" dirty="0"/>
+              <a:t>positifs</a:t>
+            </a:r>
+            <a:endParaRPr lang="fr-FR" dirty="0"/>
+          </a:p>
+        </p:txBody>
+      </p:sp>
+      <p:sp>
+        <p:nvSpPr>
+          <p:cNvPr id="5" name="ZoneTexte 4">
+            <a:extLst>
+              <a:ext uri="{FF2B5EF4-FFF2-40B4-BE49-F238E27FC236}">
+                <a16:creationId xmlns:a16="http://schemas.microsoft.com/office/drawing/2014/main" id="{744B6A0D-DA2A-5A36-D523-B3C30979CEA9}"/>
+              </a:ext>
+            </a:extLst>
+          </p:cNvPr>
+          <p:cNvSpPr txBox="1"/>
+          <p:nvPr/>
+        </p:nvSpPr>
+        <p:spPr>
+          <a:xfrm>
+            <a:off x="8928550" y="5875802"/>
+            <a:ext cx="1066313" cy="369332"/>
+          </a:xfrm>
+          <a:prstGeom prst="rect">
+            <a:avLst/>
+          </a:prstGeom>
+          <a:noFill/>
+        </p:spPr>
+        <p:txBody>
+          <a:bodyPr wrap="square">
+            <a:spAutoFit/>
+          </a:bodyPr>
+          <a:lstStyle/>
+          <a:p>
+            <a:pPr algn="ctr"/>
+            <a:r>
+              <a:rPr lang="fr-FR" sz="1800" b="1" dirty="0"/>
+              <a:t>négatifs</a:t>
+            </a:r>
+            <a:endParaRPr lang="fr-FR" dirty="0"/>
+          </a:p>
+        </p:txBody>
+      </p:sp>
+      <p:sp>
+        <p:nvSpPr>
+          <p:cNvPr id="14" name="ZoneTexte 13">
+            <a:extLst>
+              <a:ext uri="{FF2B5EF4-FFF2-40B4-BE49-F238E27FC236}">
+                <a16:creationId xmlns:a16="http://schemas.microsoft.com/office/drawing/2014/main" id="{616DEBC6-53D8-D8B6-7E1A-AD3A418C217E}"/>
+              </a:ext>
+            </a:extLst>
+          </p:cNvPr>
+          <p:cNvSpPr txBox="1"/>
+          <p:nvPr/>
+        </p:nvSpPr>
+        <p:spPr>
+          <a:xfrm rot="16200000">
+            <a:off x="-1057036" y="3633188"/>
+            <a:ext cx="4294017" cy="707886"/>
+          </a:xfrm>
+          <a:prstGeom prst="rect">
+            <a:avLst/>
+          </a:prstGeom>
+        </p:spPr>
+        <p:style>
+          <a:lnRef idx="0">
+            <a:schemeClr val="accent6"/>
+          </a:lnRef>
+          <a:fillRef idx="3">
+            <a:schemeClr val="accent6"/>
+          </a:fillRef>
+          <a:effectRef idx="3">
+            <a:schemeClr val="accent6"/>
+          </a:effectRef>
+          <a:fontRef idx="minor">
+            <a:schemeClr val="lt1"/>
+          </a:fontRef>
+        </p:style>
+        <p:txBody>
+          <a:bodyPr wrap="square">
+            <a:spAutoFit/>
+          </a:bodyPr>
+          <a:lstStyle/>
+          <a:p>
+            <a:pPr algn="ctr"/>
+            <a:r>
+              <a:rPr lang="fr-FR" sz="4000" b="1" dirty="0" err="1"/>
+              <a:t>Dataset</a:t>
+            </a:r>
+            <a:r>
+              <a:rPr lang="fr-FR" sz="4000" b="1" dirty="0"/>
+              <a:t> </a:t>
+            </a:r>
+            <a:r>
+              <a:rPr lang="fr-FR" sz="4000" b="1" dirty="0" err="1"/>
+              <a:t>Outfits</a:t>
+            </a:r>
+            <a:endParaRPr lang="fr-FR" sz="4000" dirty="0"/>
           </a:p>
         </p:txBody>
       </p:sp>
@@ -15934,7 +16097,7 @@
             <a:pPr algn="ctr"/>
             <a:r>
               <a:rPr lang="fr-FR" sz="1400" dirty="0"/>
-              <a:t>1</a:t>
+              <a:t>B</a:t>
             </a:r>
           </a:p>
         </p:txBody>
@@ -15977,7 +16140,7 @@
             <a:pPr algn="ctr"/>
             <a:r>
               <a:rPr lang="fr-FR" sz="1400" dirty="0"/>
-              <a:t>3</a:t>
+              <a:t>D</a:t>
             </a:r>
           </a:p>
         </p:txBody>
@@ -16020,7 +16183,7 @@
             <a:pPr algn="ctr"/>
             <a:r>
               <a:rPr lang="fr-FR" sz="1400" dirty="0"/>
-              <a:t>2</a:t>
+              <a:t>C</a:t>
             </a:r>
           </a:p>
         </p:txBody>
@@ -16131,7 +16294,14 @@
             <a:pPr algn="ctr"/>
             <a:r>
               <a:rPr lang="fr-FR" sz="1400" dirty="0"/>
-              <a:t>Articles</a:t>
+              <a:t>Article</a:t>
+            </a:r>
+          </a:p>
+          <a:p>
+            <a:pPr algn="ctr"/>
+            <a:r>
+              <a:rPr lang="fr-FR" sz="1400" dirty="0"/>
+              <a:t>A</a:t>
             </a:r>
           </a:p>
         </p:txBody>
@@ -16188,7 +16358,14 @@
             <a:pPr algn="ctr"/>
             <a:r>
               <a:rPr lang="fr-FR" sz="1400" dirty="0"/>
-              <a:t>Articles</a:t>
+              <a:t>Article</a:t>
+            </a:r>
+          </a:p>
+          <a:p>
+            <a:pPr algn="ctr"/>
+            <a:r>
+              <a:rPr lang="fr-FR" sz="1400" dirty="0"/>
+              <a:t>E</a:t>
             </a:r>
           </a:p>
         </p:txBody>
@@ -16235,6 +16412,15 @@
           <a:lstStyle/>
           <a:p>
             <a:pPr algn="ctr"/>
+            <a:r>
+              <a:rPr lang="fr-FR" sz="1400" b="1" dirty="0">
+                <a:solidFill>
+                  <a:schemeClr val="bg1"/>
+                </a:solidFill>
+                <a:latin typeface="Courier New" panose="02070309020205020404" pitchFamily="49" charset="0"/>
+              </a:rPr>
+              <a:t>Modèle</a:t>
+            </a:r>
             <a:endParaRPr lang="fr-FR" sz="1400" dirty="0"/>
           </a:p>
         </p:txBody>
@@ -16281,6 +16467,15 @@
           <a:lstStyle/>
           <a:p>
             <a:pPr algn="ctr"/>
+            <a:r>
+              <a:rPr lang="fr-FR" sz="1400" b="1" dirty="0">
+                <a:solidFill>
+                  <a:schemeClr val="bg1"/>
+                </a:solidFill>
+                <a:latin typeface="Courier New" panose="02070309020205020404" pitchFamily="49" charset="0"/>
+              </a:rPr>
+              <a:t>Modèle</a:t>
+            </a:r>
             <a:endParaRPr lang="fr-FR" sz="1400" dirty="0"/>
           </a:p>
         </p:txBody>
@@ -16817,7 +17012,7 @@
         <p:spPr>
           <a:xfrm>
             <a:off x="619581" y="3461873"/>
-            <a:ext cx="1510218" cy="584775"/>
+            <a:ext cx="1590734" cy="584775"/>
           </a:xfrm>
           <a:prstGeom prst="rect">
             <a:avLst/>
@@ -16832,30 +17027,22 @@
           <a:p>
             <a:pPr algn="ctr"/>
             <a:r>
-              <a:rPr lang="fr-FR" sz="1600" b="1" dirty="0" err="1">
-                <a:solidFill>
-                  <a:srgbClr val="FF0000"/>
-                </a:solidFill>
-              </a:rPr>
-              <a:t>Embedding</a:t>
-            </a:r>
-            <a:r>
               <a:rPr lang="fr-FR" sz="1600" b="1" dirty="0">
                 <a:solidFill>
                   <a:srgbClr val="FF0000"/>
                 </a:solidFill>
               </a:rPr>
-              <a:t> Catalogue</a:t>
+              <a:t>Caractéristiques Catalogue</a:t>
             </a:r>
           </a:p>
         </p:txBody>
       </p:sp>
       <p:sp>
         <p:nvSpPr>
-          <p:cNvPr id="124" name="Flèche : bas 123">
+          <p:cNvPr id="125" name="Flèche : bas 124">
             <a:extLst>
               <a:ext uri="{FF2B5EF4-FFF2-40B4-BE49-F238E27FC236}">
-                <a16:creationId xmlns:a16="http://schemas.microsoft.com/office/drawing/2014/main" id="{AF62C224-DB0E-9B02-F42E-446D94283201}"/>
+                <a16:creationId xmlns:a16="http://schemas.microsoft.com/office/drawing/2014/main" id="{01CA8169-0672-702C-6FF6-3CB3F4391001}"/>
               </a:ext>
             </a:extLst>
           </p:cNvPr>
@@ -16864,53 +17051,7 @@
         </p:nvSpPr>
         <p:spPr>
           <a:xfrm>
-            <a:off x="5739373" y="1479337"/>
-            <a:ext cx="747430" cy="545905"/>
-          </a:xfrm>
-          <a:prstGeom prst="downArrow">
-            <a:avLst/>
-          </a:prstGeom>
-        </p:spPr>
-        <p:style>
-          <a:lnRef idx="2">
-            <a:schemeClr val="accent4">
-              <a:shade val="15000"/>
-            </a:schemeClr>
-          </a:lnRef>
-          <a:fillRef idx="1">
-            <a:schemeClr val="accent4"/>
-          </a:fillRef>
-          <a:effectRef idx="0">
-            <a:schemeClr val="accent4"/>
-          </a:effectRef>
-          <a:fontRef idx="minor">
-            <a:schemeClr val="lt1"/>
-          </a:fontRef>
-        </p:style>
-        <p:txBody>
-          <a:bodyPr rtlCol="0" anchor="ctr"/>
-          <a:lstStyle/>
-          <a:p>
-            <a:pPr algn="ctr"/>
-            <a:endParaRPr lang="fr-FR"/>
-          </a:p>
-        </p:txBody>
-      </p:sp>
-      <p:sp>
-        <p:nvSpPr>
-          <p:cNvPr id="125" name="Flèche : bas 124">
-            <a:extLst>
-              <a:ext uri="{FF2B5EF4-FFF2-40B4-BE49-F238E27FC236}">
-                <a16:creationId xmlns:a16="http://schemas.microsoft.com/office/drawing/2014/main" id="{01CA8169-0672-702C-6FF6-3CB3F4391001}"/>
-              </a:ext>
-            </a:extLst>
-          </p:cNvPr>
-          <p:cNvSpPr/>
-          <p:nvPr/>
-        </p:nvSpPr>
-        <p:spPr>
-          <a:xfrm>
-            <a:off x="5739373" y="616472"/>
+            <a:off x="5678100" y="993311"/>
             <a:ext cx="747430" cy="545905"/>
           </a:xfrm>
           <a:prstGeom prst="downArrow">
@@ -17064,7 +17205,7 @@
         <p:spPr>
           <a:xfrm>
             <a:off x="619581" y="1471202"/>
-            <a:ext cx="1510218" cy="584775"/>
+            <a:ext cx="1590734" cy="584775"/>
           </a:xfrm>
           <a:prstGeom prst="rect">
             <a:avLst/>
@@ -17079,20 +17220,12 @@
           <a:p>
             <a:pPr algn="ctr"/>
             <a:r>
-              <a:rPr lang="fr-FR" sz="1600" b="1" dirty="0" err="1">
-                <a:solidFill>
-                  <a:srgbClr val="FF0000"/>
-                </a:solidFill>
-              </a:rPr>
-              <a:t>Embedding</a:t>
-            </a:r>
-            <a:r>
               <a:rPr lang="fr-FR" sz="1600" b="1" dirty="0">
                 <a:solidFill>
                   <a:srgbClr val="FF0000"/>
                 </a:solidFill>
               </a:rPr>
-              <a:t> </a:t>
+              <a:t>Caractéristiques </a:t>
             </a:r>
           </a:p>
           <a:p>
@@ -17122,8 +17255,8 @@
         </p:nvSpPr>
         <p:spPr>
           <a:xfrm>
-            <a:off x="5574238" y="1098031"/>
-            <a:ext cx="1077701" cy="369332"/>
+            <a:off x="5355850" y="599804"/>
+            <a:ext cx="1391930" cy="369332"/>
           </a:xfrm>
           <a:prstGeom prst="rect">
             <a:avLst/>
@@ -17139,9 +17272,243 @@
             <a:pPr algn="ctr"/>
             <a:r>
               <a:rPr lang="fr-FR" sz="1800" b="1" dirty="0"/>
-              <a:t>Base Line </a:t>
+              <a:t>+ Base Line </a:t>
             </a:r>
             <a:endParaRPr lang="fr-FR" dirty="0"/>
+          </a:p>
+        </p:txBody>
+      </p:sp>
+      <p:sp>
+        <p:nvSpPr>
+          <p:cNvPr id="4" name="ZoneTexte 3">
+            <a:extLst>
+              <a:ext uri="{FF2B5EF4-FFF2-40B4-BE49-F238E27FC236}">
+                <a16:creationId xmlns:a16="http://schemas.microsoft.com/office/drawing/2014/main" id="{F4A3B143-1520-B832-CCCE-6C8E56283DB9}"/>
+              </a:ext>
+            </a:extLst>
+          </p:cNvPr>
+          <p:cNvSpPr txBox="1"/>
+          <p:nvPr/>
+        </p:nvSpPr>
+        <p:spPr>
+          <a:xfrm>
+            <a:off x="3505405" y="1711969"/>
+            <a:ext cx="755109" cy="523220"/>
+          </a:xfrm>
+          <a:prstGeom prst="rect">
+            <a:avLst/>
+          </a:prstGeom>
+          <a:noFill/>
+        </p:spPr>
+        <p:txBody>
+          <a:bodyPr wrap="square">
+            <a:spAutoFit/>
+          </a:bodyPr>
+          <a:lstStyle/>
+          <a:p>
+            <a:pPr algn="ctr"/>
+            <a:r>
+              <a:rPr lang="fr-FR" sz="1400" dirty="0"/>
+              <a:t>Veste rouge</a:t>
+            </a:r>
+          </a:p>
+        </p:txBody>
+      </p:sp>
+      <p:sp>
+        <p:nvSpPr>
+          <p:cNvPr id="6" name="ZoneTexte 5">
+            <a:extLst>
+              <a:ext uri="{FF2B5EF4-FFF2-40B4-BE49-F238E27FC236}">
+                <a16:creationId xmlns:a16="http://schemas.microsoft.com/office/drawing/2014/main" id="{9EE41387-FDDC-D94D-7F3B-E0424E63D257}"/>
+              </a:ext>
+            </a:extLst>
+          </p:cNvPr>
+          <p:cNvSpPr txBox="1"/>
+          <p:nvPr/>
+        </p:nvSpPr>
+        <p:spPr>
+          <a:xfrm>
+            <a:off x="7765006" y="1690280"/>
+            <a:ext cx="891282" cy="523220"/>
+          </a:xfrm>
+          <a:prstGeom prst="rect">
+            <a:avLst/>
+          </a:prstGeom>
+          <a:noFill/>
+        </p:spPr>
+        <p:txBody>
+          <a:bodyPr wrap="square">
+            <a:spAutoFit/>
+          </a:bodyPr>
+          <a:lstStyle/>
+          <a:p>
+            <a:pPr algn="ctr"/>
+            <a:r>
+              <a:rPr lang="fr-FR" sz="1400" dirty="0"/>
+              <a:t>Pantalon vert</a:t>
+            </a:r>
+          </a:p>
+        </p:txBody>
+      </p:sp>
+      <p:sp>
+        <p:nvSpPr>
+          <p:cNvPr id="8" name="ZoneTexte 7">
+            <a:extLst>
+              <a:ext uri="{FF2B5EF4-FFF2-40B4-BE49-F238E27FC236}">
+                <a16:creationId xmlns:a16="http://schemas.microsoft.com/office/drawing/2014/main" id="{01D8F50C-222B-2711-8C79-AAEA48BF7D71}"/>
+              </a:ext>
+            </a:extLst>
+          </p:cNvPr>
+          <p:cNvSpPr txBox="1"/>
+          <p:nvPr/>
+        </p:nvSpPr>
+        <p:spPr>
+          <a:xfrm>
+            <a:off x="5498267" y="1690437"/>
+            <a:ext cx="1080196" cy="523220"/>
+          </a:xfrm>
+          <a:prstGeom prst="rect">
+            <a:avLst/>
+          </a:prstGeom>
+          <a:noFill/>
+        </p:spPr>
+        <p:txBody>
+          <a:bodyPr wrap="square">
+            <a:spAutoFit/>
+          </a:bodyPr>
+          <a:lstStyle/>
+          <a:p>
+            <a:pPr algn="ctr"/>
+            <a:r>
+              <a:rPr lang="fr-FR" sz="1400" dirty="0"/>
+              <a:t>Ceinture noire</a:t>
+            </a:r>
+          </a:p>
+        </p:txBody>
+      </p:sp>
+      <p:sp>
+        <p:nvSpPr>
+          <p:cNvPr id="10" name="ZoneTexte 9">
+            <a:extLst>
+              <a:ext uri="{FF2B5EF4-FFF2-40B4-BE49-F238E27FC236}">
+                <a16:creationId xmlns:a16="http://schemas.microsoft.com/office/drawing/2014/main" id="{951723EA-74D9-C200-95EA-569CD0690F75}"/>
+              </a:ext>
+            </a:extLst>
+          </p:cNvPr>
+          <p:cNvSpPr txBox="1"/>
+          <p:nvPr/>
+        </p:nvSpPr>
+        <p:spPr>
+          <a:xfrm>
+            <a:off x="7959144" y="5940737"/>
+            <a:ext cx="4232856" cy="738664"/>
+          </a:xfrm>
+          <a:prstGeom prst="rect">
+            <a:avLst/>
+          </a:prstGeom>
+          <a:noFill/>
+        </p:spPr>
+        <p:txBody>
+          <a:bodyPr wrap="square">
+            <a:spAutoFit/>
+          </a:bodyPr>
+          <a:lstStyle/>
+          <a:p>
+            <a:pPr marL="0" marR="0" lvl="0" indent="0" algn="l" defTabSz="914400" rtl="0" eaLnBrk="1" fontAlgn="auto" latinLnBrk="0" hangingPunct="1">
+              <a:lnSpc>
+                <a:spcPct val="100000"/>
+              </a:lnSpc>
+              <a:spcBef>
+                <a:spcPts val="0"/>
+              </a:spcBef>
+              <a:spcAft>
+                <a:spcPts val="0"/>
+              </a:spcAft>
+              <a:buClrTx/>
+              <a:buSzTx/>
+              <a:buFontTx/>
+              <a:buNone/>
+              <a:tabLst/>
+              <a:defRPr/>
+            </a:pPr>
+            <a:r>
+              <a:rPr lang="fr-FR" sz="1400" dirty="0"/>
+              <a:t>score =</a:t>
+            </a:r>
+          </a:p>
+          <a:p>
+            <a:pPr lvl="0">
+              <a:defRPr/>
+            </a:pPr>
+            <a:r>
+              <a:rPr lang="fr-FR" sz="1400" dirty="0"/>
+              <a:t>(0,17 × tête + 0,17 × haut + 0.17 × bas + 0.17 × pieds)</a:t>
+            </a:r>
+          </a:p>
+          <a:p>
+            <a:pPr lvl="0">
+              <a:defRPr/>
+            </a:pPr>
+            <a:r>
+              <a:rPr lang="fr-FR" sz="1400" dirty="0"/>
+              <a:t>+ (0.2 × </a:t>
+            </a:r>
+            <a:r>
+              <a:rPr lang="fr-FR" sz="1400" dirty="0" err="1"/>
+              <a:t>similarité_style</a:t>
+            </a:r>
+            <a:r>
+              <a:rPr lang="fr-FR" sz="1400" dirty="0"/>
+              <a:t> + 0.1 × </a:t>
+            </a:r>
+            <a:r>
+              <a:rPr lang="fr-FR" sz="1400" dirty="0" err="1"/>
+              <a:t>similarité_couleur</a:t>
+            </a:r>
+            <a:r>
+              <a:rPr lang="fr-FR" sz="1400" dirty="0"/>
+              <a:t>)</a:t>
+            </a:r>
+          </a:p>
+        </p:txBody>
+      </p:sp>
+      <p:sp>
+        <p:nvSpPr>
+          <p:cNvPr id="11" name="ZoneTexte 10">
+            <a:extLst>
+              <a:ext uri="{FF2B5EF4-FFF2-40B4-BE49-F238E27FC236}">
+                <a16:creationId xmlns:a16="http://schemas.microsoft.com/office/drawing/2014/main" id="{51EFF199-BBB9-BF34-EFBF-776E792F740D}"/>
+              </a:ext>
+            </a:extLst>
+          </p:cNvPr>
+          <p:cNvSpPr txBox="1"/>
+          <p:nvPr/>
+        </p:nvSpPr>
+        <p:spPr>
+          <a:xfrm>
+            <a:off x="5571158" y="5121667"/>
+            <a:ext cx="1258707" cy="338554"/>
+          </a:xfrm>
+          <a:prstGeom prst="rect">
+            <a:avLst/>
+          </a:prstGeom>
+          <a:noFill/>
+        </p:spPr>
+        <p:txBody>
+          <a:bodyPr wrap="square">
+            <a:spAutoFit/>
+          </a:bodyPr>
+          <a:lstStyle/>
+          <a:p>
+            <a:pPr algn="ctr"/>
+            <a:r>
+              <a:rPr lang="fr-FR" sz="1600" b="1" dirty="0">
+                <a:solidFill>
+                  <a:srgbClr val="FF0000"/>
+                </a:solidFill>
+              </a:rPr>
+              <a:t>(A+C+E) ÷ 3</a:t>
+            </a:r>
           </a:p>
         </p:txBody>
       </p:sp>
@@ -18034,8 +18401,8 @@
         </p:nvGrpSpPr>
         <p:grpSpPr>
           <a:xfrm>
-            <a:off x="4850863" y="2912895"/>
-            <a:ext cx="2868478" cy="2362903"/>
+            <a:off x="4850862" y="2912896"/>
+            <a:ext cx="2868477" cy="2362904"/>
             <a:chOff x="838200" y="2001665"/>
             <a:chExt cx="4739326" cy="3746245"/>
           </a:xfrm>
@@ -18162,8 +18529,8 @@
           </p:nvSpPr>
           <p:spPr>
             <a:xfrm>
-              <a:off x="3108128" y="2497760"/>
-              <a:ext cx="900193" cy="1015663"/>
+              <a:off x="3108129" y="2497760"/>
+              <a:ext cx="900193" cy="1015662"/>
             </a:xfrm>
             <a:prstGeom prst="rect">
               <a:avLst/>
@@ -18804,7 +19171,7 @@
           <p:cNvPr id="2" name="Titre 1">
             <a:extLst>
               <a:ext uri="{FF2B5EF4-FFF2-40B4-BE49-F238E27FC236}">
-                <a16:creationId xmlns:a16="http://schemas.microsoft.com/office/drawing/2014/main" id="{207E8AF6-A809-509D-561D-6E1961651184}"/>
+                <a16:creationId xmlns:a16="http://schemas.microsoft.com/office/drawing/2014/main" id="{D9679DA1-3FD0-55DD-A9B9-4C53821F181D}"/>
               </a:ext>
             </a:extLst>
           </p:cNvPr>
@@ -18821,9 +19188,10 @@
           <a:lstStyle/>
           <a:p>
             <a:r>
-              <a:rPr lang="fr-FR" dirty="0"/>
-              <a:t>Résumé</a:t>
-            </a:r>
+              <a:rPr lang="fr-FR" b="1" dirty="0"/>
+              <a:t>Données nécessaires</a:t>
+            </a:r>
+            <a:endParaRPr lang="fr-FR" dirty="0"/>
           </a:p>
         </p:txBody>
       </p:sp>
@@ -18832,7 +19200,7 @@
           <p:cNvPr id="3" name="Espace réservé du contenu 2">
             <a:extLst>
               <a:ext uri="{FF2B5EF4-FFF2-40B4-BE49-F238E27FC236}">
-                <a16:creationId xmlns:a16="http://schemas.microsoft.com/office/drawing/2014/main" id="{AB78CE8B-7F36-4A11-B553-19B0DBA7252B}"/>
+                <a16:creationId xmlns:a16="http://schemas.microsoft.com/office/drawing/2014/main" id="{CCDFAE38-C8A3-B52B-2C31-39332FA8F849}"/>
               </a:ext>
             </a:extLst>
           </p:cNvPr>
@@ -18850,57 +19218,59 @@
           </a:bodyPr>
           <a:lstStyle/>
           <a:p>
-            <a:r>
-              <a:rPr lang="fr-FR" sz="3200" dirty="0" err="1"/>
-              <a:t>Dataset</a:t>
-            </a:r>
-            <a:r>
-              <a:rPr lang="fr-FR" sz="3200" dirty="0"/>
+            <a:pPr marL="0" indent="0">
+              <a:buNone/>
+            </a:pPr>
+            <a:r>
+              <a:rPr lang="fr-FR" dirty="0"/>
+              <a:t>Un </a:t>
+            </a:r>
+            <a:r>
+              <a:rPr lang="fr-FR" dirty="0" err="1"/>
+              <a:t>dataset</a:t>
+            </a:r>
+            <a:r>
+              <a:rPr lang="fr-FR" dirty="0"/>
               <a:t> d'</a:t>
             </a:r>
             <a:r>
-              <a:rPr lang="fr-FR" sz="3200" dirty="0" err="1"/>
+              <a:rPr lang="fr-FR" dirty="0" err="1"/>
               <a:t>outfits</a:t>
             </a:r>
             <a:r>
-              <a:rPr lang="fr-FR" sz="3200" dirty="0"/>
-              <a:t> et Utilisateurs → (Téléchargeable)</a:t>
-            </a:r>
-          </a:p>
-          <a:p>
-            <a:r>
-              <a:rPr lang="fr-FR" sz="3200" dirty="0"/>
-              <a:t>Génération des paires → (Transformation du </a:t>
-            </a:r>
-            <a:r>
-              <a:rPr lang="fr-FR" sz="3200" dirty="0" err="1"/>
+              <a:rPr lang="fr-FR" dirty="0"/>
+              <a:t> permettant d'identifier individuellement les vêtements composant chaque </a:t>
+            </a:r>
+            <a:r>
+              <a:rPr lang="fr-FR" dirty="0" err="1"/>
+              <a:t>outfit</a:t>
+            </a:r>
+            <a:r>
+              <a:rPr lang="fr-FR" dirty="0"/>
+              <a:t>, idéalement avec une image individuelle, une catégorie et/ou des attributs pour chaque vêtement</a:t>
+            </a:r>
+          </a:p>
+          <a:p>
+            <a:pPr marL="0" indent="0">
+              <a:buNone/>
+            </a:pPr>
+            <a:endParaRPr lang="fr-FR" dirty="0"/>
+          </a:p>
+          <a:p>
+            <a:pPr marL="0" indent="0">
+              <a:buNone/>
+            </a:pPr>
+            <a:r>
+              <a:rPr lang="fr-FR" dirty="0"/>
+              <a:t>Un </a:t>
+            </a:r>
+            <a:r>
+              <a:rPr lang="fr-FR" dirty="0" err="1"/>
               <a:t>dataset</a:t>
             </a:r>
             <a:r>
-              <a:rPr lang="fr-FR" sz="3200" dirty="0"/>
-              <a:t>)</a:t>
-            </a:r>
-          </a:p>
-          <a:p>
-            <a:r>
-              <a:rPr lang="fr-FR" sz="3200" dirty="0" err="1"/>
-              <a:t>Embeddings</a:t>
-            </a:r>
-            <a:r>
-              <a:rPr lang="fr-FR" sz="3200" dirty="0"/>
-              <a:t> des vêtements → (Vectorisation des images)</a:t>
-            </a:r>
-          </a:p>
-          <a:p>
-            <a:r>
-              <a:rPr lang="fr-FR" sz="3200" dirty="0"/>
-              <a:t>Modèle de compatibilité → (Entrainement)</a:t>
-            </a:r>
-          </a:p>
-          <a:p>
-            <a:r>
-              <a:rPr lang="fr-FR" sz="3200" dirty="0"/>
-              <a:t>Score de compatibilité</a:t>
+              <a:rPr lang="fr-FR" dirty="0"/>
+              <a:t> de photos d'utilisateurs portant différentes tenues</a:t>
             </a:r>
           </a:p>
         </p:txBody>
@@ -18908,7 +19278,7 @@
     </p:spTree>
     <p:extLst>
       <p:ext uri="{BB962C8B-B14F-4D97-AF65-F5344CB8AC3E}">
-        <p14:creationId xmlns:p14="http://schemas.microsoft.com/office/powerpoint/2010/main" val="2702522502"/>
+        <p14:creationId xmlns:p14="http://schemas.microsoft.com/office/powerpoint/2010/main" val="3522599435"/>
       </p:ext>
     </p:extLst>
   </p:cSld>
@@ -18923,13 +19293,7 @@
   <p:cSld>
     <p:spTree>
       <p:nvGrpSpPr>
-        <p:cNvPr id="1" name="">
-          <a:extLst>
-            <a:ext uri="{FF2B5EF4-FFF2-40B4-BE49-F238E27FC236}">
-              <a16:creationId xmlns:a16="http://schemas.microsoft.com/office/drawing/2014/main" id="{F283213A-4121-8045-8B96-F206B6FD0C2E}"/>
-            </a:ext>
-          </a:extLst>
-        </p:cNvPr>
+        <p:cNvPr id="1" name=""/>
         <p:cNvGrpSpPr/>
         <p:nvPr/>
       </p:nvGrpSpPr>
@@ -18946,7 +19310,7 @@
           <p:cNvPr id="2" name="Titre 1">
             <a:extLst>
               <a:ext uri="{FF2B5EF4-FFF2-40B4-BE49-F238E27FC236}">
-                <a16:creationId xmlns:a16="http://schemas.microsoft.com/office/drawing/2014/main" id="{98EA7BA9-DF68-23C7-47A3-65E3B1A91A4C}"/>
+                <a16:creationId xmlns:a16="http://schemas.microsoft.com/office/drawing/2014/main" id="{EFF47304-A677-F55B-B5DE-7B026252947C}"/>
               </a:ext>
             </a:extLst>
           </p:cNvPr>
@@ -18959,8 +19323,8 @@
         </p:nvSpPr>
         <p:spPr>
           <a:xfrm>
-            <a:off x="1524000" y="385482"/>
-            <a:ext cx="9144000" cy="1387755"/>
+            <a:off x="1524000" y="1122363"/>
+            <a:ext cx="9144000" cy="1002272"/>
           </a:xfrm>
         </p:spPr>
         <p:txBody>
@@ -18969,8 +19333,13 @@
           <a:p>
             <a:r>
               <a:rPr lang="fr-FR" dirty="0"/>
-              <a:t>Besoin métier</a:t>
-            </a:r>
+              <a:t>Contexte et objectif du </a:t>
+            </a:r>
+            <a:r>
+              <a:rPr lang="fr-FR" dirty="0" err="1"/>
+              <a:t>PoC</a:t>
+            </a:r>
+            <a:endParaRPr lang="fr-FR" dirty="0"/>
           </a:p>
         </p:txBody>
       </p:sp>
@@ -18979,7 +19348,7 @@
           <p:cNvPr id="3" name="Sous-titre 2">
             <a:extLst>
               <a:ext uri="{FF2B5EF4-FFF2-40B4-BE49-F238E27FC236}">
-                <a16:creationId xmlns:a16="http://schemas.microsoft.com/office/drawing/2014/main" id="{96D39539-8546-959C-BAF4-41CED0714355}"/>
+                <a16:creationId xmlns:a16="http://schemas.microsoft.com/office/drawing/2014/main" id="{C57530C9-4457-F5E1-E0A9-3614B28FE155}"/>
               </a:ext>
             </a:extLst>
           </p:cNvPr>
@@ -18992,52 +19361,48 @@
         </p:nvSpPr>
         <p:spPr>
           <a:xfrm>
-            <a:off x="1524000" y="2138007"/>
-            <a:ext cx="9144000" cy="3792071"/>
+            <a:off x="1524000" y="2510118"/>
+            <a:ext cx="9144000" cy="3818964"/>
           </a:xfrm>
         </p:spPr>
         <p:txBody>
           <a:bodyPr>
-            <a:normAutofit fontScale="92500" lnSpcReduction="10000"/>
+            <a:normAutofit/>
           </a:bodyPr>
           <a:lstStyle/>
           <a:p>
             <a:r>
               <a:rPr lang="fr-FR" b="1" dirty="0"/>
-              <a:t>Constat</a:t>
-            </a:r>
+              <a:t>Besoin métier</a:t>
+            </a:r>
+          </a:p>
+          <a:p>
+            <a:r>
+              <a:rPr lang="fr-FR" dirty="0"/>
+              <a:t>Proposer aux utilisateurs de </a:t>
+            </a:r>
+            <a:r>
+              <a:rPr lang="fr-FR" dirty="0" err="1"/>
+              <a:t>FashionInsta</a:t>
+            </a:r>
+            <a:r>
+              <a:rPr lang="fr-FR" dirty="0"/>
+              <a:t> des recommandations d’articles personnalisées, adaptées à leur profil et à leurs préférences, au sein d’une application mobile.</a:t>
+            </a:r>
+          </a:p>
+          <a:p>
             <a:endParaRPr lang="fr-FR" dirty="0"/>
           </a:p>
           <a:p>
             <a:r>
+              <a:rPr lang="fr-FR" b="1" dirty="0"/>
+              <a:t>Objectif de ce POC</a:t>
+            </a:r>
+          </a:p>
+          <a:p>
+            <a:r>
               <a:rPr lang="fr-FR" dirty="0"/>
-              <a:t>Les utilisateurs disposent d'un volume important de contenus/produits parmi lesquels il est difficile d'identifier rapidement ceux qui correspondent à leurs attentes.</a:t>
-            </a:r>
-          </a:p>
-          <a:p>
-            <a:r>
-              <a:rPr lang="fr-FR" b="1" dirty="0"/>
-              <a:t>Besoin</a:t>
-            </a:r>
-            <a:endParaRPr lang="fr-FR" dirty="0"/>
-          </a:p>
-          <a:p>
-            <a:r>
-              <a:rPr lang="fr-FR" dirty="0"/>
-              <a:t>Mettre en place un outil capable de proposer automatiquement à chaque utilisateur des recommandations personnalisées à partir de son profil et de son comportement.</a:t>
-            </a:r>
-          </a:p>
-          <a:p>
-            <a:r>
-              <a:rPr lang="fr-FR" b="1" dirty="0"/>
-              <a:t>Objectif métier</a:t>
-            </a:r>
-            <a:endParaRPr lang="fr-FR" dirty="0"/>
-          </a:p>
-          <a:p>
-            <a:r>
-              <a:rPr lang="fr-FR" dirty="0"/>
-              <a:t>Améliorer la pertinence des contenus proposés et faciliter la découverte de contenus susceptibles d'intéresser l'utilisateur.</a:t>
+              <a:t>Valider la faisabilité technique d’une solution IA/ML pour la recommandation personnalisée, à travers un périmètre volontairement restreint permettant une expérimentation rapide.</a:t>
             </a:r>
           </a:p>
           <a:p>
@@ -19048,7 +19413,7 @@
     </p:spTree>
     <p:extLst>
       <p:ext uri="{BB962C8B-B14F-4D97-AF65-F5344CB8AC3E}">
-        <p14:creationId xmlns:p14="http://schemas.microsoft.com/office/powerpoint/2010/main" val="915999330"/>
+        <p14:creationId xmlns:p14="http://schemas.microsoft.com/office/powerpoint/2010/main" val="854628802"/>
       </p:ext>
     </p:extLst>
   </p:cSld>
@@ -19080,7 +19445,7 @@
           <p:cNvPr id="2" name="Titre 1">
             <a:extLst>
               <a:ext uri="{FF2B5EF4-FFF2-40B4-BE49-F238E27FC236}">
-                <a16:creationId xmlns:a16="http://schemas.microsoft.com/office/drawing/2014/main" id="{D9679DA1-3FD0-55DD-A9B9-4C53821F181D}"/>
+                <a16:creationId xmlns:a16="http://schemas.microsoft.com/office/drawing/2014/main" id="{207E8AF6-A809-509D-561D-6E1961651184}"/>
               </a:ext>
             </a:extLst>
           </p:cNvPr>
@@ -19097,10 +19462,9 @@
           <a:lstStyle/>
           <a:p>
             <a:r>
-              <a:rPr lang="fr-FR" b="1" dirty="0"/>
-              <a:t>Données nécessaires</a:t>
-            </a:r>
-            <a:endParaRPr lang="fr-FR" dirty="0"/>
+              <a:rPr lang="fr-FR" dirty="0"/>
+              <a:t>Résumé</a:t>
+            </a:r>
           </a:p>
         </p:txBody>
       </p:sp>
@@ -19109,7 +19473,7 @@
           <p:cNvPr id="3" name="Espace réservé du contenu 2">
             <a:extLst>
               <a:ext uri="{FF2B5EF4-FFF2-40B4-BE49-F238E27FC236}">
-                <a16:creationId xmlns:a16="http://schemas.microsoft.com/office/drawing/2014/main" id="{CCDFAE38-C8A3-B52B-2C31-39332FA8F849}"/>
+                <a16:creationId xmlns:a16="http://schemas.microsoft.com/office/drawing/2014/main" id="{AB78CE8B-7F36-4A11-B553-19B0DBA7252B}"/>
               </a:ext>
             </a:extLst>
           </p:cNvPr>
@@ -19127,59 +19491,57 @@
           </a:bodyPr>
           <a:lstStyle/>
           <a:p>
-            <a:pPr marL="0" indent="0">
-              <a:buNone/>
-            </a:pPr>
-            <a:r>
-              <a:rPr lang="fr-FR" dirty="0"/>
-              <a:t>Un </a:t>
-            </a:r>
-            <a:r>
-              <a:rPr lang="fr-FR" dirty="0" err="1"/>
+            <a:r>
+              <a:rPr lang="fr-FR" sz="3200" dirty="0" err="1"/>
+              <a:t>Dataset</a:t>
+            </a:r>
+            <a:r>
+              <a:rPr lang="fr-FR" sz="3200" dirty="0"/>
+              <a:t> d'</a:t>
+            </a:r>
+            <a:r>
+              <a:rPr lang="fr-FR" sz="3200" dirty="0" err="1"/>
+              <a:t>outfits</a:t>
+            </a:r>
+            <a:r>
+              <a:rPr lang="fr-FR" sz="3200" dirty="0"/>
+              <a:t> et Utilisateurs → (Téléchargeable)</a:t>
+            </a:r>
+          </a:p>
+          <a:p>
+            <a:r>
+              <a:rPr lang="fr-FR" sz="3200" dirty="0"/>
+              <a:t>Génération des paires → (Transformation du </a:t>
+            </a:r>
+            <a:r>
+              <a:rPr lang="fr-FR" sz="3200" dirty="0" err="1"/>
               <a:t>dataset</a:t>
             </a:r>
             <a:r>
-              <a:rPr lang="fr-FR" dirty="0"/>
-              <a:t> d'</a:t>
-            </a:r>
-            <a:r>
-              <a:rPr lang="fr-FR" dirty="0" err="1"/>
-              <a:t>outfits</a:t>
-            </a:r>
-            <a:r>
-              <a:rPr lang="fr-FR" dirty="0"/>
-              <a:t> permettant d'identifier individuellement les vêtements composant chaque </a:t>
-            </a:r>
-            <a:r>
-              <a:rPr lang="fr-FR" dirty="0" err="1"/>
-              <a:t>outfit</a:t>
-            </a:r>
-            <a:r>
-              <a:rPr lang="fr-FR" dirty="0"/>
-              <a:t>, idéalement avec une image individuelle, une catégorie et/ou des attributs pour chaque vêtement</a:t>
-            </a:r>
-          </a:p>
-          <a:p>
-            <a:pPr marL="0" indent="0">
-              <a:buNone/>
-            </a:pPr>
-            <a:endParaRPr lang="fr-FR" dirty="0"/>
-          </a:p>
-          <a:p>
-            <a:pPr marL="0" indent="0">
-              <a:buNone/>
-            </a:pPr>
-            <a:r>
-              <a:rPr lang="fr-FR" dirty="0"/>
-              <a:t>Un </a:t>
-            </a:r>
-            <a:r>
-              <a:rPr lang="fr-FR" dirty="0" err="1"/>
-              <a:t>dataset</a:t>
-            </a:r>
-            <a:r>
-              <a:rPr lang="fr-FR" dirty="0"/>
-              <a:t> de photos d'utilisateurs portant différentes tenues</a:t>
+              <a:rPr lang="fr-FR" sz="3200" dirty="0"/>
+              <a:t>)</a:t>
+            </a:r>
+          </a:p>
+          <a:p>
+            <a:r>
+              <a:rPr lang="fr-FR" sz="3200" dirty="0" err="1"/>
+              <a:t>Embeddings</a:t>
+            </a:r>
+            <a:r>
+              <a:rPr lang="fr-FR" sz="3200" dirty="0"/>
+              <a:t> des vêtements → (Vectorisation des images)</a:t>
+            </a:r>
+          </a:p>
+          <a:p>
+            <a:r>
+              <a:rPr lang="fr-FR" sz="3200" dirty="0"/>
+              <a:t>Modèle de compatibilité → (Entrainement)</a:t>
+            </a:r>
+          </a:p>
+          <a:p>
+            <a:r>
+              <a:rPr lang="fr-FR" sz="3200" dirty="0"/>
+              <a:t>Score de compatibilité</a:t>
             </a:r>
           </a:p>
         </p:txBody>
@@ -19187,7 +19549,7 @@
     </p:spTree>
     <p:extLst>
       <p:ext uri="{BB962C8B-B14F-4D97-AF65-F5344CB8AC3E}">
-        <p14:creationId xmlns:p14="http://schemas.microsoft.com/office/powerpoint/2010/main" val="3522599435"/>
+        <p14:creationId xmlns:p14="http://schemas.microsoft.com/office/powerpoint/2010/main" val="2702522502"/>
       </p:ext>
     </p:extLst>
   </p:cSld>
@@ -20094,699 +20456,6 @@
   <p:cSld>
     <p:spTree>
       <p:nvGrpSpPr>
-        <p:cNvPr id="1" name=""/>
-        <p:cNvGrpSpPr/>
-        <p:nvPr/>
-      </p:nvGrpSpPr>
-      <p:grpSpPr>
-        <a:xfrm>
-          <a:off x="0" y="0"/>
-          <a:ext cx="0" cy="0"/>
-          <a:chOff x="0" y="0"/>
-          <a:chExt cx="0" cy="0"/>
-        </a:xfrm>
-      </p:grpSpPr>
-      <p:sp>
-        <p:nvSpPr>
-          <p:cNvPr id="2" name="Titre 1">
-            <a:extLst>
-              <a:ext uri="{FF2B5EF4-FFF2-40B4-BE49-F238E27FC236}">
-                <a16:creationId xmlns:a16="http://schemas.microsoft.com/office/drawing/2014/main" id="{A69CFF2A-4830-4872-5408-728EB57AE27A}"/>
-              </a:ext>
-            </a:extLst>
-          </p:cNvPr>
-          <p:cNvSpPr>
-            <a:spLocks noGrp="1"/>
-          </p:cNvSpPr>
-          <p:nvPr>
-            <p:ph type="title"/>
-          </p:nvPr>
-        </p:nvSpPr>
-        <p:spPr/>
-        <p:txBody>
-          <a:bodyPr/>
-          <a:lstStyle/>
-          <a:p>
-            <a:r>
-              <a:rPr lang="fr-FR" dirty="0" err="1"/>
-              <a:t>Datasets</a:t>
-            </a:r>
-            <a:r>
-              <a:rPr lang="fr-FR" dirty="0"/>
-              <a:t> et stratégie de données</a:t>
-            </a:r>
-          </a:p>
-        </p:txBody>
-      </p:sp>
-      <p:graphicFrame>
-        <p:nvGraphicFramePr>
-          <p:cNvPr id="4" name="Tableau 3">
-            <a:extLst>
-              <a:ext uri="{FF2B5EF4-FFF2-40B4-BE49-F238E27FC236}">
-                <a16:creationId xmlns:a16="http://schemas.microsoft.com/office/drawing/2014/main" id="{D87C09F4-AF2F-9188-ACFA-8EE151C9DE35}"/>
-              </a:ext>
-            </a:extLst>
-          </p:cNvPr>
-          <p:cNvGraphicFramePr>
-            <a:graphicFrameLocks noGrp="1"/>
-          </p:cNvGraphicFramePr>
-          <p:nvPr/>
-        </p:nvGraphicFramePr>
-        <p:xfrm>
-          <a:off x="838200" y="2766854"/>
-          <a:ext cx="10515600" cy="2468880"/>
-        </p:xfrm>
-        <a:graphic>
-          <a:graphicData uri="http://schemas.openxmlformats.org/drawingml/2006/table">
-            <a:tbl>
-              <a:tblPr/>
-              <a:tblGrid>
-                <a:gridCol w="3505200">
-                  <a:extLst>
-                    <a:ext uri="{9D8B030D-6E8A-4147-A177-3AD203B41FA5}">
-                      <a16:colId xmlns:a16="http://schemas.microsoft.com/office/drawing/2014/main" val="1492030840"/>
-                    </a:ext>
-                  </a:extLst>
-                </a:gridCol>
-                <a:gridCol w="3505200">
-                  <a:extLst>
-                    <a:ext uri="{9D8B030D-6E8A-4147-A177-3AD203B41FA5}">
-                      <a16:colId xmlns:a16="http://schemas.microsoft.com/office/drawing/2014/main" val="3016546766"/>
-                    </a:ext>
-                  </a:extLst>
-                </a:gridCol>
-                <a:gridCol w="3505200">
-                  <a:extLst>
-                    <a:ext uri="{9D8B030D-6E8A-4147-A177-3AD203B41FA5}">
-                      <a16:colId xmlns:a16="http://schemas.microsoft.com/office/drawing/2014/main" val="1247021213"/>
-                    </a:ext>
-                  </a:extLst>
-                </a:gridCol>
-              </a:tblGrid>
-              <a:tr h="0">
-                <a:tc>
-                  <a:txBody>
-                    <a:bodyPr/>
-                    <a:lstStyle/>
-                    <a:p>
-                      <a:pPr>
-                        <a:buNone/>
-                      </a:pPr>
-                      <a:r>
-                        <a:rPr lang="fr-FR"/>
-                        <a:t>Dataset</a:t>
-                      </a:r>
-                    </a:p>
-                  </a:txBody>
-                  <a:tcPr anchor="ctr">
-                    <a:lnL>
-                      <a:noFill/>
-                    </a:lnL>
-                    <a:lnR>
-                      <a:noFill/>
-                    </a:lnR>
-                    <a:lnT>
-                      <a:noFill/>
-                    </a:lnT>
-                    <a:lnB>
-                      <a:noFill/>
-                    </a:lnB>
-                    <a:noFill/>
-                  </a:tcPr>
-                </a:tc>
-                <a:tc>
-                  <a:txBody>
-                    <a:bodyPr/>
-                    <a:lstStyle/>
-                    <a:p>
-                      <a:pPr>
-                        <a:buNone/>
-                      </a:pPr>
-                      <a:r>
-                        <a:rPr lang="fr-FR"/>
-                        <a:t>Apport</a:t>
-                      </a:r>
-                    </a:p>
-                  </a:txBody>
-                  <a:tcPr anchor="ctr">
-                    <a:lnL>
-                      <a:noFill/>
-                    </a:lnL>
-                    <a:lnR>
-                      <a:noFill/>
-                    </a:lnR>
-                    <a:lnT>
-                      <a:noFill/>
-                    </a:lnT>
-                    <a:lnB>
-                      <a:noFill/>
-                    </a:lnB>
-                    <a:noFill/>
-                  </a:tcPr>
-                </a:tc>
-                <a:tc>
-                  <a:txBody>
-                    <a:bodyPr/>
-                    <a:lstStyle/>
-                    <a:p>
-                      <a:pPr>
-                        <a:buNone/>
-                      </a:pPr>
-                      <a:r>
-                        <a:rPr lang="fr-FR"/>
-                        <a:t>Limitation</a:t>
-                      </a:r>
-                    </a:p>
-                  </a:txBody>
-                  <a:tcPr anchor="ctr">
-                    <a:lnL>
-                      <a:noFill/>
-                    </a:lnL>
-                    <a:lnR>
-                      <a:noFill/>
-                    </a:lnR>
-                    <a:lnT>
-                      <a:noFill/>
-                    </a:lnT>
-                    <a:lnB>
-                      <a:noFill/>
-                    </a:lnB>
-                    <a:noFill/>
-                  </a:tcPr>
-                </a:tc>
-                <a:extLst>
-                  <a:ext uri="{0D108BD9-81ED-4DB2-BD59-A6C34878D82A}">
-                    <a16:rowId xmlns:a16="http://schemas.microsoft.com/office/drawing/2014/main" val="1141756160"/>
-                  </a:ext>
-                </a:extLst>
-              </a:tr>
-              <a:tr h="0">
-                <a:tc>
-                  <a:txBody>
-                    <a:bodyPr/>
-                    <a:lstStyle/>
-                    <a:p>
-                      <a:pPr>
-                        <a:buNone/>
-                      </a:pPr>
-                      <a:r>
-                        <a:rPr lang="fr-FR"/>
-                        <a:t>IQON / SHIFT15M</a:t>
-                      </a:r>
-                    </a:p>
-                  </a:txBody>
-                  <a:tcPr anchor="ctr">
-                    <a:lnL>
-                      <a:noFill/>
-                    </a:lnL>
-                    <a:lnR>
-                      <a:noFill/>
-                    </a:lnR>
-                    <a:lnT>
-                      <a:noFill/>
-                    </a:lnT>
-                    <a:lnB>
-                      <a:noFill/>
-                    </a:lnB>
-                    <a:noFill/>
-                  </a:tcPr>
-                </a:tc>
-                <a:tc>
-                  <a:txBody>
-                    <a:bodyPr/>
-                    <a:lstStyle/>
-                    <a:p>
-                      <a:pPr>
-                        <a:buNone/>
-                      </a:pPr>
-                      <a:r>
-                        <a:rPr lang="fr-FR"/>
-                        <a:t>utilisateurs + outfits + articles</a:t>
-                      </a:r>
-                    </a:p>
-                  </a:txBody>
-                  <a:tcPr anchor="ctr">
-                    <a:lnL>
-                      <a:noFill/>
-                    </a:lnL>
-                    <a:lnR>
-                      <a:noFill/>
-                    </a:lnR>
-                    <a:lnT>
-                      <a:noFill/>
-                    </a:lnT>
-                    <a:lnB>
-                      <a:noFill/>
-                    </a:lnB>
-                    <a:noFill/>
-                  </a:tcPr>
-                </a:tc>
-                <a:tc>
-                  <a:txBody>
-                    <a:bodyPr/>
-                    <a:lstStyle/>
-                    <a:p>
-                      <a:pPr>
-                        <a:buNone/>
-                      </a:pPr>
-                      <a:r>
-                        <a:rPr lang="fr-FR"/>
-                        <a:t>pas une vraie garde-robe</a:t>
-                      </a:r>
-                    </a:p>
-                  </a:txBody>
-                  <a:tcPr anchor="ctr">
-                    <a:lnL>
-                      <a:noFill/>
-                    </a:lnL>
-                    <a:lnR>
-                      <a:noFill/>
-                    </a:lnR>
-                    <a:lnT>
-                      <a:noFill/>
-                    </a:lnT>
-                    <a:lnB>
-                      <a:noFill/>
-                    </a:lnB>
-                    <a:noFill/>
-                  </a:tcPr>
-                </a:tc>
-                <a:extLst>
-                  <a:ext uri="{0D108BD9-81ED-4DB2-BD59-A6C34878D82A}">
-                    <a16:rowId xmlns:a16="http://schemas.microsoft.com/office/drawing/2014/main" val="4117599913"/>
-                  </a:ext>
-                </a:extLst>
-              </a:tr>
-              <a:tr h="0">
-                <a:tc>
-                  <a:txBody>
-                    <a:bodyPr/>
-                    <a:lstStyle/>
-                    <a:p>
-                      <a:pPr>
-                        <a:buNone/>
-                      </a:pPr>
-                      <a:r>
-                        <a:rPr lang="fr-FR"/>
-                        <a:t>Polyvore Outfits</a:t>
-                      </a:r>
-                    </a:p>
-                  </a:txBody>
-                  <a:tcPr anchor="ctr">
-                    <a:lnL>
-                      <a:noFill/>
-                    </a:lnL>
-                    <a:lnR>
-                      <a:noFill/>
-                    </a:lnR>
-                    <a:lnT>
-                      <a:noFill/>
-                    </a:lnT>
-                    <a:lnB>
-                      <a:noFill/>
-                    </a:lnB>
-                    <a:noFill/>
-                  </a:tcPr>
-                </a:tc>
-                <a:tc>
-                  <a:txBody>
-                    <a:bodyPr/>
-                    <a:lstStyle/>
-                    <a:p>
-                      <a:pPr>
-                        <a:buNone/>
-                      </a:pPr>
-                      <a:r>
-                        <a:rPr lang="fr-FR"/>
-                        <a:t>associations de vêtements</a:t>
-                      </a:r>
-                    </a:p>
-                  </a:txBody>
-                  <a:tcPr anchor="ctr">
-                    <a:lnL>
-                      <a:noFill/>
-                    </a:lnL>
-                    <a:lnR>
-                      <a:noFill/>
-                    </a:lnR>
-                    <a:lnT>
-                      <a:noFill/>
-                    </a:lnT>
-                    <a:lnB>
-                      <a:noFill/>
-                    </a:lnB>
-                    <a:noFill/>
-                  </a:tcPr>
-                </a:tc>
-                <a:tc>
-                  <a:txBody>
-                    <a:bodyPr/>
-                    <a:lstStyle/>
-                    <a:p>
-                      <a:pPr>
-                        <a:buNone/>
-                      </a:pPr>
-                      <a:r>
-                        <a:rPr lang="fr-FR"/>
-                        <a:t>peu de personnalisation utilisateur</a:t>
-                      </a:r>
-                    </a:p>
-                  </a:txBody>
-                  <a:tcPr anchor="ctr">
-                    <a:lnL>
-                      <a:noFill/>
-                    </a:lnL>
-                    <a:lnR>
-                      <a:noFill/>
-                    </a:lnR>
-                    <a:lnT>
-                      <a:noFill/>
-                    </a:lnT>
-                    <a:lnB>
-                      <a:noFill/>
-                    </a:lnB>
-                    <a:noFill/>
-                  </a:tcPr>
-                </a:tc>
-                <a:extLst>
-                  <a:ext uri="{0D108BD9-81ED-4DB2-BD59-A6C34878D82A}">
-                    <a16:rowId xmlns:a16="http://schemas.microsoft.com/office/drawing/2014/main" val="3513299942"/>
-                  </a:ext>
-                </a:extLst>
-              </a:tr>
-              <a:tr h="0">
-                <a:tc>
-                  <a:txBody>
-                    <a:bodyPr/>
-                    <a:lstStyle/>
-                    <a:p>
-                      <a:pPr>
-                        <a:buNone/>
-                      </a:pPr>
-                      <a:r>
-                        <a:rPr lang="fr-FR"/>
-                        <a:t>DeepFashion2</a:t>
-                      </a:r>
-                    </a:p>
-                  </a:txBody>
-                  <a:tcPr anchor="ctr">
-                    <a:lnL>
-                      <a:noFill/>
-                    </a:lnL>
-                    <a:lnR>
-                      <a:noFill/>
-                    </a:lnR>
-                    <a:lnT>
-                      <a:noFill/>
-                    </a:lnT>
-                    <a:lnB>
-                      <a:noFill/>
-                    </a:lnB>
-                    <a:noFill/>
-                  </a:tcPr>
-                </a:tc>
-                <a:tc>
-                  <a:txBody>
-                    <a:bodyPr/>
-                    <a:lstStyle/>
-                    <a:p>
-                      <a:pPr>
-                        <a:buNone/>
-                      </a:pPr>
-                      <a:r>
-                        <a:rPr lang="fr-FR"/>
-                        <a:t>détection/segmentation</a:t>
-                      </a:r>
-                    </a:p>
-                  </a:txBody>
-                  <a:tcPr anchor="ctr">
-                    <a:lnL>
-                      <a:noFill/>
-                    </a:lnL>
-                    <a:lnR>
-                      <a:noFill/>
-                    </a:lnR>
-                    <a:lnT>
-                      <a:noFill/>
-                    </a:lnT>
-                    <a:lnB>
-                      <a:noFill/>
-                    </a:lnB>
-                    <a:noFill/>
-                  </a:tcPr>
-                </a:tc>
-                <a:tc>
-                  <a:txBody>
-                    <a:bodyPr/>
-                    <a:lstStyle/>
-                    <a:p>
-                      <a:pPr>
-                        <a:buNone/>
-                      </a:pPr>
-                      <a:r>
-                        <a:rPr lang="fr-FR"/>
-                        <a:t>pas de comportement utilisateur</a:t>
-                      </a:r>
-                    </a:p>
-                  </a:txBody>
-                  <a:tcPr anchor="ctr">
-                    <a:lnL>
-                      <a:noFill/>
-                    </a:lnL>
-                    <a:lnR>
-                      <a:noFill/>
-                    </a:lnR>
-                    <a:lnT>
-                      <a:noFill/>
-                    </a:lnT>
-                    <a:lnB>
-                      <a:noFill/>
-                    </a:lnB>
-                    <a:noFill/>
-                  </a:tcPr>
-                </a:tc>
-                <a:extLst>
-                  <a:ext uri="{0D108BD9-81ED-4DB2-BD59-A6C34878D82A}">
-                    <a16:rowId xmlns:a16="http://schemas.microsoft.com/office/drawing/2014/main" val="478735631"/>
-                  </a:ext>
-                </a:extLst>
-              </a:tr>
-              <a:tr h="0">
-                <a:tc>
-                  <a:txBody>
-                    <a:bodyPr/>
-                    <a:lstStyle/>
-                    <a:p>
-                      <a:pPr>
-                        <a:buNone/>
-                      </a:pPr>
-                      <a:r>
-                        <a:rPr lang="fr-FR"/>
-                        <a:t>Fashionpedia</a:t>
-                      </a:r>
-                    </a:p>
-                  </a:txBody>
-                  <a:tcPr anchor="ctr">
-                    <a:lnL>
-                      <a:noFill/>
-                    </a:lnL>
-                    <a:lnR>
-                      <a:noFill/>
-                    </a:lnR>
-                    <a:lnT>
-                      <a:noFill/>
-                    </a:lnT>
-                    <a:lnB>
-                      <a:noFill/>
-                    </a:lnB>
-                    <a:noFill/>
-                  </a:tcPr>
-                </a:tc>
-                <a:tc>
-                  <a:txBody>
-                    <a:bodyPr/>
-                    <a:lstStyle/>
-                    <a:p>
-                      <a:pPr>
-                        <a:buNone/>
-                      </a:pPr>
-                      <a:r>
-                        <a:rPr lang="fr-FR"/>
-                        <a:t>catégories + attributs</a:t>
-                      </a:r>
-                    </a:p>
-                  </a:txBody>
-                  <a:tcPr anchor="ctr">
-                    <a:lnL>
-                      <a:noFill/>
-                    </a:lnL>
-                    <a:lnR>
-                      <a:noFill/>
-                    </a:lnR>
-                    <a:lnT>
-                      <a:noFill/>
-                    </a:lnT>
-                    <a:lnB>
-                      <a:noFill/>
-                    </a:lnB>
-                    <a:noFill/>
-                  </a:tcPr>
-                </a:tc>
-                <a:tc>
-                  <a:txBody>
-                    <a:bodyPr/>
-                    <a:lstStyle/>
-                    <a:p>
-                      <a:pPr>
-                        <a:buNone/>
-                      </a:pPr>
-                      <a:r>
-                        <a:rPr lang="fr-FR"/>
-                        <a:t>pas de recommandation</a:t>
-                      </a:r>
-                    </a:p>
-                  </a:txBody>
-                  <a:tcPr anchor="ctr">
-                    <a:lnL>
-                      <a:noFill/>
-                    </a:lnL>
-                    <a:lnR>
-                      <a:noFill/>
-                    </a:lnR>
-                    <a:lnT>
-                      <a:noFill/>
-                    </a:lnT>
-                    <a:lnB>
-                      <a:noFill/>
-                    </a:lnB>
-                    <a:noFill/>
-                  </a:tcPr>
-                </a:tc>
-                <a:extLst>
-                  <a:ext uri="{0D108BD9-81ED-4DB2-BD59-A6C34878D82A}">
-                    <a16:rowId xmlns:a16="http://schemas.microsoft.com/office/drawing/2014/main" val="1367245497"/>
-                  </a:ext>
-                </a:extLst>
-              </a:tr>
-              <a:tr h="0">
-                <a:tc>
-                  <a:txBody>
-                    <a:bodyPr/>
-                    <a:lstStyle/>
-                    <a:p>
-                      <a:pPr>
-                        <a:buNone/>
-                      </a:pPr>
-                      <a:r>
-                        <a:rPr lang="fr-FR"/>
-                        <a:t>H&amp;M</a:t>
-                      </a:r>
-                    </a:p>
-                  </a:txBody>
-                  <a:tcPr anchor="ctr">
-                    <a:lnL>
-                      <a:noFill/>
-                    </a:lnL>
-                    <a:lnR>
-                      <a:noFill/>
-                    </a:lnR>
-                    <a:lnT>
-                      <a:noFill/>
-                    </a:lnT>
-                    <a:lnB>
-                      <a:noFill/>
-                    </a:lnB>
-                    <a:noFill/>
-                  </a:tcPr>
-                </a:tc>
-                <a:tc>
-                  <a:txBody>
-                    <a:bodyPr/>
-                    <a:lstStyle/>
-                    <a:p>
-                      <a:pPr>
-                        <a:buNone/>
-                      </a:pPr>
-                      <a:r>
-                        <a:rPr lang="fr-FR"/>
-                        <a:t>catalogue + interactions</a:t>
-                      </a:r>
-                    </a:p>
-                  </a:txBody>
-                  <a:tcPr anchor="ctr">
-                    <a:lnL>
-                      <a:noFill/>
-                    </a:lnL>
-                    <a:lnR>
-                      <a:noFill/>
-                    </a:lnR>
-                    <a:lnT>
-                      <a:noFill/>
-                    </a:lnT>
-                    <a:lnB>
-                      <a:noFill/>
-                    </a:lnB>
-                    <a:noFill/>
-                  </a:tcPr>
-                </a:tc>
-                <a:tc>
-                  <a:txBody>
-                    <a:bodyPr/>
-                    <a:lstStyle/>
-                    <a:p>
-                      <a:pPr>
-                        <a:buNone/>
-                      </a:pPr>
-                      <a:r>
-                        <a:rPr lang="fr-FR" dirty="0"/>
-                        <a:t>comportement d'achat différent du besoin</a:t>
-                      </a:r>
-                    </a:p>
-                  </a:txBody>
-                  <a:tcPr anchor="ctr">
-                    <a:lnL>
-                      <a:noFill/>
-                    </a:lnL>
-                    <a:lnR>
-                      <a:noFill/>
-                    </a:lnR>
-                    <a:lnT>
-                      <a:noFill/>
-                    </a:lnT>
-                    <a:lnB>
-                      <a:noFill/>
-                    </a:lnB>
-                    <a:noFill/>
-                  </a:tcPr>
-                </a:tc>
-                <a:extLst>
-                  <a:ext uri="{0D108BD9-81ED-4DB2-BD59-A6C34878D82A}">
-                    <a16:rowId xmlns:a16="http://schemas.microsoft.com/office/drawing/2014/main" val="394301558"/>
-                  </a:ext>
-                </a:extLst>
-              </a:tr>
-            </a:tbl>
-          </a:graphicData>
-        </a:graphic>
-      </p:graphicFrame>
-    </p:spTree>
-    <p:extLst>
-      <p:ext uri="{BB962C8B-B14F-4D97-AF65-F5344CB8AC3E}">
-        <p14:creationId xmlns:p14="http://schemas.microsoft.com/office/powerpoint/2010/main" val="557486871"/>
-      </p:ext>
-    </p:extLst>
-  </p:cSld>
-  <p:clrMapOvr>
-    <a:masterClrMapping/>
-  </p:clrMapOvr>
-</p:sld>
-</file>
-
-<file path=ppt/slides/slide23.xml><?xml version="1.0" encoding="utf-8"?>
-<p:sld xmlns:a="http://schemas.openxmlformats.org/drawingml/2006/main" xmlns:r="http://schemas.openxmlformats.org/officeDocument/2006/relationships" xmlns:p="http://schemas.openxmlformats.org/presentationml/2006/main">
-  <p:cSld>
-    <p:spTree>
-      <p:nvGrpSpPr>
         <p:cNvPr id="1" name="">
           <a:extLst>
             <a:ext uri="{FF2B5EF4-FFF2-40B4-BE49-F238E27FC236}">
@@ -20882,7 +20551,7 @@
 </p:sld>
 </file>
 
-<file path=ppt/slides/slide24.xml><?xml version="1.0" encoding="utf-8"?>
+<file path=ppt/slides/slide23.xml><?xml version="1.0" encoding="utf-8"?>
 <p:sld xmlns:a="http://schemas.openxmlformats.org/drawingml/2006/main" xmlns:r="http://schemas.openxmlformats.org/officeDocument/2006/relationships" xmlns:p="http://schemas.openxmlformats.org/presentationml/2006/main">
   <p:cSld>
     <p:spTree>
@@ -20932,10 +20601,10 @@
       </p:sp>
       <p:graphicFrame>
         <p:nvGraphicFramePr>
-          <p:cNvPr id="6" name="Tableau 5">
+          <p:cNvPr id="3" name="Tableau 2">
             <a:extLst>
               <a:ext uri="{FF2B5EF4-FFF2-40B4-BE49-F238E27FC236}">
-                <a16:creationId xmlns:a16="http://schemas.microsoft.com/office/drawing/2014/main" id="{BAD7B0BC-3285-52FF-17A8-C267E586B7AA}"/>
+                <a16:creationId xmlns:a16="http://schemas.microsoft.com/office/drawing/2014/main" id="{D6A7D0DD-E523-0CAA-C2B6-CC6C70D43239}"/>
               </a:ext>
             </a:extLst>
           </p:cNvPr>
@@ -20945,31 +20614,38 @@
           <p:nvPr>
             <p:extLst>
               <p:ext uri="{D42A27DB-BD31-4B8C-83A1-F6EECF244321}">
-                <p14:modId xmlns:p14="http://schemas.microsoft.com/office/powerpoint/2010/main" val="33218492"/>
+                <p14:modId xmlns:p14="http://schemas.microsoft.com/office/powerpoint/2010/main" val="666572184"/>
               </p:ext>
             </p:extLst>
           </p:nvPr>
         </p:nvGraphicFramePr>
         <p:xfrm>
-          <a:off x="2895600" y="2070735"/>
-          <a:ext cx="6400800" cy="3749040"/>
+          <a:off x="1044262" y="2714051"/>
+          <a:ext cx="10515600" cy="2133600"/>
         </p:xfrm>
         <a:graphic>
           <a:graphicData uri="http://schemas.openxmlformats.org/drawingml/2006/table">
             <a:tbl>
               <a:tblPr/>
               <a:tblGrid>
-                <a:gridCol w="3200400">
+                <a:gridCol w="2458792">
                   <a:extLst>
                     <a:ext uri="{9D8B030D-6E8A-4147-A177-3AD203B41FA5}">
-                      <a16:colId xmlns:a16="http://schemas.microsoft.com/office/drawing/2014/main" val="578562975"/>
+                      <a16:colId xmlns:a16="http://schemas.microsoft.com/office/drawing/2014/main" val="3319194609"/>
                     </a:ext>
                   </a:extLst>
                 </a:gridCol>
-                <a:gridCol w="3200400">
+                <a:gridCol w="4301543">
                   <a:extLst>
                     <a:ext uri="{9D8B030D-6E8A-4147-A177-3AD203B41FA5}">
-                      <a16:colId xmlns:a16="http://schemas.microsoft.com/office/drawing/2014/main" val="3886031944"/>
+                      <a16:colId xmlns:a16="http://schemas.microsoft.com/office/drawing/2014/main" val="2874097778"/>
+                    </a:ext>
+                  </a:extLst>
+                </a:gridCol>
+                <a:gridCol w="3755265">
+                  <a:extLst>
+                    <a:ext uri="{9D8B030D-6E8A-4147-A177-3AD203B41FA5}">
+                      <a16:colId xmlns:a16="http://schemas.microsoft.com/office/drawing/2014/main" val="2708171481"/>
                     </a:ext>
                   </a:extLst>
                 </a:gridCol>
@@ -20984,7 +20660,7 @@
                         <a:buNone/>
                       </a:pPr>
                       <a:r>
-                        <a:rPr lang="fr-FR" b="1" dirty="0"/>
+                        <a:rPr lang="fr-FR" sz="2000" b="1" dirty="0"/>
                         <a:t>Brique</a:t>
                       </a:r>
                     </a:p>
@@ -21014,8 +20690,38 @@
                         <a:buNone/>
                       </a:pPr>
                       <a:r>
-                        <a:rPr lang="fr-FR" b="1" dirty="0"/>
-                        <a:t>Évaluation</a:t>
+                        <a:rPr lang="fr-FR" sz="2000" b="1" dirty="0"/>
+                        <a:t>Ce que l'on vérifie</a:t>
+                      </a:r>
+                    </a:p>
+                  </a:txBody>
+                  <a:tcPr anchor="ctr">
+                    <a:lnL>
+                      <a:noFill/>
+                    </a:lnL>
+                    <a:lnR>
+                      <a:noFill/>
+                    </a:lnR>
+                    <a:lnT>
+                      <a:noFill/>
+                    </a:lnT>
+                    <a:lnB>
+                      <a:noFill/>
+                    </a:lnB>
+                    <a:noFill/>
+                  </a:tcPr>
+                </a:tc>
+                <a:tc>
+                  <a:txBody>
+                    <a:bodyPr/>
+                    <a:lstStyle/>
+                    <a:p>
+                      <a:pPr>
+                        <a:buNone/>
+                      </a:pPr>
+                      <a:r>
+                        <a:rPr lang="fr-FR" sz="2000" b="1" dirty="0"/>
+                        <a:t>Métriques</a:t>
                       </a:r>
                     </a:p>
                   </a:txBody>
@@ -21037,7 +20743,7 @@
                 </a:tc>
                 <a:extLst>
                   <a:ext uri="{0D108BD9-81ED-4DB2-BD59-A6C34878D82A}">
-                    <a16:rowId xmlns:a16="http://schemas.microsoft.com/office/drawing/2014/main" val="1638320925"/>
+                    <a16:rowId xmlns:a16="http://schemas.microsoft.com/office/drawing/2014/main" val="2985121359"/>
                   </a:ext>
                 </a:extLst>
               </a:tr>
@@ -21051,9 +20757,10 @@
                         <a:buNone/>
                       </a:pPr>
                       <a:r>
-                        <a:rPr lang="fr-FR" dirty="0"/>
-                        <a:t>Segmentation des vêtements</a:t>
+                        <a:rPr lang="fr-FR" b="1" dirty="0"/>
+                        <a:t>Segmentation</a:t>
                       </a:r>
+                      <a:endParaRPr lang="fr-FR" dirty="0"/>
                     </a:p>
                   </a:txBody>
                   <a:tcPr anchor="ctr">
@@ -21082,8 +20789,39 @@
                       </a:pPr>
                       <a:r>
                         <a:rPr lang="fr-FR"/>
-                        <a:t>qualité des vêtements correctement isolés</a:t>
+                        <a:t>Le vêtement est correctement isolé</a:t>
                       </a:r>
+                    </a:p>
+                  </a:txBody>
+                  <a:tcPr anchor="ctr">
+                    <a:lnL>
+                      <a:noFill/>
+                    </a:lnL>
+                    <a:lnR>
+                      <a:noFill/>
+                    </a:lnR>
+                    <a:lnT>
+                      <a:noFill/>
+                    </a:lnT>
+                    <a:lnB>
+                      <a:noFill/>
+                    </a:lnB>
+                    <a:noFill/>
+                  </a:tcPr>
+                </a:tc>
+                <a:tc>
+                  <a:txBody>
+                    <a:bodyPr/>
+                    <a:lstStyle/>
+                    <a:p>
+                      <a:pPr>
+                        <a:buNone/>
+                      </a:pPr>
+                      <a:r>
+                        <a:rPr lang="fr-FR" dirty="0" err="1"/>
+                        <a:t>IoU</a:t>
+                      </a:r>
+                      <a:endParaRPr lang="fr-FR" dirty="0"/>
                     </a:p>
                   </a:txBody>
                   <a:tcPr anchor="ctr">
@@ -21104,7 +20842,7 @@
                 </a:tc>
                 <a:extLst>
                   <a:ext uri="{0D108BD9-81ED-4DB2-BD59-A6C34878D82A}">
-                    <a16:rowId xmlns:a16="http://schemas.microsoft.com/office/drawing/2014/main" val="4072370232"/>
+                    <a16:rowId xmlns:a16="http://schemas.microsoft.com/office/drawing/2014/main" val="1891008659"/>
                   </a:ext>
                 </a:extLst>
               </a:tr>
@@ -21118,7 +20856,7 @@
                         <a:buNone/>
                       </a:pPr>
                       <a:r>
-                        <a:rPr lang="fr-FR" dirty="0" err="1"/>
+                        <a:rPr lang="fr-FR" b="1" dirty="0" err="1"/>
                         <a:t>Embedding</a:t>
                       </a:r>
                       <a:endParaRPr lang="fr-FR" dirty="0"/>
@@ -21150,44 +20888,7 @@
                       </a:pPr>
                       <a:r>
                         <a:rPr lang="fr-FR"/>
-                        <a:t>capacité à rapprocher des vêtements visuellement/stylement similaires</a:t>
-                      </a:r>
-                    </a:p>
-                  </a:txBody>
-                  <a:tcPr anchor="ctr">
-                    <a:lnL>
-                      <a:noFill/>
-                    </a:lnL>
-                    <a:lnR>
-                      <a:noFill/>
-                    </a:lnR>
-                    <a:lnT>
-                      <a:noFill/>
-                    </a:lnT>
-                    <a:lnB>
-                      <a:noFill/>
-                    </a:lnB>
-                    <a:noFill/>
-                  </a:tcPr>
-                </a:tc>
-                <a:extLst>
-                  <a:ext uri="{0D108BD9-81ED-4DB2-BD59-A6C34878D82A}">
-                    <a16:rowId xmlns:a16="http://schemas.microsoft.com/office/drawing/2014/main" val="4216390771"/>
-                  </a:ext>
-                </a:extLst>
-              </a:tr>
-              <a:tr h="0">
-                <a:tc>
-                  <a:txBody>
-                    <a:bodyPr/>
-                    <a:lstStyle/>
-                    <a:p>
-                      <a:pPr>
-                        <a:buNone/>
-                      </a:pPr>
-                      <a:r>
-                        <a:rPr lang="fr-FR" dirty="0"/>
-                        <a:t>Caractéristiques</a:t>
+                        <a:t>Les vêtements similaires sont proches</a:t>
                       </a:r>
                     </a:p>
                   </a:txBody>
@@ -21217,7 +20918,7 @@
                       </a:pPr>
                       <a:r>
                         <a:rPr lang="fr-FR"/>
-                        <a:t>précision catégorie, couleur, style, etc.</a:t>
+                        <a:t>Recall@K / similarité</a:t>
                       </a:r>
                     </a:p>
                   </a:txBody>
@@ -21239,7 +20940,7 @@
                 </a:tc>
                 <a:extLst>
                   <a:ext uri="{0D108BD9-81ED-4DB2-BD59-A6C34878D82A}">
-                    <a16:rowId xmlns:a16="http://schemas.microsoft.com/office/drawing/2014/main" val="202315527"/>
+                    <a16:rowId xmlns:a16="http://schemas.microsoft.com/office/drawing/2014/main" val="3281960654"/>
                   </a:ext>
                 </a:extLst>
               </a:tr>
@@ -21253,9 +20954,10 @@
                         <a:buNone/>
                       </a:pPr>
                       <a:r>
-                        <a:rPr lang="fr-FR" dirty="0"/>
-                        <a:t>Modèle de compatibilité</a:t>
+                        <a:rPr lang="fr-FR" b="1" dirty="0"/>
+                        <a:t>Caractéristiques</a:t>
                       </a:r>
+                      <a:endParaRPr lang="fr-FR" dirty="0"/>
                     </a:p>
                   </a:txBody>
                   <a:tcPr anchor="ctr">
@@ -21283,8 +20985,38 @@
                         <a:buNone/>
                       </a:pPr>
                       <a:r>
-                        <a:rPr lang="fr-FR" dirty="0"/>
-                        <a:t>capacité à distinguer des paires compatibles de paires non observées/incompatibles</a:t>
+                        <a:rPr lang="fr-FR"/>
+                        <a:t>Les attributs sont correctement identifiés</a:t>
+                      </a:r>
+                    </a:p>
+                  </a:txBody>
+                  <a:tcPr anchor="ctr">
+                    <a:lnL>
+                      <a:noFill/>
+                    </a:lnL>
+                    <a:lnR>
+                      <a:noFill/>
+                    </a:lnR>
+                    <a:lnT>
+                      <a:noFill/>
+                    </a:lnT>
+                    <a:lnB>
+                      <a:noFill/>
+                    </a:lnB>
+                    <a:noFill/>
+                  </a:tcPr>
+                </a:tc>
+                <a:tc>
+                  <a:txBody>
+                    <a:bodyPr/>
+                    <a:lstStyle/>
+                    <a:p>
+                      <a:pPr>
+                        <a:buNone/>
+                      </a:pPr>
+                      <a:r>
+                        <a:rPr lang="fr-FR"/>
+                        <a:t>Accuracy / Precision / Recall / F1</a:t>
                       </a:r>
                     </a:p>
                   </a:txBody>
@@ -21306,7 +21038,114 @@
                 </a:tc>
                 <a:extLst>
                   <a:ext uri="{0D108BD9-81ED-4DB2-BD59-A6C34878D82A}">
-                    <a16:rowId xmlns:a16="http://schemas.microsoft.com/office/drawing/2014/main" val="3897047476"/>
+                    <a16:rowId xmlns:a16="http://schemas.microsoft.com/office/drawing/2014/main" val="2881403481"/>
+                  </a:ext>
+                </a:extLst>
+              </a:tr>
+              <a:tr h="0">
+                <a:tc>
+                  <a:txBody>
+                    <a:bodyPr/>
+                    <a:lstStyle/>
+                    <a:p>
+                      <a:pPr>
+                        <a:buNone/>
+                      </a:pPr>
+                      <a:r>
+                        <a:rPr lang="fr-FR" b="1" dirty="0"/>
+                        <a:t>Compatibilité</a:t>
+                      </a:r>
+                      <a:endParaRPr lang="fr-FR" dirty="0"/>
+                    </a:p>
+                  </a:txBody>
+                  <a:tcPr anchor="ctr">
+                    <a:lnL>
+                      <a:noFill/>
+                    </a:lnL>
+                    <a:lnR>
+                      <a:noFill/>
+                    </a:lnR>
+                    <a:lnT>
+                      <a:noFill/>
+                    </a:lnT>
+                    <a:lnB>
+                      <a:noFill/>
+                    </a:lnB>
+                    <a:noFill/>
+                  </a:tcPr>
+                </a:tc>
+                <a:tc>
+                  <a:txBody>
+                    <a:bodyPr/>
+                    <a:lstStyle/>
+                    <a:p>
+                      <a:pPr>
+                        <a:buNone/>
+                      </a:pPr>
+                      <a:r>
+                        <a:rPr lang="fr-FR"/>
+                        <a:t>Les associations pertinentes sont correctement classées</a:t>
+                      </a:r>
+                    </a:p>
+                  </a:txBody>
+                  <a:tcPr anchor="ctr">
+                    <a:lnL>
+                      <a:noFill/>
+                    </a:lnL>
+                    <a:lnR>
+                      <a:noFill/>
+                    </a:lnR>
+                    <a:lnT>
+                      <a:noFill/>
+                    </a:lnT>
+                    <a:lnB>
+                      <a:noFill/>
+                    </a:lnB>
+                    <a:noFill/>
+                  </a:tcPr>
+                </a:tc>
+                <a:tc>
+                  <a:txBody>
+                    <a:bodyPr/>
+                    <a:lstStyle/>
+                    <a:p>
+                      <a:pPr>
+                        <a:buNone/>
+                      </a:pPr>
+                      <a:r>
+                        <a:rPr lang="fr-FR" dirty="0" err="1"/>
+                        <a:t>Precision@K</a:t>
+                      </a:r>
+                      <a:r>
+                        <a:rPr lang="fr-FR" dirty="0"/>
+                        <a:t> / </a:t>
+                      </a:r>
+                      <a:r>
+                        <a:rPr lang="fr-FR" dirty="0" err="1"/>
+                        <a:t>Recall@K</a:t>
+                      </a:r>
+                      <a:endParaRPr lang="fr-FR" dirty="0"/>
+                    </a:p>
+                  </a:txBody>
+                  <a:tcPr anchor="ctr">
+                    <a:lnL>
+                      <a:noFill/>
+                    </a:lnL>
+                    <a:lnR>
+                      <a:noFill/>
+                    </a:lnR>
+                    <a:lnT>
+                      <a:noFill/>
+                    </a:lnT>
+                    <a:lnB>
+                      <a:noFill/>
+                    </a:lnB>
+                    <a:noFill/>
+                  </a:tcPr>
+                </a:tc>
+                <a:extLst>
+                  <a:ext uri="{0D108BD9-81ED-4DB2-BD59-A6C34878D82A}">
+                    <a16:rowId xmlns:a16="http://schemas.microsoft.com/office/drawing/2014/main" val="3329674296"/>
                   </a:ext>
                 </a:extLst>
               </a:tr>
@@ -21327,7 +21166,7 @@
 </p:sld>
 </file>
 
-<file path=ppt/slides/slide25.xml><?xml version="1.0" encoding="utf-8"?>
+<file path=ppt/slides/slide24.xml><?xml version="1.0" encoding="utf-8"?>
 <p:sld xmlns:a="http://schemas.openxmlformats.org/drawingml/2006/main" xmlns:r="http://schemas.openxmlformats.org/officeDocument/2006/relationships" xmlns:p="http://schemas.openxmlformats.org/presentationml/2006/main">
   <p:cSld>
     <p:spTree>
@@ -21398,13 +21237,13 @@
           <p:nvPr>
             <p:extLst>
               <p:ext uri="{D42A27DB-BD31-4B8C-83A1-F6EECF244321}">
-                <p14:modId xmlns:p14="http://schemas.microsoft.com/office/powerpoint/2010/main" val="2130548887"/>
+                <p14:modId xmlns:p14="http://schemas.microsoft.com/office/powerpoint/2010/main" val="112435760"/>
               </p:ext>
             </p:extLst>
           </p:nvPr>
         </p:nvGraphicFramePr>
         <p:xfrm>
-          <a:off x="2203450" y="2759234"/>
+          <a:off x="2000250" y="2733476"/>
           <a:ext cx="8191500" cy="1828800"/>
         </p:xfrm>
         <a:graphic>
@@ -21579,7 +21418,7 @@
                         <a:buNone/>
                       </a:pPr>
                       <a:r>
-                        <a:rPr lang="fr-FR"/>
+                        <a:rPr lang="fr-FR" dirty="0"/>
                         <a:t>A — Baseline</a:t>
                       </a:r>
                     </a:p>
@@ -22154,7 +21993,7 @@
 </p:sld>
 </file>
 
-<file path=ppt/slides/slide26.xml><?xml version="1.0" encoding="utf-8"?>
+<file path=ppt/slides/slide25.xml><?xml version="1.0" encoding="utf-8"?>
 <p:sld xmlns:a="http://schemas.openxmlformats.org/drawingml/2006/main" xmlns:r="http://schemas.openxmlformats.org/officeDocument/2006/relationships" xmlns:p="http://schemas.openxmlformats.org/presentationml/2006/main">
   <p:cSld>
     <p:spTree>
@@ -22200,7 +22039,7 @@
           <a:p>
             <a:r>
               <a:rPr lang="fr-FR" dirty="0"/>
-              <a:t>Métriques et critères de succès</a:t>
+              <a:t>Critères de succès</a:t>
             </a:r>
           </a:p>
         </p:txBody>
@@ -22264,836 +22103,7 @@
 </p:sld>
 </file>
 
-<file path=ppt/slides/slide27.xml><?xml version="1.0" encoding="utf-8"?>
-<p:sld xmlns:a="http://schemas.openxmlformats.org/drawingml/2006/main" xmlns:r="http://schemas.openxmlformats.org/officeDocument/2006/relationships" xmlns:p="http://schemas.openxmlformats.org/presentationml/2006/main">
-  <p:cSld>
-    <p:spTree>
-      <p:nvGrpSpPr>
-        <p:cNvPr id="1" name=""/>
-        <p:cNvGrpSpPr/>
-        <p:nvPr/>
-      </p:nvGrpSpPr>
-      <p:grpSpPr>
-        <a:xfrm>
-          <a:off x="0" y="0"/>
-          <a:ext cx="0" cy="0"/>
-          <a:chOff x="0" y="0"/>
-          <a:chExt cx="0" cy="0"/>
-        </a:xfrm>
-      </p:grpSpPr>
-      <p:sp>
-        <p:nvSpPr>
-          <p:cNvPr id="2" name="Titre 1">
-            <a:extLst>
-              <a:ext uri="{FF2B5EF4-FFF2-40B4-BE49-F238E27FC236}">
-                <a16:creationId xmlns:a16="http://schemas.microsoft.com/office/drawing/2014/main" id="{1B87901D-6A2D-C200-D9C6-D091A6E65F8A}"/>
-              </a:ext>
-            </a:extLst>
-          </p:cNvPr>
-          <p:cNvSpPr>
-            <a:spLocks noGrp="1"/>
-          </p:cNvSpPr>
-          <p:nvPr>
-            <p:ph type="title"/>
-          </p:nvPr>
-        </p:nvSpPr>
-        <p:spPr/>
-        <p:txBody>
-          <a:bodyPr/>
-          <a:lstStyle/>
-          <a:p>
-            <a:r>
-              <a:rPr lang="fr-FR" dirty="0"/>
-              <a:t>Métriques techniques</a:t>
-            </a:r>
-          </a:p>
-        </p:txBody>
-      </p:sp>
-      <p:sp>
-        <p:nvSpPr>
-          <p:cNvPr id="3" name="Espace réservé du contenu 2">
-            <a:extLst>
-              <a:ext uri="{FF2B5EF4-FFF2-40B4-BE49-F238E27FC236}">
-                <a16:creationId xmlns:a16="http://schemas.microsoft.com/office/drawing/2014/main" id="{4B204956-F252-575E-E9E6-7236ED0B9BCF}"/>
-              </a:ext>
-            </a:extLst>
-          </p:cNvPr>
-          <p:cNvSpPr>
-            <a:spLocks noGrp="1"/>
-          </p:cNvSpPr>
-          <p:nvPr>
-            <p:ph idx="1"/>
-          </p:nvPr>
-        </p:nvSpPr>
-        <p:spPr>
-          <a:xfrm>
-            <a:off x="838200" y="1825625"/>
-            <a:ext cx="5613400" cy="3330575"/>
-          </a:xfrm>
-        </p:spPr>
-        <p:txBody>
-          <a:bodyPr>
-            <a:normAutofit fontScale="77500" lnSpcReduction="20000"/>
-          </a:bodyPr>
-          <a:lstStyle/>
-          <a:p>
-            <a:pPr marL="0" indent="0">
-              <a:buNone/>
-            </a:pPr>
-            <a:r>
-              <a:rPr lang="fr-FR" dirty="0"/>
-              <a:t>Pour une recommandation Top-K :</a:t>
-            </a:r>
-          </a:p>
-          <a:p>
-            <a:pPr marL="0" indent="0">
-              <a:buNone/>
-            </a:pPr>
-            <a:endParaRPr lang="fr-FR" dirty="0"/>
-          </a:p>
-          <a:p>
-            <a:pPr marL="0" indent="0">
-              <a:buNone/>
-            </a:pPr>
-            <a:r>
-              <a:rPr lang="fr-FR" b="1" dirty="0"/>
-              <a:t>Métriques principales</a:t>
-            </a:r>
-          </a:p>
-          <a:p>
-            <a:r>
-              <a:rPr lang="fr-FR" dirty="0" err="1"/>
-              <a:t>Recall@K</a:t>
-            </a:r>
-            <a:r>
-              <a:rPr lang="fr-FR" dirty="0"/>
-              <a:t> ;</a:t>
-            </a:r>
-          </a:p>
-          <a:p>
-            <a:r>
-              <a:rPr lang="fr-FR" dirty="0"/>
-              <a:t>NDCG@K ;</a:t>
-            </a:r>
-          </a:p>
-          <a:p>
-            <a:endParaRPr lang="fr-FR" dirty="0"/>
-          </a:p>
-          <a:p>
-            <a:pPr marL="0" indent="0">
-              <a:buNone/>
-            </a:pPr>
-            <a:r>
-              <a:rPr lang="fr-FR" b="1" dirty="0"/>
-              <a:t>Métrique complémentaire</a:t>
-            </a:r>
-          </a:p>
-          <a:p>
-            <a:r>
-              <a:rPr lang="fr-FR" dirty="0" err="1"/>
-              <a:t>Precision@K</a:t>
-            </a:r>
-            <a:r>
-              <a:rPr lang="fr-FR" dirty="0"/>
-              <a:t> ;</a:t>
-            </a:r>
-          </a:p>
-          <a:p>
-            <a:r>
-              <a:rPr lang="fr-FR" dirty="0"/>
-              <a:t>MRR.</a:t>
-            </a:r>
-          </a:p>
-          <a:p>
-            <a:endParaRPr lang="fr-FR" dirty="0"/>
-          </a:p>
-        </p:txBody>
-      </p:sp>
-      <p:graphicFrame>
-        <p:nvGraphicFramePr>
-          <p:cNvPr id="8" name="Tableau 7">
-            <a:extLst>
-              <a:ext uri="{FF2B5EF4-FFF2-40B4-BE49-F238E27FC236}">
-                <a16:creationId xmlns:a16="http://schemas.microsoft.com/office/drawing/2014/main" id="{AA09B86A-3378-B69D-863C-2D31FF1EA9FE}"/>
-              </a:ext>
-            </a:extLst>
-          </p:cNvPr>
-          <p:cNvGraphicFramePr>
-            <a:graphicFrameLocks noGrp="1"/>
-          </p:cNvGraphicFramePr>
-          <p:nvPr>
-            <p:extLst>
-              <p:ext uri="{D42A27DB-BD31-4B8C-83A1-F6EECF244321}">
-                <p14:modId xmlns:p14="http://schemas.microsoft.com/office/powerpoint/2010/main" val="826868069"/>
-              </p:ext>
-            </p:extLst>
-          </p:nvPr>
-        </p:nvGraphicFramePr>
-        <p:xfrm>
-          <a:off x="6985000" y="1690688"/>
-          <a:ext cx="4699000" cy="3579365"/>
-        </p:xfrm>
-        <a:graphic>
-          <a:graphicData uri="http://schemas.openxmlformats.org/drawingml/2006/table">
-            <a:tbl>
-              <a:tblPr>
-                <a:tableStyleId>{5C22544A-7EE6-4342-B048-85BDC9FD1C3A}</a:tableStyleId>
-              </a:tblPr>
-              <a:tblGrid>
-                <a:gridCol w="2311400">
-                  <a:extLst>
-                    <a:ext uri="{9D8B030D-6E8A-4147-A177-3AD203B41FA5}">
-                      <a16:colId xmlns:a16="http://schemas.microsoft.com/office/drawing/2014/main" val="3683216321"/>
-                    </a:ext>
-                  </a:extLst>
-                </a:gridCol>
-                <a:gridCol w="2387600">
-                  <a:extLst>
-                    <a:ext uri="{9D8B030D-6E8A-4147-A177-3AD203B41FA5}">
-                      <a16:colId xmlns:a16="http://schemas.microsoft.com/office/drawing/2014/main" val="3003926998"/>
-                    </a:ext>
-                  </a:extLst>
-                </a:gridCol>
-              </a:tblGrid>
-              <a:tr h="318864">
-                <a:tc>
-                  <a:txBody>
-                    <a:bodyPr/>
-                    <a:lstStyle/>
-                    <a:p>
-                      <a:pPr algn="l" fontAlgn="b">
-                        <a:buNone/>
-                      </a:pPr>
-                      <a:r>
-                        <a:rPr lang="fr-FR" sz="2000" u="none" strike="noStrike" dirty="0">
-                          <a:effectLst/>
-                        </a:rPr>
-                        <a:t>Top-10</a:t>
-                      </a:r>
-                      <a:endParaRPr lang="fr-FR" sz="2000" b="0" i="0" u="none" strike="noStrike" dirty="0">
-                        <a:solidFill>
-                          <a:srgbClr val="000000"/>
-                        </a:solidFill>
-                        <a:effectLst/>
-                        <a:latin typeface="Calibri" panose="020F0502020204030204" pitchFamily="34" charset="0"/>
-                      </a:endParaRPr>
-                    </a:p>
-                  </a:txBody>
-                  <a:tcPr marL="9525" marR="9525" marT="9525" marB="0" anchor="b"/>
-                </a:tc>
-                <a:tc>
-                  <a:txBody>
-                    <a:bodyPr/>
-                    <a:lstStyle/>
-                    <a:p>
-                      <a:pPr algn="l" fontAlgn="b">
-                        <a:buNone/>
-                      </a:pPr>
-                      <a:endParaRPr lang="fr-FR" sz="2000" b="0" i="0" u="none" strike="noStrike">
-                        <a:solidFill>
-                          <a:srgbClr val="000000"/>
-                        </a:solidFill>
-                        <a:effectLst/>
-                        <a:latin typeface="Calibri" panose="020F0502020204030204" pitchFamily="34" charset="0"/>
-                      </a:endParaRPr>
-                    </a:p>
-                  </a:txBody>
-                  <a:tcPr marL="9525" marR="9525" marT="9525" marB="0" anchor="b"/>
-                </a:tc>
-                <a:extLst>
-                  <a:ext uri="{0D108BD9-81ED-4DB2-BD59-A6C34878D82A}">
-                    <a16:rowId xmlns:a16="http://schemas.microsoft.com/office/drawing/2014/main" val="3866628526"/>
-                  </a:ext>
-                </a:extLst>
-              </a:tr>
-              <a:tr h="318864">
-                <a:tc>
-                  <a:txBody>
-                    <a:bodyPr/>
-                    <a:lstStyle/>
-                    <a:p>
-                      <a:pPr algn="l" fontAlgn="b">
-                        <a:buNone/>
-                      </a:pPr>
-                      <a:r>
-                        <a:rPr lang="fr-FR" sz="2000" u="none" strike="noStrike">
-                          <a:effectLst/>
-                        </a:rPr>
-                        <a:t>1. Pantalon noir </a:t>
-                      </a:r>
-                      <a:endParaRPr lang="fr-FR" sz="2000" b="0" i="0" u="none" strike="noStrike">
-                        <a:solidFill>
-                          <a:srgbClr val="000000"/>
-                        </a:solidFill>
-                        <a:effectLst/>
-                        <a:latin typeface="Calibri" panose="020F0502020204030204" pitchFamily="34" charset="0"/>
-                      </a:endParaRPr>
-                    </a:p>
-                  </a:txBody>
-                  <a:tcPr marL="9525" marR="9525" marT="9525" marB="0" anchor="b"/>
-                </a:tc>
-                <a:tc>
-                  <a:txBody>
-                    <a:bodyPr/>
-                    <a:lstStyle/>
-                    <a:p>
-                      <a:pPr algn="l" fontAlgn="b">
-                        <a:buNone/>
-                      </a:pPr>
-                      <a:r>
-                        <a:rPr lang="fr-FR" sz="2000" u="none" strike="noStrike">
-                          <a:effectLst/>
-                        </a:rPr>
-                        <a:t>✓ pertinent</a:t>
-                      </a:r>
-                      <a:endParaRPr lang="fr-FR" sz="2000" b="0" i="0" u="none" strike="noStrike">
-                        <a:solidFill>
-                          <a:srgbClr val="000000"/>
-                        </a:solidFill>
-                        <a:effectLst/>
-                        <a:latin typeface="Calibri" panose="020F0502020204030204" pitchFamily="34" charset="0"/>
-                      </a:endParaRPr>
-                    </a:p>
-                  </a:txBody>
-                  <a:tcPr marL="9525" marR="9525" marT="9525" marB="0" anchor="b"/>
-                </a:tc>
-                <a:extLst>
-                  <a:ext uri="{0D108BD9-81ED-4DB2-BD59-A6C34878D82A}">
-                    <a16:rowId xmlns:a16="http://schemas.microsoft.com/office/drawing/2014/main" val="3925926894"/>
-                  </a:ext>
-                </a:extLst>
-              </a:tr>
-              <a:tr h="318864">
-                <a:tc>
-                  <a:txBody>
-                    <a:bodyPr/>
-                    <a:lstStyle/>
-                    <a:p>
-                      <a:pPr algn="l" fontAlgn="b">
-                        <a:buNone/>
-                      </a:pPr>
-                      <a:r>
-                        <a:rPr lang="fr-FR" sz="2000" u="none" strike="noStrike">
-                          <a:effectLst/>
-                        </a:rPr>
-                        <a:t>2. Jean bleu</a:t>
-                      </a:r>
-                      <a:endParaRPr lang="fr-FR" sz="2000" b="0" i="0" u="none" strike="noStrike">
-                        <a:solidFill>
-                          <a:srgbClr val="000000"/>
-                        </a:solidFill>
-                        <a:effectLst/>
-                        <a:latin typeface="Calibri" panose="020F0502020204030204" pitchFamily="34" charset="0"/>
-                      </a:endParaRPr>
-                    </a:p>
-                  </a:txBody>
-                  <a:tcPr marL="9525" marR="9525" marT="9525" marB="0" anchor="b"/>
-                </a:tc>
-                <a:tc>
-                  <a:txBody>
-                    <a:bodyPr/>
-                    <a:lstStyle/>
-                    <a:p>
-                      <a:pPr algn="l" fontAlgn="b">
-                        <a:buNone/>
-                      </a:pPr>
-                      <a:r>
-                        <a:rPr lang="fr-FR" sz="2000" u="none" strike="noStrike">
-                          <a:effectLst/>
-                        </a:rPr>
-                        <a:t>✓ pertinent</a:t>
-                      </a:r>
-                      <a:endParaRPr lang="fr-FR" sz="2000" b="0" i="0" u="none" strike="noStrike">
-                        <a:solidFill>
-                          <a:srgbClr val="000000"/>
-                        </a:solidFill>
-                        <a:effectLst/>
-                        <a:latin typeface="Calibri" panose="020F0502020204030204" pitchFamily="34" charset="0"/>
-                      </a:endParaRPr>
-                    </a:p>
-                  </a:txBody>
-                  <a:tcPr marL="9525" marR="9525" marT="9525" marB="0" anchor="b"/>
-                </a:tc>
-                <a:extLst>
-                  <a:ext uri="{0D108BD9-81ED-4DB2-BD59-A6C34878D82A}">
-                    <a16:rowId xmlns:a16="http://schemas.microsoft.com/office/drawing/2014/main" val="624318597"/>
-                  </a:ext>
-                </a:extLst>
-              </a:tr>
-              <a:tr h="318864">
-                <a:tc>
-                  <a:txBody>
-                    <a:bodyPr/>
-                    <a:lstStyle/>
-                    <a:p>
-                      <a:pPr algn="l" fontAlgn="b">
-                        <a:buNone/>
-                      </a:pPr>
-                      <a:r>
-                        <a:rPr lang="fr-FR" sz="2000" u="none" strike="noStrike">
-                          <a:effectLst/>
-                        </a:rPr>
-                        <a:t>3. Robe rouge</a:t>
-                      </a:r>
-                      <a:endParaRPr lang="fr-FR" sz="2000" b="0" i="0" u="none" strike="noStrike">
-                        <a:solidFill>
-                          <a:srgbClr val="000000"/>
-                        </a:solidFill>
-                        <a:effectLst/>
-                        <a:latin typeface="Calibri" panose="020F0502020204030204" pitchFamily="34" charset="0"/>
-                      </a:endParaRPr>
-                    </a:p>
-                  </a:txBody>
-                  <a:tcPr marL="9525" marR="9525" marT="9525" marB="0" anchor="b"/>
-                </a:tc>
-                <a:tc>
-                  <a:txBody>
-                    <a:bodyPr/>
-                    <a:lstStyle/>
-                    <a:p>
-                      <a:pPr algn="l" fontAlgn="b">
-                        <a:buNone/>
-                      </a:pPr>
-                      <a:r>
-                        <a:rPr lang="fr-FR" sz="2000" u="none" strike="noStrike">
-                          <a:effectLst/>
-                        </a:rPr>
-                        <a:t>✗</a:t>
-                      </a:r>
-                      <a:endParaRPr lang="fr-FR" sz="2000" b="0" i="0" u="none" strike="noStrike">
-                        <a:solidFill>
-                          <a:srgbClr val="000000"/>
-                        </a:solidFill>
-                        <a:effectLst/>
-                        <a:latin typeface="Calibri" panose="020F0502020204030204" pitchFamily="34" charset="0"/>
-                      </a:endParaRPr>
-                    </a:p>
-                  </a:txBody>
-                  <a:tcPr marL="9525" marR="9525" marT="9525" marB="0" anchor="b"/>
-                </a:tc>
-                <a:extLst>
-                  <a:ext uri="{0D108BD9-81ED-4DB2-BD59-A6C34878D82A}">
-                    <a16:rowId xmlns:a16="http://schemas.microsoft.com/office/drawing/2014/main" val="1160323393"/>
-                  </a:ext>
-                </a:extLst>
-              </a:tr>
-              <a:tr h="318864">
-                <a:tc>
-                  <a:txBody>
-                    <a:bodyPr/>
-                    <a:lstStyle/>
-                    <a:p>
-                      <a:pPr algn="l" fontAlgn="b">
-                        <a:buNone/>
-                      </a:pPr>
-                      <a:r>
-                        <a:rPr lang="fr-FR" sz="2000" u="none" strike="noStrike">
-                          <a:effectLst/>
-                        </a:rPr>
-                        <a:t>4. Jupe noire</a:t>
-                      </a:r>
-                      <a:endParaRPr lang="fr-FR" sz="2000" b="0" i="0" u="none" strike="noStrike">
-                        <a:solidFill>
-                          <a:srgbClr val="000000"/>
-                        </a:solidFill>
-                        <a:effectLst/>
-                        <a:latin typeface="Calibri" panose="020F0502020204030204" pitchFamily="34" charset="0"/>
-                      </a:endParaRPr>
-                    </a:p>
-                  </a:txBody>
-                  <a:tcPr marL="9525" marR="9525" marT="9525" marB="0" anchor="b"/>
-                </a:tc>
-                <a:tc>
-                  <a:txBody>
-                    <a:bodyPr/>
-                    <a:lstStyle/>
-                    <a:p>
-                      <a:pPr algn="l" fontAlgn="b">
-                        <a:buNone/>
-                      </a:pPr>
-                      <a:r>
-                        <a:rPr lang="fr-FR" sz="2000" u="none" strike="noStrike">
-                          <a:effectLst/>
-                        </a:rPr>
-                        <a:t>✓ pertinent</a:t>
-                      </a:r>
-                      <a:endParaRPr lang="fr-FR" sz="2000" b="0" i="0" u="none" strike="noStrike">
-                        <a:solidFill>
-                          <a:srgbClr val="000000"/>
-                        </a:solidFill>
-                        <a:effectLst/>
-                        <a:latin typeface="Calibri" panose="020F0502020204030204" pitchFamily="34" charset="0"/>
-                      </a:endParaRPr>
-                    </a:p>
-                  </a:txBody>
-                  <a:tcPr marL="9525" marR="9525" marT="9525" marB="0" anchor="b"/>
-                </a:tc>
-                <a:extLst>
-                  <a:ext uri="{0D108BD9-81ED-4DB2-BD59-A6C34878D82A}">
-                    <a16:rowId xmlns:a16="http://schemas.microsoft.com/office/drawing/2014/main" val="327530559"/>
-                  </a:ext>
-                </a:extLst>
-              </a:tr>
-              <a:tr h="318864">
-                <a:tc>
-                  <a:txBody>
-                    <a:bodyPr/>
-                    <a:lstStyle/>
-                    <a:p>
-                      <a:pPr algn="l" fontAlgn="b">
-                        <a:buNone/>
-                      </a:pPr>
-                      <a:r>
-                        <a:rPr lang="fr-FR" sz="2000" u="none" strike="noStrike">
-                          <a:effectLst/>
-                        </a:rPr>
-                        <a:t>5. Pull vert</a:t>
-                      </a:r>
-                      <a:endParaRPr lang="fr-FR" sz="2000" b="0" i="0" u="none" strike="noStrike">
-                        <a:solidFill>
-                          <a:srgbClr val="000000"/>
-                        </a:solidFill>
-                        <a:effectLst/>
-                        <a:latin typeface="Calibri" panose="020F0502020204030204" pitchFamily="34" charset="0"/>
-                      </a:endParaRPr>
-                    </a:p>
-                  </a:txBody>
-                  <a:tcPr marL="9525" marR="9525" marT="9525" marB="0" anchor="b"/>
-                </a:tc>
-                <a:tc>
-                  <a:txBody>
-                    <a:bodyPr/>
-                    <a:lstStyle/>
-                    <a:p>
-                      <a:pPr algn="l" fontAlgn="b">
-                        <a:buNone/>
-                      </a:pPr>
-                      <a:r>
-                        <a:rPr lang="fr-FR" sz="2000" u="none" strike="noStrike">
-                          <a:effectLst/>
-                        </a:rPr>
-                        <a:t>✗</a:t>
-                      </a:r>
-                      <a:endParaRPr lang="fr-FR" sz="2000" b="0" i="0" u="none" strike="noStrike">
-                        <a:solidFill>
-                          <a:srgbClr val="000000"/>
-                        </a:solidFill>
-                        <a:effectLst/>
-                        <a:latin typeface="Calibri" panose="020F0502020204030204" pitchFamily="34" charset="0"/>
-                      </a:endParaRPr>
-                    </a:p>
-                  </a:txBody>
-                  <a:tcPr marL="9525" marR="9525" marT="9525" marB="0" anchor="b"/>
-                </a:tc>
-                <a:extLst>
-                  <a:ext uri="{0D108BD9-81ED-4DB2-BD59-A6C34878D82A}">
-                    <a16:rowId xmlns:a16="http://schemas.microsoft.com/office/drawing/2014/main" val="385509454"/>
-                  </a:ext>
-                </a:extLst>
-              </a:tr>
-              <a:tr h="318864">
-                <a:tc>
-                  <a:txBody>
-                    <a:bodyPr/>
-                    <a:lstStyle/>
-                    <a:p>
-                      <a:pPr algn="l" fontAlgn="b">
-                        <a:buNone/>
-                      </a:pPr>
-                      <a:r>
-                        <a:rPr lang="fr-FR" sz="2000" u="none" strike="noStrike">
-                          <a:effectLst/>
-                        </a:rPr>
-                        <a:t>6. Jean gris</a:t>
-                      </a:r>
-                      <a:endParaRPr lang="fr-FR" sz="2000" b="0" i="0" u="none" strike="noStrike">
-                        <a:solidFill>
-                          <a:srgbClr val="000000"/>
-                        </a:solidFill>
-                        <a:effectLst/>
-                        <a:latin typeface="Calibri" panose="020F0502020204030204" pitchFamily="34" charset="0"/>
-                      </a:endParaRPr>
-                    </a:p>
-                  </a:txBody>
-                  <a:tcPr marL="9525" marR="9525" marT="9525" marB="0" anchor="b"/>
-                </a:tc>
-                <a:tc>
-                  <a:txBody>
-                    <a:bodyPr/>
-                    <a:lstStyle/>
-                    <a:p>
-                      <a:pPr algn="l" fontAlgn="b">
-                        <a:buNone/>
-                      </a:pPr>
-                      <a:r>
-                        <a:rPr lang="fr-FR" sz="2000" u="none" strike="noStrike">
-                          <a:effectLst/>
-                        </a:rPr>
-                        <a:t>✗</a:t>
-                      </a:r>
-                      <a:endParaRPr lang="fr-FR" sz="2000" b="0" i="0" u="none" strike="noStrike">
-                        <a:solidFill>
-                          <a:srgbClr val="000000"/>
-                        </a:solidFill>
-                        <a:effectLst/>
-                        <a:latin typeface="Calibri" panose="020F0502020204030204" pitchFamily="34" charset="0"/>
-                      </a:endParaRPr>
-                    </a:p>
-                  </a:txBody>
-                  <a:tcPr marL="9525" marR="9525" marT="9525" marB="0" anchor="b"/>
-                </a:tc>
-                <a:extLst>
-                  <a:ext uri="{0D108BD9-81ED-4DB2-BD59-A6C34878D82A}">
-                    <a16:rowId xmlns:a16="http://schemas.microsoft.com/office/drawing/2014/main" val="3535552865"/>
-                  </a:ext>
-                </a:extLst>
-              </a:tr>
-              <a:tr h="395264">
-                <a:tc>
-                  <a:txBody>
-                    <a:bodyPr/>
-                    <a:lstStyle/>
-                    <a:p>
-                      <a:pPr algn="l" fontAlgn="b">
-                        <a:buNone/>
-                      </a:pPr>
-                      <a:r>
-                        <a:rPr lang="fr-FR" sz="2000" u="none" strike="noStrike" dirty="0">
-                          <a:effectLst/>
-                        </a:rPr>
-                        <a:t>7. Chemise blanche</a:t>
-                      </a:r>
-                      <a:endParaRPr lang="fr-FR" sz="2000" b="0" i="0" u="none" strike="noStrike" dirty="0">
-                        <a:solidFill>
-                          <a:srgbClr val="000000"/>
-                        </a:solidFill>
-                        <a:effectLst/>
-                        <a:latin typeface="Calibri" panose="020F0502020204030204" pitchFamily="34" charset="0"/>
-                      </a:endParaRPr>
-                    </a:p>
-                  </a:txBody>
-                  <a:tcPr marL="9525" marR="9525" marT="9525" marB="0" anchor="b"/>
-                </a:tc>
-                <a:tc>
-                  <a:txBody>
-                    <a:bodyPr/>
-                    <a:lstStyle/>
-                    <a:p>
-                      <a:pPr algn="l" fontAlgn="b">
-                        <a:buNone/>
-                      </a:pPr>
-                      <a:r>
-                        <a:rPr lang="fr-FR" sz="2000" u="none" strike="noStrike" dirty="0">
-                          <a:effectLst/>
-                        </a:rPr>
-                        <a:t>✗</a:t>
-                      </a:r>
-                      <a:endParaRPr lang="fr-FR" sz="2000" b="0" i="0" u="none" strike="noStrike" dirty="0">
-                        <a:solidFill>
-                          <a:srgbClr val="000000"/>
-                        </a:solidFill>
-                        <a:effectLst/>
-                        <a:latin typeface="Calibri" panose="020F0502020204030204" pitchFamily="34" charset="0"/>
-                      </a:endParaRPr>
-                    </a:p>
-                  </a:txBody>
-                  <a:tcPr marL="9525" marR="9525" marT="9525" marB="0" anchor="b"/>
-                </a:tc>
-                <a:extLst>
-                  <a:ext uri="{0D108BD9-81ED-4DB2-BD59-A6C34878D82A}">
-                    <a16:rowId xmlns:a16="http://schemas.microsoft.com/office/drawing/2014/main" val="3704007688"/>
-                  </a:ext>
-                </a:extLst>
-              </a:tr>
-              <a:tr h="318864">
-                <a:tc>
-                  <a:txBody>
-                    <a:bodyPr/>
-                    <a:lstStyle/>
-                    <a:p>
-                      <a:pPr algn="l" fontAlgn="b">
-                        <a:buNone/>
-                      </a:pPr>
-                      <a:r>
-                        <a:rPr lang="fr-FR" sz="2000" u="none" strike="noStrike">
-                          <a:effectLst/>
-                        </a:rPr>
-                        <a:t>8. Veste beige</a:t>
-                      </a:r>
-                      <a:endParaRPr lang="fr-FR" sz="2000" b="0" i="0" u="none" strike="noStrike">
-                        <a:solidFill>
-                          <a:srgbClr val="000000"/>
-                        </a:solidFill>
-                        <a:effectLst/>
-                        <a:latin typeface="Calibri" panose="020F0502020204030204" pitchFamily="34" charset="0"/>
-                      </a:endParaRPr>
-                    </a:p>
-                  </a:txBody>
-                  <a:tcPr marL="9525" marR="9525" marT="9525" marB="0" anchor="b"/>
-                </a:tc>
-                <a:tc>
-                  <a:txBody>
-                    <a:bodyPr/>
-                    <a:lstStyle/>
-                    <a:p>
-                      <a:pPr algn="l" fontAlgn="b">
-                        <a:buNone/>
-                      </a:pPr>
-                      <a:r>
-                        <a:rPr lang="fr-FR" sz="2000" u="none" strike="noStrike">
-                          <a:effectLst/>
-                        </a:rPr>
-                        <a:t>✓ pertinent</a:t>
-                      </a:r>
-                      <a:endParaRPr lang="fr-FR" sz="2000" b="0" i="0" u="none" strike="noStrike">
-                        <a:solidFill>
-                          <a:srgbClr val="000000"/>
-                        </a:solidFill>
-                        <a:effectLst/>
-                        <a:latin typeface="Calibri" panose="020F0502020204030204" pitchFamily="34" charset="0"/>
-                      </a:endParaRPr>
-                    </a:p>
-                  </a:txBody>
-                  <a:tcPr marL="9525" marR="9525" marT="9525" marB="0" anchor="b"/>
-                </a:tc>
-                <a:extLst>
-                  <a:ext uri="{0D108BD9-81ED-4DB2-BD59-A6C34878D82A}">
-                    <a16:rowId xmlns:a16="http://schemas.microsoft.com/office/drawing/2014/main" val="1442453995"/>
-                  </a:ext>
-                </a:extLst>
-              </a:tr>
-              <a:tr h="318864">
-                <a:tc>
-                  <a:txBody>
-                    <a:bodyPr/>
-                    <a:lstStyle/>
-                    <a:p>
-                      <a:pPr algn="l" fontAlgn="b">
-                        <a:buNone/>
-                      </a:pPr>
-                      <a:r>
-                        <a:rPr lang="fr-FR" sz="2000" u="none" strike="noStrike">
-                          <a:effectLst/>
-                        </a:rPr>
-                        <a:t>9. Short bleu</a:t>
-                      </a:r>
-                      <a:endParaRPr lang="fr-FR" sz="2000" b="0" i="0" u="none" strike="noStrike">
-                        <a:solidFill>
-                          <a:srgbClr val="000000"/>
-                        </a:solidFill>
-                        <a:effectLst/>
-                        <a:latin typeface="Calibri" panose="020F0502020204030204" pitchFamily="34" charset="0"/>
-                      </a:endParaRPr>
-                    </a:p>
-                  </a:txBody>
-                  <a:tcPr marL="9525" marR="9525" marT="9525" marB="0" anchor="b"/>
-                </a:tc>
-                <a:tc>
-                  <a:txBody>
-                    <a:bodyPr/>
-                    <a:lstStyle/>
-                    <a:p>
-                      <a:pPr algn="l" fontAlgn="b">
-                        <a:buNone/>
-                      </a:pPr>
-                      <a:r>
-                        <a:rPr lang="fr-FR" sz="2000" u="none" strike="noStrike">
-                          <a:effectLst/>
-                        </a:rPr>
-                        <a:t>✗</a:t>
-                      </a:r>
-                      <a:endParaRPr lang="fr-FR" sz="2000" b="0" i="0" u="none" strike="noStrike">
-                        <a:solidFill>
-                          <a:srgbClr val="000000"/>
-                        </a:solidFill>
-                        <a:effectLst/>
-                        <a:latin typeface="Calibri" panose="020F0502020204030204" pitchFamily="34" charset="0"/>
-                      </a:endParaRPr>
-                    </a:p>
-                  </a:txBody>
-                  <a:tcPr marL="9525" marR="9525" marT="9525" marB="0" anchor="b"/>
-                </a:tc>
-                <a:extLst>
-                  <a:ext uri="{0D108BD9-81ED-4DB2-BD59-A6C34878D82A}">
-                    <a16:rowId xmlns:a16="http://schemas.microsoft.com/office/drawing/2014/main" val="2489824669"/>
-                  </a:ext>
-                </a:extLst>
-              </a:tr>
-              <a:tr h="239019">
-                <a:tc>
-                  <a:txBody>
-                    <a:bodyPr/>
-                    <a:lstStyle/>
-                    <a:p>
-                      <a:pPr algn="l" fontAlgn="b">
-                        <a:buNone/>
-                      </a:pPr>
-                      <a:r>
-                        <a:rPr lang="fr-FR" sz="2000" u="none" strike="noStrike" dirty="0">
-                          <a:effectLst/>
-                        </a:rPr>
-                        <a:t>10. Pantalon beige</a:t>
-                      </a:r>
-                      <a:endParaRPr lang="fr-FR" sz="2000" b="0" i="0" u="none" strike="noStrike" dirty="0">
-                        <a:solidFill>
-                          <a:srgbClr val="000000"/>
-                        </a:solidFill>
-                        <a:effectLst/>
-                        <a:latin typeface="Calibri" panose="020F0502020204030204" pitchFamily="34" charset="0"/>
-                      </a:endParaRPr>
-                    </a:p>
-                  </a:txBody>
-                  <a:tcPr marL="9525" marR="9525" marT="9525" marB="0" anchor="b"/>
-                </a:tc>
-                <a:tc>
-                  <a:txBody>
-                    <a:bodyPr/>
-                    <a:lstStyle/>
-                    <a:p>
-                      <a:pPr algn="l" fontAlgn="b">
-                        <a:buNone/>
-                      </a:pPr>
-                      <a:r>
-                        <a:rPr lang="fr-FR" sz="2000" u="none" strike="noStrike" dirty="0">
-                          <a:effectLst/>
-                        </a:rPr>
-                        <a:t>✗</a:t>
-                      </a:r>
-                      <a:endParaRPr lang="fr-FR" sz="2000" b="0" i="0" u="none" strike="noStrike" dirty="0">
-                        <a:solidFill>
-                          <a:srgbClr val="000000"/>
-                        </a:solidFill>
-                        <a:effectLst/>
-                        <a:latin typeface="Calibri" panose="020F0502020204030204" pitchFamily="34" charset="0"/>
-                      </a:endParaRPr>
-                    </a:p>
-                  </a:txBody>
-                  <a:tcPr marL="9525" marR="9525" marT="9525" marB="0" anchor="b"/>
-                </a:tc>
-                <a:extLst>
-                  <a:ext uri="{0D108BD9-81ED-4DB2-BD59-A6C34878D82A}">
-                    <a16:rowId xmlns:a16="http://schemas.microsoft.com/office/drawing/2014/main" val="658534855"/>
-                  </a:ext>
-                </a:extLst>
-              </a:tr>
-            </a:tbl>
-          </a:graphicData>
-        </a:graphic>
-      </p:graphicFrame>
-    </p:spTree>
-    <p:extLst>
-      <p:ext uri="{BB962C8B-B14F-4D97-AF65-F5344CB8AC3E}">
-        <p14:creationId xmlns:p14="http://schemas.microsoft.com/office/powerpoint/2010/main" val="3426587043"/>
-      </p:ext>
-    </p:extLst>
-  </p:cSld>
-  <p:clrMapOvr>
-    <a:masterClrMapping/>
-  </p:clrMapOvr>
-</p:sld>
-</file>
-
-<file path=ppt/slides/slide28.xml><?xml version="1.0" encoding="utf-8"?>
+<file path=ppt/slides/slide26.xml><?xml version="1.0" encoding="utf-8"?>
 <p:sld xmlns:a="http://schemas.openxmlformats.org/drawingml/2006/main" xmlns:r="http://schemas.openxmlformats.org/officeDocument/2006/relationships" xmlns:p="http://schemas.openxmlformats.org/presentationml/2006/main">
   <p:cSld>
     <p:spTree>
@@ -23139,7 +22149,7 @@
           <a:p>
             <a:r>
               <a:rPr lang="fr-FR" dirty="0"/>
-              <a:t>Critère métier</a:t>
+              <a:t>Critères métier</a:t>
             </a:r>
           </a:p>
         </p:txBody>
@@ -23247,7 +22257,7 @@
 </p:sld>
 </file>
 
-<file path=ppt/slides/slide29.xml><?xml version="1.0" encoding="utf-8"?>
+<file path=ppt/slides/slide27.xml><?xml version="1.0" encoding="utf-8"?>
 <p:sld xmlns:a="http://schemas.openxmlformats.org/drawingml/2006/main" xmlns:r="http://schemas.openxmlformats.org/officeDocument/2006/relationships" xmlns:p="http://schemas.openxmlformats.org/presentationml/2006/main">
   <p:cSld>
     <p:spTree>
@@ -23343,162 +22353,7 @@
 </p:sld>
 </file>
 
-<file path=ppt/slides/slide3.xml><?xml version="1.0" encoding="utf-8"?>
-<p:sld xmlns:a="http://schemas.openxmlformats.org/drawingml/2006/main" xmlns:r="http://schemas.openxmlformats.org/officeDocument/2006/relationships" xmlns:p="http://schemas.openxmlformats.org/presentationml/2006/main">
-  <p:cSld>
-    <p:spTree>
-      <p:nvGrpSpPr>
-        <p:cNvPr id="1" name="">
-          <a:extLst>
-            <a:ext uri="{FF2B5EF4-FFF2-40B4-BE49-F238E27FC236}">
-              <a16:creationId xmlns:a16="http://schemas.microsoft.com/office/drawing/2014/main" id="{92D3390E-DB1D-BD20-E2C7-BCACE1031A06}"/>
-            </a:ext>
-          </a:extLst>
-        </p:cNvPr>
-        <p:cNvGrpSpPr/>
-        <p:nvPr/>
-      </p:nvGrpSpPr>
-      <p:grpSpPr>
-        <a:xfrm>
-          <a:off x="0" y="0"/>
-          <a:ext cx="0" cy="0"/>
-          <a:chOff x="0" y="0"/>
-          <a:chExt cx="0" cy="0"/>
-        </a:xfrm>
-      </p:grpSpPr>
-      <p:sp>
-        <p:nvSpPr>
-          <p:cNvPr id="2" name="Titre 1">
-            <a:extLst>
-              <a:ext uri="{FF2B5EF4-FFF2-40B4-BE49-F238E27FC236}">
-                <a16:creationId xmlns:a16="http://schemas.microsoft.com/office/drawing/2014/main" id="{87F06571-9862-3925-3138-EA086E36E6E5}"/>
-              </a:ext>
-            </a:extLst>
-          </p:cNvPr>
-          <p:cNvSpPr>
-            <a:spLocks noGrp="1"/>
-          </p:cNvSpPr>
-          <p:nvPr>
-            <p:ph type="ctrTitle"/>
-          </p:nvPr>
-        </p:nvSpPr>
-        <p:spPr>
-          <a:xfrm>
-            <a:off x="1524000" y="349624"/>
-            <a:ext cx="9144000" cy="1809096"/>
-          </a:xfrm>
-        </p:spPr>
-        <p:txBody>
-          <a:bodyPr/>
-          <a:lstStyle/>
-          <a:p>
-            <a:r>
-              <a:rPr lang="fr-FR" dirty="0"/>
-              <a:t>Fonctionnalité centrale ciblée</a:t>
-            </a:r>
-          </a:p>
-        </p:txBody>
-      </p:sp>
-      <p:sp>
-        <p:nvSpPr>
-          <p:cNvPr id="3" name="Sous-titre 2">
-            <a:extLst>
-              <a:ext uri="{FF2B5EF4-FFF2-40B4-BE49-F238E27FC236}">
-                <a16:creationId xmlns:a16="http://schemas.microsoft.com/office/drawing/2014/main" id="{2FC90CBF-97C8-2953-EDBB-78FAD081808B}"/>
-              </a:ext>
-            </a:extLst>
-          </p:cNvPr>
-          <p:cNvSpPr>
-            <a:spLocks noGrp="1"/>
-          </p:cNvSpPr>
-          <p:nvPr>
-            <p:ph type="subTitle" idx="1"/>
-          </p:nvPr>
-        </p:nvSpPr>
-        <p:spPr>
-          <a:xfrm>
-            <a:off x="1524000" y="2530782"/>
-            <a:ext cx="9144000" cy="3388658"/>
-          </a:xfrm>
-        </p:spPr>
-        <p:txBody>
-          <a:bodyPr>
-            <a:normAutofit fontScale="92500" lnSpcReduction="20000"/>
-          </a:bodyPr>
-          <a:lstStyle/>
-          <a:p>
-            <a:r>
-              <a:rPr lang="fr-FR" b="1" dirty="0"/>
-              <a:t>Générer une liste d’articles personnalisée pour chaque utilisateur.</a:t>
-            </a:r>
-            <a:endParaRPr lang="fr-FR" dirty="0"/>
-          </a:p>
-          <a:p>
-            <a:r>
-              <a:rPr lang="fr-FR" dirty="0"/>
-              <a:t>À partir des informations disponibles sur l’utilisateur et des caractéristiques des articles, le système doit :</a:t>
-            </a:r>
-          </a:p>
-          <a:p>
-            <a:r>
-              <a:rPr lang="fr-FR" dirty="0"/>
-              <a:t>identifier les articles susceptibles de correspondre à ses préférences ;</a:t>
-            </a:r>
-          </a:p>
-          <a:p>
-            <a:r>
-              <a:rPr lang="fr-FR" dirty="0"/>
-              <a:t>classer les articles par niveau de pertinence ;</a:t>
-            </a:r>
-          </a:p>
-          <a:p>
-            <a:r>
-              <a:rPr lang="fr-FR" dirty="0"/>
-              <a:t>proposer les articles les plus pertinents à l’utilisateur.</a:t>
-            </a:r>
-          </a:p>
-          <a:p>
-            <a:r>
-              <a:rPr lang="fr-FR" b="1" dirty="0"/>
-              <a:t>Entrées</a:t>
-            </a:r>
-            <a:br>
-              <a:rPr lang="fr-FR" dirty="0"/>
-            </a:br>
-            <a:r>
-              <a:rPr lang="fr-FR" dirty="0"/>
-              <a:t>Profil utilisateur + garde robe + caractéristiques des articles</a:t>
-            </a:r>
-          </a:p>
-          <a:p>
-            <a:r>
-              <a:rPr lang="fr-FR" b="1" dirty="0"/>
-              <a:t>Sortie</a:t>
-            </a:r>
-            <a:br>
-              <a:rPr lang="fr-FR" dirty="0"/>
-            </a:br>
-            <a:r>
-              <a:rPr lang="fr-FR" dirty="0"/>
-              <a:t>Une liste d’articles recommandés, classés par pertinence.</a:t>
-            </a:r>
-          </a:p>
-        </p:txBody>
-      </p:sp>
-    </p:spTree>
-    <p:extLst>
-      <p:ext uri="{BB962C8B-B14F-4D97-AF65-F5344CB8AC3E}">
-        <p14:creationId xmlns:p14="http://schemas.microsoft.com/office/powerpoint/2010/main" val="1357774113"/>
-      </p:ext>
-    </p:extLst>
-  </p:cSld>
-  <p:clrMapOvr>
-    <a:masterClrMapping/>
-  </p:clrMapOvr>
-</p:sld>
-</file>
-
-<file path=ppt/slides/slide30.xml><?xml version="1.0" encoding="utf-8"?>
+<file path=ppt/slides/slide28.xml><?xml version="1.0" encoding="utf-8"?>
 <p:sld xmlns:a="http://schemas.openxmlformats.org/drawingml/2006/main" xmlns:r="http://schemas.openxmlformats.org/officeDocument/2006/relationships" xmlns:p="http://schemas.openxmlformats.org/presentationml/2006/main">
   <p:cSld>
     <p:spTree>
@@ -24451,7 +23306,7 @@
 </p:sld>
 </file>
 
-<file path=ppt/slides/slide31.xml><?xml version="1.0" encoding="utf-8"?>
+<file path=ppt/slides/slide29.xml><?xml version="1.0" encoding="utf-8"?>
 <p:sld xmlns:a="http://schemas.openxmlformats.org/drawingml/2006/main" xmlns:r="http://schemas.openxmlformats.org/officeDocument/2006/relationships" xmlns:p="http://schemas.openxmlformats.org/presentationml/2006/main">
   <p:cSld>
     <p:spTree>
@@ -24530,7 +23385,7 @@
           <a:p>
             <a:r>
               <a:rPr lang="fr-FR" dirty="0"/>
-              <a:t>Nous saurons si les données disponibles permettent de construire un moteur de recommandation suffisamment pertinent, quelle approche technique est exploitable et quelles sont les conditions nécessaires pour passer à un MVP</a:t>
+              <a:t>Nous saurons si les données utilisées permettent de construire un moteur de recommandation suffisamment pertinent, quelle approche technique est exploitable et quelles sont les conditions nécessaires pour passer à un MVP</a:t>
             </a:r>
           </a:p>
         </p:txBody>
@@ -24548,7 +23403,338 @@
 </p:sld>
 </file>
 
+<file path=ppt/slides/slide3.xml><?xml version="1.0" encoding="utf-8"?>
+<p:sld xmlns:a="http://schemas.openxmlformats.org/drawingml/2006/main" xmlns:r="http://schemas.openxmlformats.org/officeDocument/2006/relationships" xmlns:p="http://schemas.openxmlformats.org/presentationml/2006/main">
+  <p:cSld>
+    <p:spTree>
+      <p:nvGrpSpPr>
+        <p:cNvPr id="1" name="">
+          <a:extLst>
+            <a:ext uri="{FF2B5EF4-FFF2-40B4-BE49-F238E27FC236}">
+              <a16:creationId xmlns:a16="http://schemas.microsoft.com/office/drawing/2014/main" id="{F283213A-4121-8045-8B96-F206B6FD0C2E}"/>
+            </a:ext>
+          </a:extLst>
+        </p:cNvPr>
+        <p:cNvGrpSpPr/>
+        <p:nvPr/>
+      </p:nvGrpSpPr>
+      <p:grpSpPr>
+        <a:xfrm>
+          <a:off x="0" y="0"/>
+          <a:ext cx="0" cy="0"/>
+          <a:chOff x="0" y="0"/>
+          <a:chExt cx="0" cy="0"/>
+        </a:xfrm>
+      </p:grpSpPr>
+      <p:sp>
+        <p:nvSpPr>
+          <p:cNvPr id="2" name="Titre 1">
+            <a:extLst>
+              <a:ext uri="{FF2B5EF4-FFF2-40B4-BE49-F238E27FC236}">
+                <a16:creationId xmlns:a16="http://schemas.microsoft.com/office/drawing/2014/main" id="{98EA7BA9-DF68-23C7-47A3-65E3B1A91A4C}"/>
+              </a:ext>
+            </a:extLst>
+          </p:cNvPr>
+          <p:cNvSpPr>
+            <a:spLocks noGrp="1"/>
+          </p:cNvSpPr>
+          <p:nvPr>
+            <p:ph type="ctrTitle"/>
+          </p:nvPr>
+        </p:nvSpPr>
+        <p:spPr>
+          <a:xfrm>
+            <a:off x="1524000" y="385482"/>
+            <a:ext cx="9144000" cy="1387755"/>
+          </a:xfrm>
+        </p:spPr>
+        <p:txBody>
+          <a:bodyPr/>
+          <a:lstStyle/>
+          <a:p>
+            <a:r>
+              <a:rPr lang="fr-FR" dirty="0"/>
+              <a:t>Besoin métier</a:t>
+            </a:r>
+          </a:p>
+        </p:txBody>
+      </p:sp>
+      <p:sp>
+        <p:nvSpPr>
+          <p:cNvPr id="3" name="Sous-titre 2">
+            <a:extLst>
+              <a:ext uri="{FF2B5EF4-FFF2-40B4-BE49-F238E27FC236}">
+                <a16:creationId xmlns:a16="http://schemas.microsoft.com/office/drawing/2014/main" id="{96D39539-8546-959C-BAF4-41CED0714355}"/>
+              </a:ext>
+            </a:extLst>
+          </p:cNvPr>
+          <p:cNvSpPr>
+            <a:spLocks noGrp="1"/>
+          </p:cNvSpPr>
+          <p:nvPr>
+            <p:ph type="subTitle" idx="1"/>
+          </p:nvPr>
+        </p:nvSpPr>
+        <p:spPr>
+          <a:xfrm>
+            <a:off x="1524000" y="2138007"/>
+            <a:ext cx="9144000" cy="4334511"/>
+          </a:xfrm>
+        </p:spPr>
+        <p:txBody>
+          <a:bodyPr>
+            <a:normAutofit fontScale="92500" lnSpcReduction="20000"/>
+          </a:bodyPr>
+          <a:lstStyle/>
+          <a:p>
+            <a:r>
+              <a:rPr lang="fr-FR" b="1" dirty="0"/>
+              <a:t>Constat</a:t>
+            </a:r>
+            <a:endParaRPr lang="fr-FR" dirty="0"/>
+          </a:p>
+          <a:p>
+            <a:r>
+              <a:rPr lang="fr-FR" dirty="0"/>
+              <a:t>Les utilisateurs disposent d'un volume important de contenus/produits parmi lesquels il est difficile d'identifier rapidement ceux qui correspondent à leurs attentes.</a:t>
+            </a:r>
+          </a:p>
+          <a:p>
+            <a:endParaRPr lang="fr-FR" b="1" dirty="0"/>
+          </a:p>
+          <a:p>
+            <a:r>
+              <a:rPr lang="fr-FR" b="1" dirty="0"/>
+              <a:t>Besoin</a:t>
+            </a:r>
+            <a:endParaRPr lang="fr-FR" dirty="0"/>
+          </a:p>
+          <a:p>
+            <a:r>
+              <a:rPr lang="fr-FR" dirty="0"/>
+              <a:t>Mettre en place un outil capable de proposer automatiquement à chaque utilisateur des recommandations personnalisées à partir de son profil et de son comportement.</a:t>
+            </a:r>
+          </a:p>
+          <a:p>
+            <a:endParaRPr lang="fr-FR" b="1" dirty="0"/>
+          </a:p>
+          <a:p>
+            <a:r>
+              <a:rPr lang="fr-FR" b="1" dirty="0"/>
+              <a:t>Objectif métier</a:t>
+            </a:r>
+            <a:endParaRPr lang="fr-FR" dirty="0"/>
+          </a:p>
+          <a:p>
+            <a:r>
+              <a:rPr lang="fr-FR" dirty="0"/>
+              <a:t>Améliorer la pertinence des contenus proposés et faciliter la découverte de contenus susceptibles d'intéresser l'utilisateur.</a:t>
+            </a:r>
+          </a:p>
+          <a:p>
+            <a:endParaRPr lang="fr-FR" dirty="0"/>
+          </a:p>
+        </p:txBody>
+      </p:sp>
+    </p:spTree>
+    <p:extLst>
+      <p:ext uri="{BB962C8B-B14F-4D97-AF65-F5344CB8AC3E}">
+        <p14:creationId xmlns:p14="http://schemas.microsoft.com/office/powerpoint/2010/main" val="915999330"/>
+      </p:ext>
+    </p:extLst>
+  </p:cSld>
+  <p:clrMapOvr>
+    <a:masterClrMapping/>
+  </p:clrMapOvr>
+</p:sld>
+</file>
+
 <file path=ppt/slides/slide4.xml><?xml version="1.0" encoding="utf-8"?>
+<p:sld xmlns:a="http://schemas.openxmlformats.org/drawingml/2006/main" xmlns:r="http://schemas.openxmlformats.org/officeDocument/2006/relationships" xmlns:p="http://schemas.openxmlformats.org/presentationml/2006/main">
+  <p:cSld>
+    <p:spTree>
+      <p:nvGrpSpPr>
+        <p:cNvPr id="1" name="">
+          <a:extLst>
+            <a:ext uri="{FF2B5EF4-FFF2-40B4-BE49-F238E27FC236}">
+              <a16:creationId xmlns:a16="http://schemas.microsoft.com/office/drawing/2014/main" id="{92D3390E-DB1D-BD20-E2C7-BCACE1031A06}"/>
+            </a:ext>
+          </a:extLst>
+        </p:cNvPr>
+        <p:cNvGrpSpPr/>
+        <p:nvPr/>
+      </p:nvGrpSpPr>
+      <p:grpSpPr>
+        <a:xfrm>
+          <a:off x="0" y="0"/>
+          <a:ext cx="0" cy="0"/>
+          <a:chOff x="0" y="0"/>
+          <a:chExt cx="0" cy="0"/>
+        </a:xfrm>
+      </p:grpSpPr>
+      <p:sp>
+        <p:nvSpPr>
+          <p:cNvPr id="2" name="Titre 1">
+            <a:extLst>
+              <a:ext uri="{FF2B5EF4-FFF2-40B4-BE49-F238E27FC236}">
+                <a16:creationId xmlns:a16="http://schemas.microsoft.com/office/drawing/2014/main" id="{87F06571-9862-3925-3138-EA086E36E6E5}"/>
+              </a:ext>
+            </a:extLst>
+          </p:cNvPr>
+          <p:cNvSpPr>
+            <a:spLocks noGrp="1"/>
+          </p:cNvSpPr>
+          <p:nvPr>
+            <p:ph type="ctrTitle"/>
+          </p:nvPr>
+        </p:nvSpPr>
+        <p:spPr>
+          <a:xfrm>
+            <a:off x="1524000" y="349624"/>
+            <a:ext cx="9144000" cy="1288676"/>
+          </a:xfrm>
+        </p:spPr>
+        <p:txBody>
+          <a:bodyPr/>
+          <a:lstStyle/>
+          <a:p>
+            <a:r>
+              <a:rPr lang="fr-FR" dirty="0"/>
+              <a:t>Fonctionnalité centrale</a:t>
+            </a:r>
+          </a:p>
+        </p:txBody>
+      </p:sp>
+      <p:sp>
+        <p:nvSpPr>
+          <p:cNvPr id="3" name="Sous-titre 2">
+            <a:extLst>
+              <a:ext uri="{FF2B5EF4-FFF2-40B4-BE49-F238E27FC236}">
+                <a16:creationId xmlns:a16="http://schemas.microsoft.com/office/drawing/2014/main" id="{2FC90CBF-97C8-2953-EDBB-78FAD081808B}"/>
+              </a:ext>
+            </a:extLst>
+          </p:cNvPr>
+          <p:cNvSpPr>
+            <a:spLocks noGrp="1"/>
+          </p:cNvSpPr>
+          <p:nvPr>
+            <p:ph type="subTitle" idx="1"/>
+          </p:nvPr>
+        </p:nvSpPr>
+        <p:spPr>
+          <a:xfrm>
+            <a:off x="1524000" y="2070100"/>
+            <a:ext cx="9144000" cy="4438276"/>
+          </a:xfrm>
+        </p:spPr>
+        <p:txBody>
+          <a:bodyPr>
+            <a:normAutofit fontScale="92500" lnSpcReduction="20000"/>
+          </a:bodyPr>
+          <a:lstStyle/>
+          <a:p>
+            <a:r>
+              <a:rPr lang="fr-FR" sz="3000" b="1" dirty="0"/>
+              <a:t>Générer une liste d’articles personnalisée pour chaque utilisateur.</a:t>
+            </a:r>
+            <a:endParaRPr lang="fr-FR" sz="3000" dirty="0"/>
+          </a:p>
+          <a:p>
+            <a:r>
+              <a:rPr lang="fr-FR" u="sng" dirty="0"/>
+              <a:t>À partir des informations disponibles :</a:t>
+            </a:r>
+          </a:p>
+          <a:p>
+            <a:pPr marL="342900" indent="-342900">
+              <a:buFont typeface="Arial" panose="020B0604020202020204" pitchFamily="34" charset="0"/>
+              <a:buChar char="•"/>
+            </a:pPr>
+            <a:r>
+              <a:rPr lang="fr-FR" b="1" dirty="0"/>
+              <a:t>Identifier</a:t>
+            </a:r>
+            <a:r>
+              <a:rPr lang="fr-FR" dirty="0"/>
+              <a:t> les articles susceptibles de correspondre à ses préférences</a:t>
+            </a:r>
+          </a:p>
+          <a:p>
+            <a:pPr marL="342900" indent="-342900">
+              <a:buFont typeface="Arial" panose="020B0604020202020204" pitchFamily="34" charset="0"/>
+              <a:buChar char="•"/>
+            </a:pPr>
+            <a:r>
+              <a:rPr lang="fr-FR" b="1" dirty="0"/>
+              <a:t>Classer</a:t>
+            </a:r>
+            <a:r>
+              <a:rPr lang="fr-FR" dirty="0"/>
+              <a:t> les articles par niveau de pertinence</a:t>
+            </a:r>
+          </a:p>
+          <a:p>
+            <a:pPr marL="342900" indent="-342900">
+              <a:buFont typeface="Arial" panose="020B0604020202020204" pitchFamily="34" charset="0"/>
+              <a:buChar char="•"/>
+            </a:pPr>
+            <a:r>
+              <a:rPr lang="fr-FR" b="1" dirty="0"/>
+              <a:t>Proposer</a:t>
+            </a:r>
+            <a:r>
+              <a:rPr lang="fr-FR" dirty="0"/>
+              <a:t> les articles de façon cohérente à l’utilisateur</a:t>
+            </a:r>
+          </a:p>
+          <a:p>
+            <a:endParaRPr lang="fr-FR" b="1" dirty="0"/>
+          </a:p>
+          <a:p>
+            <a:r>
+              <a:rPr lang="fr-FR" b="1" dirty="0"/>
+              <a:t>Entrées</a:t>
+            </a:r>
+            <a:br>
+              <a:rPr lang="fr-FR" dirty="0"/>
+            </a:br>
+            <a:r>
+              <a:rPr lang="fr-FR" dirty="0"/>
+              <a:t>Profil utilisateur + garde robe + caractéristiques des articles (catalogue)</a:t>
+            </a:r>
+          </a:p>
+          <a:p>
+            <a:endParaRPr lang="fr-FR" b="1" dirty="0"/>
+          </a:p>
+          <a:p>
+            <a:r>
+              <a:rPr lang="fr-FR" b="1" dirty="0"/>
+              <a:t>Sortie</a:t>
+            </a:r>
+            <a:br>
+              <a:rPr lang="fr-FR" dirty="0"/>
+            </a:br>
+            <a:r>
+              <a:rPr lang="fr-FR" dirty="0"/>
+              <a:t>Une liste d’articles recommandés, classés par pertinence.</a:t>
+            </a:r>
+          </a:p>
+        </p:txBody>
+      </p:sp>
+    </p:spTree>
+    <p:extLst>
+      <p:ext uri="{BB962C8B-B14F-4D97-AF65-F5344CB8AC3E}">
+        <p14:creationId xmlns:p14="http://schemas.microsoft.com/office/powerpoint/2010/main" val="1357774113"/>
+      </p:ext>
+    </p:extLst>
+  </p:cSld>
+  <p:clrMapOvr>
+    <a:masterClrMapping/>
+  </p:clrMapOvr>
+</p:sld>
+</file>
+
+<file path=ppt/slides/slide5.xml><?xml version="1.0" encoding="utf-8"?>
 <p:sld xmlns:a="http://schemas.openxmlformats.org/drawingml/2006/main" xmlns:r="http://schemas.openxmlformats.org/officeDocument/2006/relationships" xmlns:p="http://schemas.openxmlformats.org/presentationml/2006/main">
   <p:cSld>
     <p:spTree>
@@ -24638,7 +23824,7 @@
           <a:lstStyle/>
           <a:p>
             <a:r>
-              <a:rPr lang="fr-FR" b="1" dirty="0" err="1"/>
+              <a:rPr lang="fr-FR" sz="4000" b="1" dirty="0" err="1"/>
               <a:t>PoC</a:t>
             </a:r>
             <a:endParaRPr lang="fr-FR" b="1" dirty="0"/>
@@ -24710,7 +23896,7 @@
         </p:spPr>
         <p:txBody>
           <a:bodyPr vert="horz" lIns="91440" tIns="45720" rIns="91440" bIns="45720" rtlCol="0">
-            <a:normAutofit lnSpcReduction="10000"/>
+            <a:normAutofit/>
           </a:bodyPr>
           <a:lstStyle>
             <a:lvl1pPr marL="0" indent="0" algn="ctr" defTabSz="914400" rtl="0" eaLnBrk="1" latinLnBrk="0" hangingPunct="1">
@@ -24878,14 +24064,14 @@
           </a:lstStyle>
           <a:p>
             <a:r>
-              <a:rPr lang="fr-FR" b="1" dirty="0"/>
+              <a:rPr lang="fr-FR" sz="4000" b="1" dirty="0"/>
               <a:t>Hors </a:t>
             </a:r>
             <a:r>
-              <a:rPr lang="fr-FR" b="1" dirty="0" err="1"/>
+              <a:rPr lang="fr-FR" sz="4000" b="1" dirty="0" err="1"/>
               <a:t>PoC</a:t>
             </a:r>
-            <a:endParaRPr lang="fr-FR" b="1" dirty="0"/>
+            <a:endParaRPr lang="fr-FR" sz="4000" b="1" dirty="0"/>
           </a:p>
           <a:p>
             <a:pPr marL="342900" indent="-342900" algn="r">
@@ -24904,7 +24090,7 @@
             </a:pPr>
             <a:r>
               <a:rPr lang="fr-FR" dirty="0"/>
-              <a:t>Conception de l'interface utilisateur</a:t>
+              <a:t>Gestion des comptes et Authentification</a:t>
             </a:r>
           </a:p>
           <a:p>
@@ -24914,17 +24100,7 @@
             </a:pPr>
             <a:r>
               <a:rPr lang="fr-FR" dirty="0"/>
-              <a:t>Gestion des comptes et de l'authentification</a:t>
-            </a:r>
-          </a:p>
-          <a:p>
-            <a:pPr marL="342900" indent="-342900" algn="r">
-              <a:buFont typeface="Arial" panose="020B0604020202020204" pitchFamily="34" charset="0"/>
-              <a:buChar char="•"/>
-            </a:pPr>
-            <a:r>
-              <a:rPr lang="fr-FR" dirty="0"/>
-              <a:t>Développement de l'ensemble des fonctionnalités métier</a:t>
+              <a:t>Développement des fonctionnalités métier</a:t>
             </a:r>
           </a:p>
           <a:p>
@@ -24979,7 +24155,7 @@
 </p:sld>
 </file>
 
-<file path=ppt/slides/slide5.xml><?xml version="1.0" encoding="utf-8"?>
+<file path=ppt/slides/slide6.xml><?xml version="1.0" encoding="utf-8"?>
 <p:sld xmlns:a="http://schemas.openxmlformats.org/drawingml/2006/main" xmlns:r="http://schemas.openxmlformats.org/officeDocument/2006/relationships" xmlns:p="http://schemas.openxmlformats.org/presentationml/2006/main">
   <p:cSld>
     <p:spTree>
@@ -25016,7 +24192,7 @@
         </p:nvSpPr>
         <p:spPr>
           <a:xfrm>
-            <a:off x="7848600" y="1358844"/>
+            <a:off x="7848600" y="1523944"/>
             <a:ext cx="4231192" cy="5031111"/>
           </a:xfrm>
           <a:prstGeom prst="rect">
@@ -25071,7 +24247,7 @@
         </p:nvSpPr>
         <p:spPr>
           <a:xfrm rot="16200000">
-            <a:off x="371320" y="3386009"/>
+            <a:off x="371320" y="3551109"/>
             <a:ext cx="1084881" cy="775206"/>
           </a:xfrm>
           <a:prstGeom prst="downArrow">
@@ -25122,7 +24298,7 @@
         </p:nvGrpSpPr>
         <p:grpSpPr>
           <a:xfrm>
-            <a:off x="1805006" y="5246955"/>
+            <a:off x="1805006" y="5412055"/>
             <a:ext cx="4437036" cy="1143000"/>
             <a:chOff x="108488" y="2654511"/>
             <a:chExt cx="4230392" cy="2060359"/>
@@ -25178,7 +24354,7 @@
               <a:pPr algn="ctr"/>
               <a:r>
                 <a:rPr lang="fr-FR" sz="2800" dirty="0"/>
-                <a:t>Contexte</a:t>
+                <a:t>(Contexte)</a:t>
               </a:r>
             </a:p>
           </p:txBody>
@@ -25247,7 +24423,7 @@
         </p:nvGrpSpPr>
         <p:grpSpPr>
           <a:xfrm>
-            <a:off x="1805006" y="2970692"/>
+            <a:off x="1805006" y="3135792"/>
             <a:ext cx="4437036" cy="2065856"/>
             <a:chOff x="6096000" y="2620069"/>
             <a:chExt cx="4230392" cy="3893801"/>
@@ -25527,7 +24703,7 @@
         </p:nvGrpSpPr>
         <p:grpSpPr>
           <a:xfrm>
-            <a:off x="1805006" y="1358844"/>
+            <a:off x="1805006" y="1523944"/>
             <a:ext cx="4437036" cy="1401442"/>
             <a:chOff x="108488" y="2654511"/>
             <a:chExt cx="4230392" cy="2526224"/>
@@ -25737,7 +24913,7 @@
         </p:nvSpPr>
         <p:spPr>
           <a:xfrm>
-            <a:off x="6511402" y="2501062"/>
+            <a:off x="6511402" y="2666162"/>
             <a:ext cx="1187557" cy="523220"/>
           </a:xfrm>
           <a:prstGeom prst="rect">
@@ -25773,7 +24949,7 @@
         </p:nvSpPr>
         <p:spPr>
           <a:xfrm rot="16200000">
-            <a:off x="6610237" y="3386008"/>
+            <a:off x="6610237" y="3551108"/>
             <a:ext cx="1084881" cy="775206"/>
           </a:xfrm>
           <a:prstGeom prst="downArrow">
@@ -25824,7 +25000,7 @@
         </p:nvSpPr>
         <p:spPr>
           <a:xfrm>
-            <a:off x="8063313" y="2584031"/>
+            <a:off x="8063313" y="2749131"/>
             <a:ext cx="3772600" cy="479757"/>
           </a:xfrm>
           <a:prstGeom prst="roundRect">
@@ -25873,7 +25049,7 @@
         </p:nvSpPr>
         <p:spPr>
           <a:xfrm>
-            <a:off x="8063313" y="3299634"/>
+            <a:off x="8063313" y="3464734"/>
             <a:ext cx="3772600" cy="479757"/>
           </a:xfrm>
           <a:prstGeom prst="roundRect">
@@ -25922,7 +25098,7 @@
         </p:nvSpPr>
         <p:spPr>
           <a:xfrm>
-            <a:off x="8063313" y="3952577"/>
+            <a:off x="8063313" y="4117677"/>
             <a:ext cx="3772600" cy="479757"/>
           </a:xfrm>
           <a:prstGeom prst="roundRect">
@@ -25971,7 +25147,7 @@
         </p:nvSpPr>
         <p:spPr>
           <a:xfrm>
-            <a:off x="8063313" y="4678399"/>
+            <a:off x="8063313" y="4843499"/>
             <a:ext cx="3772600" cy="479757"/>
           </a:xfrm>
           <a:prstGeom prst="roundRect">
@@ -26036,7 +25212,50 @@
           <a:p>
             <a:r>
               <a:rPr lang="fr-FR" sz="5400" dirty="0"/>
-              <a:t>Traduction du besoin en problème ML/IA</a:t>
+              <a:t>Besoin =&gt; Problème ML</a:t>
+            </a:r>
+          </a:p>
+        </p:txBody>
+      </p:sp>
+      <p:sp>
+        <p:nvSpPr>
+          <p:cNvPr id="3" name="ZoneTexte 2">
+            <a:extLst>
+              <a:ext uri="{FF2B5EF4-FFF2-40B4-BE49-F238E27FC236}">
+                <a16:creationId xmlns:a16="http://schemas.microsoft.com/office/drawing/2014/main" id="{E3839169-162B-6743-4B2B-2C900371E8D2}"/>
+              </a:ext>
+            </a:extLst>
+          </p:cNvPr>
+          <p:cNvSpPr txBox="1"/>
+          <p:nvPr/>
+        </p:nvSpPr>
+        <p:spPr>
+          <a:xfrm>
+            <a:off x="393213" y="899931"/>
+            <a:ext cx="12538926" cy="369332"/>
+          </a:xfrm>
+          <a:prstGeom prst="rect">
+            <a:avLst/>
+          </a:prstGeom>
+          <a:noFill/>
+        </p:spPr>
+        <p:txBody>
+          <a:bodyPr wrap="square">
+            <a:spAutoFit/>
+          </a:bodyPr>
+          <a:lstStyle/>
+          <a:p>
+            <a:r>
+              <a:rPr lang="fr-FR" dirty="0"/>
+              <a:t>Prédire la pertinence des articles d’un utilisateur, puis classer les articles afin de sélectionner les </a:t>
+            </a:r>
+            <a:r>
+              <a:rPr lang="fr-FR" b="1" dirty="0"/>
+              <a:t>Top N recommandations</a:t>
+            </a:r>
+            <a:r>
+              <a:rPr lang="fr-FR" dirty="0"/>
+              <a:t>.</a:t>
             </a:r>
           </a:p>
         </p:txBody>
@@ -26054,7 +25273,7 @@
 </p:sld>
 </file>
 
-<file path=ppt/slides/slide6.xml><?xml version="1.0" encoding="utf-8"?>
+<file path=ppt/slides/slide7.xml><?xml version="1.0" encoding="utf-8"?>
 <p:sld xmlns:a="http://schemas.openxmlformats.org/drawingml/2006/main" xmlns:r="http://schemas.openxmlformats.org/officeDocument/2006/relationships" xmlns:p="http://schemas.openxmlformats.org/presentationml/2006/main">
   <p:cSld>
     <p:spTree>
@@ -26707,7 +25926,7 @@
           <a:p>
             <a:r>
               <a:rPr lang="fr-FR" sz="5400" dirty="0"/>
-              <a:t>Données disponibles</a:t>
+              <a:t>Données nécessaires et disponibles</a:t>
             </a:r>
           </a:p>
         </p:txBody>
@@ -26716,365 +25935,6 @@
     <p:extLst>
       <p:ext uri="{BB962C8B-B14F-4D97-AF65-F5344CB8AC3E}">
         <p14:creationId xmlns:p14="http://schemas.microsoft.com/office/powerpoint/2010/main" val="3154111157"/>
-      </p:ext>
-    </p:extLst>
-  </p:cSld>
-  <p:clrMapOvr>
-    <a:masterClrMapping/>
-  </p:clrMapOvr>
-</p:sld>
-</file>
-
-<file path=ppt/slides/slide7.xml><?xml version="1.0" encoding="utf-8"?>
-<p:sld xmlns:a="http://schemas.openxmlformats.org/drawingml/2006/main" xmlns:r="http://schemas.openxmlformats.org/officeDocument/2006/relationships" xmlns:p="http://schemas.openxmlformats.org/presentationml/2006/main">
-  <p:cSld>
-    <p:spTree>
-      <p:nvGrpSpPr>
-        <p:cNvPr id="1" name="">
-          <a:extLst>
-            <a:ext uri="{FF2B5EF4-FFF2-40B4-BE49-F238E27FC236}">
-              <a16:creationId xmlns:a16="http://schemas.microsoft.com/office/drawing/2014/main" id="{4298353F-0C62-5EE9-E8FD-11AA0F72F055}"/>
-            </a:ext>
-          </a:extLst>
-        </p:cNvPr>
-        <p:cNvGrpSpPr/>
-        <p:nvPr/>
-      </p:nvGrpSpPr>
-      <p:grpSpPr>
-        <a:xfrm>
-          <a:off x="0" y="0"/>
-          <a:ext cx="0" cy="0"/>
-          <a:chOff x="0" y="0"/>
-          <a:chExt cx="0" cy="0"/>
-        </a:xfrm>
-      </p:grpSpPr>
-      <p:grpSp>
-        <p:nvGrpSpPr>
-          <p:cNvPr id="29" name="Groupe 28">
-            <a:extLst>
-              <a:ext uri="{FF2B5EF4-FFF2-40B4-BE49-F238E27FC236}">
-                <a16:creationId xmlns:a16="http://schemas.microsoft.com/office/drawing/2014/main" id="{4AEFB941-9873-6512-ED95-D5F1FCE80961}"/>
-              </a:ext>
-            </a:extLst>
-          </p:cNvPr>
-          <p:cNvGrpSpPr/>
-          <p:nvPr/>
-        </p:nvGrpSpPr>
-        <p:grpSpPr>
-          <a:xfrm>
-            <a:off x="1464516" y="1236866"/>
-            <a:ext cx="10147382" cy="5323753"/>
-            <a:chOff x="1562838" y="1433511"/>
-            <a:chExt cx="10147382" cy="5323753"/>
-          </a:xfrm>
-        </p:grpSpPr>
-        <p:pic>
-          <p:nvPicPr>
-            <p:cNvPr id="12" name="Image 11">
-              <a:extLst>
-                <a:ext uri="{FF2B5EF4-FFF2-40B4-BE49-F238E27FC236}">
-                  <a16:creationId xmlns:a16="http://schemas.microsoft.com/office/drawing/2014/main" id="{F59DEDB4-7E62-BCDF-C6BD-EB18A701416E}"/>
-                </a:ext>
-              </a:extLst>
-            </p:cNvPr>
-            <p:cNvPicPr>
-              <a:picLocks noChangeAspect="1"/>
-            </p:cNvPicPr>
-            <p:nvPr/>
-          </p:nvPicPr>
-          <p:blipFill>
-            <a:blip r:embed="rId3"/>
-            <a:stretch>
-              <a:fillRect/>
-            </a:stretch>
-          </p:blipFill>
-          <p:spPr>
-            <a:xfrm>
-              <a:off x="2340616" y="1433511"/>
-              <a:ext cx="7687748" cy="1619476"/>
-            </a:xfrm>
-            <a:prstGeom prst="rect">
-              <a:avLst/>
-            </a:prstGeom>
-          </p:spPr>
-        </p:pic>
-        <p:pic>
-          <p:nvPicPr>
-            <p:cNvPr id="16" name="Image 15">
-              <a:extLst>
-                <a:ext uri="{FF2B5EF4-FFF2-40B4-BE49-F238E27FC236}">
-                  <a16:creationId xmlns:a16="http://schemas.microsoft.com/office/drawing/2014/main" id="{7B7A4844-8AF8-FF09-1368-1F49146CC664}"/>
-                </a:ext>
-              </a:extLst>
-            </p:cNvPr>
-            <p:cNvPicPr>
-              <a:picLocks noChangeAspect="1"/>
-            </p:cNvPicPr>
-            <p:nvPr/>
-          </p:nvPicPr>
-          <p:blipFill>
-            <a:blip r:embed="rId4"/>
-            <a:stretch>
-              <a:fillRect/>
-            </a:stretch>
-          </p:blipFill>
-          <p:spPr>
-            <a:xfrm>
-              <a:off x="2780837" y="3316210"/>
-              <a:ext cx="6563641" cy="514422"/>
-            </a:xfrm>
-            <a:prstGeom prst="rect">
-              <a:avLst/>
-            </a:prstGeom>
-          </p:spPr>
-        </p:pic>
-        <p:sp>
-          <p:nvSpPr>
-            <p:cNvPr id="17" name="ZoneTexte 16">
-              <a:extLst>
-                <a:ext uri="{FF2B5EF4-FFF2-40B4-BE49-F238E27FC236}">
-                  <a16:creationId xmlns:a16="http://schemas.microsoft.com/office/drawing/2014/main" id="{3299F656-17F3-49FB-16AE-D181D0444498}"/>
-                </a:ext>
-              </a:extLst>
-            </p:cNvPr>
-            <p:cNvSpPr txBox="1"/>
-            <p:nvPr/>
-          </p:nvSpPr>
-          <p:spPr>
-            <a:xfrm>
-              <a:off x="1562839" y="2786947"/>
-              <a:ext cx="777777" cy="1323439"/>
-            </a:xfrm>
-            <a:prstGeom prst="rect">
-              <a:avLst/>
-            </a:prstGeom>
-            <a:noFill/>
-          </p:spPr>
-          <p:txBody>
-            <a:bodyPr wrap="none" rtlCol="0">
-              <a:spAutoFit/>
-            </a:bodyPr>
-            <a:lstStyle/>
-            <a:p>
-              <a:r>
-                <a:rPr lang="fr-FR" sz="8000" dirty="0"/>
-                <a:t>A</a:t>
-              </a:r>
-            </a:p>
-          </p:txBody>
-        </p:sp>
-        <p:sp>
-          <p:nvSpPr>
-            <p:cNvPr id="18" name="ZoneTexte 17">
-              <a:extLst>
-                <a:ext uri="{FF2B5EF4-FFF2-40B4-BE49-F238E27FC236}">
-                  <a16:creationId xmlns:a16="http://schemas.microsoft.com/office/drawing/2014/main" id="{3822EFF6-36B5-99B1-88D1-2869BB67B250}"/>
-                </a:ext>
-              </a:extLst>
-            </p:cNvPr>
-            <p:cNvSpPr txBox="1"/>
-            <p:nvPr/>
-          </p:nvSpPr>
-          <p:spPr>
-            <a:xfrm>
-              <a:off x="1562838" y="4110386"/>
-              <a:ext cx="742511" cy="1323439"/>
-            </a:xfrm>
-            <a:prstGeom prst="rect">
-              <a:avLst/>
-            </a:prstGeom>
-            <a:noFill/>
-          </p:spPr>
-          <p:txBody>
-            <a:bodyPr wrap="none" rtlCol="0">
-              <a:spAutoFit/>
-            </a:bodyPr>
-            <a:lstStyle/>
-            <a:p>
-              <a:r>
-                <a:rPr lang="fr-FR" sz="8000" dirty="0"/>
-                <a:t>B</a:t>
-              </a:r>
-            </a:p>
-          </p:txBody>
-        </p:sp>
-        <p:sp>
-          <p:nvSpPr>
-            <p:cNvPr id="19" name="ZoneTexte 18">
-              <a:extLst>
-                <a:ext uri="{FF2B5EF4-FFF2-40B4-BE49-F238E27FC236}">
-                  <a16:creationId xmlns:a16="http://schemas.microsoft.com/office/drawing/2014/main" id="{472D02C5-94A0-4538-9506-ABFA1ECFBC85}"/>
-                </a:ext>
-              </a:extLst>
-            </p:cNvPr>
-            <p:cNvSpPr txBox="1"/>
-            <p:nvPr/>
-          </p:nvSpPr>
-          <p:spPr>
-            <a:xfrm>
-              <a:off x="1562838" y="5433825"/>
-              <a:ext cx="731290" cy="1323439"/>
-            </a:xfrm>
-            <a:prstGeom prst="rect">
-              <a:avLst/>
-            </a:prstGeom>
-            <a:noFill/>
-          </p:spPr>
-          <p:txBody>
-            <a:bodyPr wrap="none" rtlCol="0">
-              <a:spAutoFit/>
-            </a:bodyPr>
-            <a:lstStyle/>
-            <a:p>
-              <a:r>
-                <a:rPr lang="fr-FR" sz="8000" dirty="0"/>
-                <a:t>C</a:t>
-              </a:r>
-            </a:p>
-          </p:txBody>
-        </p:sp>
-        <p:pic>
-          <p:nvPicPr>
-            <p:cNvPr id="23" name="Image 22">
-              <a:extLst>
-                <a:ext uri="{FF2B5EF4-FFF2-40B4-BE49-F238E27FC236}">
-                  <a16:creationId xmlns:a16="http://schemas.microsoft.com/office/drawing/2014/main" id="{5E838A26-D150-B4AF-1F26-09A1D5D87100}"/>
-                </a:ext>
-              </a:extLst>
-            </p:cNvPr>
-            <p:cNvPicPr>
-              <a:picLocks noChangeAspect="1"/>
-            </p:cNvPicPr>
-            <p:nvPr/>
-          </p:nvPicPr>
-          <p:blipFill>
-            <a:blip r:embed="rId5"/>
-            <a:stretch>
-              <a:fillRect/>
-            </a:stretch>
-          </p:blipFill>
-          <p:spPr>
-            <a:xfrm>
-              <a:off x="2629519" y="4391052"/>
-              <a:ext cx="6706536" cy="762106"/>
-            </a:xfrm>
-            <a:prstGeom prst="rect">
-              <a:avLst/>
-            </a:prstGeom>
-          </p:spPr>
-        </p:pic>
-        <p:pic>
-          <p:nvPicPr>
-            <p:cNvPr id="25" name="Image 24">
-              <a:extLst>
-                <a:ext uri="{FF2B5EF4-FFF2-40B4-BE49-F238E27FC236}">
-                  <a16:creationId xmlns:a16="http://schemas.microsoft.com/office/drawing/2014/main" id="{185736D2-10CB-C2CA-E851-E62970EA0A34}"/>
-                </a:ext>
-              </a:extLst>
-            </p:cNvPr>
-            <p:cNvPicPr>
-              <a:picLocks noChangeAspect="1"/>
-            </p:cNvPicPr>
-            <p:nvPr/>
-          </p:nvPicPr>
-          <p:blipFill>
-            <a:blip r:embed="rId6"/>
-            <a:stretch>
-              <a:fillRect/>
-            </a:stretch>
-          </p:blipFill>
-          <p:spPr>
-            <a:xfrm>
-              <a:off x="2852284" y="5747955"/>
-              <a:ext cx="6420746" cy="581106"/>
-            </a:xfrm>
-            <a:prstGeom prst="rect">
-              <a:avLst/>
-            </a:prstGeom>
-          </p:spPr>
-        </p:pic>
-        <p:sp>
-          <p:nvSpPr>
-            <p:cNvPr id="26" name="ZoneTexte 25">
-              <a:extLst>
-                <a:ext uri="{FF2B5EF4-FFF2-40B4-BE49-F238E27FC236}">
-                  <a16:creationId xmlns:a16="http://schemas.microsoft.com/office/drawing/2014/main" id="{82A6F886-BC87-FB22-5B06-6FE99E1B4753}"/>
-                </a:ext>
-              </a:extLst>
-            </p:cNvPr>
-            <p:cNvSpPr txBox="1"/>
-            <p:nvPr/>
-          </p:nvSpPr>
-          <p:spPr>
-            <a:xfrm>
-              <a:off x="9586452" y="5756990"/>
-              <a:ext cx="2123768" cy="584775"/>
-            </a:xfrm>
-            <a:prstGeom prst="rect">
-              <a:avLst/>
-            </a:prstGeom>
-            <a:noFill/>
-          </p:spPr>
-          <p:txBody>
-            <a:bodyPr wrap="square" rtlCol="0">
-              <a:spAutoFit/>
-            </a:bodyPr>
-            <a:lstStyle/>
-            <a:p>
-              <a:r>
-                <a:rPr lang="fr-FR" sz="1600" i="1" dirty="0">
-                  <a:solidFill>
-                    <a:schemeClr val="accent1">
-                      <a:lumMod val="75000"/>
-                    </a:schemeClr>
-                  </a:solidFill>
-                </a:rPr>
-                <a:t>[En fonction du coût Temps/Investissement]</a:t>
-              </a:r>
-            </a:p>
-          </p:txBody>
-        </p:sp>
-      </p:grpSp>
-      <p:sp>
-        <p:nvSpPr>
-          <p:cNvPr id="28" name="ZoneTexte 27">
-            <a:extLst>
-              <a:ext uri="{FF2B5EF4-FFF2-40B4-BE49-F238E27FC236}">
-                <a16:creationId xmlns:a16="http://schemas.microsoft.com/office/drawing/2014/main" id="{3741F6B8-F8A1-EE21-B5D7-DB68F996996A}"/>
-              </a:ext>
-            </a:extLst>
-          </p:cNvPr>
-          <p:cNvSpPr txBox="1"/>
-          <p:nvPr/>
-        </p:nvSpPr>
-        <p:spPr>
-          <a:xfrm>
-            <a:off x="245806" y="194782"/>
-            <a:ext cx="11631562" cy="584775"/>
-          </a:xfrm>
-          <a:prstGeom prst="rect">
-            <a:avLst/>
-          </a:prstGeom>
-          <a:noFill/>
-        </p:spPr>
-        <p:txBody>
-          <a:bodyPr wrap="square">
-            <a:spAutoFit/>
-          </a:bodyPr>
-          <a:lstStyle/>
-          <a:p>
-            <a:pPr algn="ctr"/>
-            <a:r>
-              <a:rPr lang="fr-FR" sz="3200" dirty="0"/>
-              <a:t>Limiter les catégories (Valeur / Représentativité)</a:t>
-            </a:r>
-          </a:p>
-        </p:txBody>
-      </p:sp>
-    </p:spTree>
-    <p:extLst>
-      <p:ext uri="{BB962C8B-B14F-4D97-AF65-F5344CB8AC3E}">
-        <p14:creationId xmlns:p14="http://schemas.microsoft.com/office/powerpoint/2010/main" val="1443829722"/>
       </p:ext>
     </p:extLst>
   </p:cSld>
